--- a/apps/web/public/portfolio.pptx
+++ b/apps/web/public/portfolio.pptx
@@ -2434,7 +2434,7 @@
                 <a:ea typeface="Malgun Gothic" pitchFamily="34" charset="-122"/>
                 <a:cs typeface="Malgun Gothic" pitchFamily="34" charset="-120"/>
               </a:rPr>
-              <a:t>매장 주문 및 결제를 관리하는 운영 시스템 유지보수</a:t>
+              <a:t>매장 주문·결제 운영 시스템 유지보수 및 결제 프로세스 안정화</a:t>
             </a:r>
             <a:endParaRPr lang="en-US" sz="1100" dirty="0"/>
           </a:p>
@@ -2602,23 +2602,23 @@
         <p:spPr>
           <a:xfrm>
             <a:off x="594360" y="1700784"/>
-            <a:ext cx="5943600" cy="1005840"/>
-          </a:xfrm>
-          <a:prstGeom prst="rect">
-            <a:avLst/>
-          </a:prstGeom>
-          <a:noFill/>
-          <a:ln/>
-        </p:spPr>
-        <p:txBody>
-          <a:bodyPr wrap="square" rtlCol="0" anchor="ctr"/>
-          <a:lstStyle/>
-          <a:p>
-            <a:pPr indent="0" marL="0">
-              <a:buNone/>
-            </a:pPr>
-            <a:r>
-              <a:rPr lang="en-US" sz="1250" dirty="0">
+            <a:ext cx="5943600" cy="804672"/>
+          </a:xfrm>
+          <a:prstGeom prst="rect">
+            <a:avLst/>
+          </a:prstGeom>
+          <a:noFill/>
+          <a:ln/>
+        </p:spPr>
+        <p:txBody>
+          <a:bodyPr wrap="square" rtlCol="0" anchor="ctr"/>
+          <a:lstStyle/>
+          <a:p>
+            <a:pPr indent="0" marL="0">
+              <a:buNone/>
+            </a:pPr>
+            <a:r>
+              <a:rPr lang="en-US" sz="1200" dirty="0">
                 <a:solidFill>
                   <a:srgbClr val="F5F5F7"/>
                 </a:solidFill>
@@ -2628,7 +2628,7 @@
               </a:rPr>
               <a:t>오프라인 PG 연동 결제 프로세스에서 예외 상황이 빈번히 발생. 결제 승인 후 취소 시 정산 데이터 불일치 문제.</a:t>
             </a:r>
-            <a:endParaRPr lang="en-US" sz="1250" dirty="0"/>
+            <a:endParaRPr lang="en-US" sz="1200" dirty="0"/>
           </a:p>
         </p:txBody>
       </p:sp>
@@ -2640,8 +2640,8 @@
         </p:nvSpPr>
         <p:spPr>
           <a:xfrm>
-            <a:off x="594360" y="2761488"/>
-            <a:ext cx="365760" cy="329184"/>
+            <a:off x="594360" y="2560320"/>
+            <a:ext cx="365760" cy="292608"/>
           </a:xfrm>
           <a:prstGeom prst="rect">
             <a:avLst/>
@@ -2657,7 +2657,7 @@
               <a:buNone/>
             </a:pPr>
             <a:r>
-              <a:rPr lang="en-US" sz="1800" dirty="0">
+              <a:rPr lang="en-US" sz="1600" dirty="0">
                 <a:solidFill>
                   <a:srgbClr val="48484F"/>
                 </a:solidFill>
@@ -2667,7 +2667,7 @@
               </a:rPr>
               <a:t>↓</a:t>
             </a:r>
-            <a:endParaRPr lang="en-US" sz="1800" dirty="0"/>
+            <a:endParaRPr lang="en-US" sz="1600" dirty="0"/>
           </a:p>
         </p:txBody>
       </p:sp>
@@ -2679,7 +2679,7 @@
         </p:nvSpPr>
         <p:spPr>
           <a:xfrm>
-            <a:off x="502920" y="3145536"/>
+            <a:off x="502920" y="2889504"/>
             <a:ext cx="6126480" cy="256032"/>
           </a:xfrm>
           <a:prstGeom prst="rect">
@@ -2704,7 +2704,7 @@
         </p:nvSpPr>
         <p:spPr>
           <a:xfrm>
-            <a:off x="594360" y="3163824"/>
+            <a:off x="594360" y="2907792"/>
             <a:ext cx="5943600" cy="219456"/>
           </a:xfrm>
           <a:prstGeom prst="rect">
@@ -2743,8 +2743,8 @@
         </p:nvSpPr>
         <p:spPr>
           <a:xfrm>
-            <a:off x="594360" y="3493008"/>
-            <a:ext cx="5943600" cy="594360"/>
+            <a:off x="594360" y="3218688"/>
+            <a:ext cx="5943600" cy="566928"/>
           </a:xfrm>
           <a:prstGeom prst="rect">
             <a:avLst/>
@@ -2782,8 +2782,8 @@
         </p:nvSpPr>
         <p:spPr>
           <a:xfrm>
-            <a:off x="594360" y="4151376"/>
-            <a:ext cx="5943600" cy="594360"/>
+            <a:off x="594360" y="3840480"/>
+            <a:ext cx="5943600" cy="566928"/>
           </a:xfrm>
           <a:prstGeom prst="rect">
             <a:avLst/>
@@ -2821,8 +2821,300 @@
         </p:nvSpPr>
         <p:spPr>
           <a:xfrm>
-            <a:off x="502920" y="6144768"/>
-            <a:ext cx="6126480" cy="384048"/>
+            <a:off x="594360" y="4535424"/>
+            <a:ext cx="5943600" cy="10973"/>
+          </a:xfrm>
+          <a:prstGeom prst="rect">
+            <a:avLst/>
+          </a:prstGeom>
+          <a:solidFill>
+            <a:srgbClr val="18181F"/>
+          </a:solidFill>
+          <a:ln w="12700">
+            <a:solidFill>
+              <a:srgbClr val="18181F"/>
+            </a:solidFill>
+            <a:prstDash val="solid"/>
+          </a:ln>
+        </p:spPr>
+      </p:sp>
+      <p:sp>
+        <p:nvSpPr>
+          <p:cNvPr id="18" name="Shape 16"/>
+          <p:cNvSpPr/>
+          <p:nvPr/>
+        </p:nvSpPr>
+        <p:spPr>
+          <a:xfrm>
+            <a:off x="502920" y="4626864"/>
+            <a:ext cx="6126480" cy="237744"/>
+          </a:xfrm>
+          <a:prstGeom prst="rect">
+            <a:avLst/>
+          </a:prstGeom>
+          <a:solidFill>
+            <a:srgbClr val="0A0A1A"/>
+          </a:solidFill>
+          <a:ln w="12700">
+            <a:solidFill>
+              <a:srgbClr val="0A0A1A"/>
+            </a:solidFill>
+            <a:prstDash val="solid"/>
+          </a:ln>
+        </p:spPr>
+      </p:sp>
+      <p:sp>
+        <p:nvSpPr>
+          <p:cNvPr id="19" name="Text 17"/>
+          <p:cNvSpPr/>
+          <p:nvPr/>
+        </p:nvSpPr>
+        <p:spPr>
+          <a:xfrm>
+            <a:off x="594360" y="4645152"/>
+            <a:ext cx="5943600" cy="201168"/>
+          </a:xfrm>
+          <a:prstGeom prst="rect">
+            <a:avLst/>
+          </a:prstGeom>
+          <a:noFill/>
+          <a:ln/>
+        </p:spPr>
+        <p:txBody>
+          <a:bodyPr wrap="square" rtlCol="0" anchor="ctr"/>
+          <a:lstStyle/>
+          <a:p>
+            <a:pPr indent="0" marL="0">
+              <a:buNone/>
+            </a:pPr>
+            <a:r>
+              <a:rPr lang="en-US" sz="800" b="1" spc="150" kern="0" dirty="0">
+                <a:solidFill>
+                  <a:srgbClr val="A5B4FC"/>
+                </a:solidFill>
+                <a:latin typeface="Malgun Gothic" pitchFamily="34" charset="0"/>
+                <a:ea typeface="Malgun Gothic" pitchFamily="34" charset="-122"/>
+                <a:cs typeface="Malgun Gothic" pitchFamily="34" charset="-120"/>
+              </a:rPr>
+              <a:t>📋  담당 업무</a:t>
+            </a:r>
+            <a:endParaRPr lang="en-US" sz="800" dirty="0"/>
+          </a:p>
+        </p:txBody>
+      </p:sp>
+      <p:sp>
+        <p:nvSpPr>
+          <p:cNvPr id="20" name="Text 18"/>
+          <p:cNvSpPr/>
+          <p:nvPr/>
+        </p:nvSpPr>
+        <p:spPr>
+          <a:xfrm>
+            <a:off x="594360" y="4937760"/>
+            <a:ext cx="2834640" cy="347472"/>
+          </a:xfrm>
+          <a:prstGeom prst="rect">
+            <a:avLst/>
+          </a:prstGeom>
+          <a:noFill/>
+          <a:ln/>
+        </p:spPr>
+        <p:txBody>
+          <a:bodyPr wrap="square" rtlCol="0" anchor="ctr"/>
+          <a:lstStyle/>
+          <a:p>
+            <a:pPr indent="0" marL="0">
+              <a:buNone/>
+            </a:pPr>
+            <a:r>
+              <a:rPr lang="en-US" sz="1050" dirty="0">
+                <a:solidFill>
+                  <a:srgbClr val="F5F5F7"/>
+                </a:solidFill>
+                <a:latin typeface="Malgun Gothic" pitchFamily="34" charset="0"/>
+                <a:ea typeface="Malgun Gothic" pitchFamily="34" charset="-122"/>
+                <a:cs typeface="Malgun Gothic" pitchFamily="34" charset="-120"/>
+              </a:rPr>
+              <a:t>•  PG 연동 유지보수 (NICE, EasyPay, 카드 단말기)</a:t>
+            </a:r>
+            <a:endParaRPr lang="en-US" sz="1050" dirty="0"/>
+          </a:p>
+        </p:txBody>
+      </p:sp>
+      <p:sp>
+        <p:nvSpPr>
+          <p:cNvPr id="21" name="Text 19"/>
+          <p:cNvSpPr/>
+          <p:nvPr/>
+        </p:nvSpPr>
+        <p:spPr>
+          <a:xfrm>
+            <a:off x="594360" y="5340096"/>
+            <a:ext cx="2834640" cy="347472"/>
+          </a:xfrm>
+          <a:prstGeom prst="rect">
+            <a:avLst/>
+          </a:prstGeom>
+          <a:noFill/>
+          <a:ln/>
+        </p:spPr>
+        <p:txBody>
+          <a:bodyPr wrap="square" rtlCol="0" anchor="ctr"/>
+          <a:lstStyle/>
+          <a:p>
+            <a:pPr indent="0" marL="0">
+              <a:buNone/>
+            </a:pPr>
+            <a:r>
+              <a:rPr lang="en-US" sz="1050" dirty="0">
+                <a:solidFill>
+                  <a:srgbClr val="F5F5F7"/>
+                </a:solidFill>
+                <a:latin typeface="Malgun Gothic" pitchFamily="34" charset="0"/>
+                <a:ea typeface="Malgun Gothic" pitchFamily="34" charset="-122"/>
+                <a:cs typeface="Malgun Gothic" pitchFamily="34" charset="-120"/>
+              </a:rPr>
+              <a:t>•  결제 승인·취소 예외 처리 로직 강화</a:t>
+            </a:r>
+            <a:endParaRPr lang="en-US" sz="1050" dirty="0"/>
+          </a:p>
+        </p:txBody>
+      </p:sp>
+      <p:sp>
+        <p:nvSpPr>
+          <p:cNvPr id="22" name="Text 20"/>
+          <p:cNvSpPr/>
+          <p:nvPr/>
+        </p:nvSpPr>
+        <p:spPr>
+          <a:xfrm>
+            <a:off x="3493008" y="4937760"/>
+            <a:ext cx="2834640" cy="347472"/>
+          </a:xfrm>
+          <a:prstGeom prst="rect">
+            <a:avLst/>
+          </a:prstGeom>
+          <a:noFill/>
+          <a:ln/>
+        </p:spPr>
+        <p:txBody>
+          <a:bodyPr wrap="square" rtlCol="0" anchor="ctr"/>
+          <a:lstStyle/>
+          <a:p>
+            <a:pPr indent="0" marL="0">
+              <a:buNone/>
+            </a:pPr>
+            <a:r>
+              <a:rPr lang="en-US" sz="1050" dirty="0">
+                <a:solidFill>
+                  <a:srgbClr val="F5F5F7"/>
+                </a:solidFill>
+                <a:latin typeface="Malgun Gothic" pitchFamily="34" charset="0"/>
+                <a:ea typeface="Malgun Gothic" pitchFamily="34" charset="-122"/>
+                <a:cs typeface="Malgun Gothic" pitchFamily="34" charset="-120"/>
+              </a:rPr>
+              <a:t>•  매출 조회 및 주문 통계 기능 개선</a:t>
+            </a:r>
+            <a:endParaRPr lang="en-US" sz="1050" dirty="0"/>
+          </a:p>
+        </p:txBody>
+      </p:sp>
+      <p:sp>
+        <p:nvSpPr>
+          <p:cNvPr id="23" name="Text 21"/>
+          <p:cNvSpPr/>
+          <p:nvPr/>
+        </p:nvSpPr>
+        <p:spPr>
+          <a:xfrm>
+            <a:off x="3493008" y="5340096"/>
+            <a:ext cx="2834640" cy="347472"/>
+          </a:xfrm>
+          <a:prstGeom prst="rect">
+            <a:avLst/>
+          </a:prstGeom>
+          <a:noFill/>
+          <a:ln/>
+        </p:spPr>
+        <p:txBody>
+          <a:bodyPr wrap="square" rtlCol="0" anchor="ctr"/>
+          <a:lstStyle/>
+          <a:p>
+            <a:pPr indent="0" marL="0">
+              <a:buNone/>
+            </a:pPr>
+            <a:r>
+              <a:rPr lang="en-US" sz="1050" dirty="0">
+                <a:solidFill>
+                  <a:srgbClr val="F5F5F7"/>
+                </a:solidFill>
+                <a:latin typeface="Malgun Gothic" pitchFamily="34" charset="0"/>
+                <a:ea typeface="Malgun Gothic" pitchFamily="34" charset="-122"/>
+                <a:cs typeface="Malgun Gothic" pitchFamily="34" charset="-120"/>
+              </a:rPr>
+              <a:t>•  주문 관리 UI/UX 개선</a:t>
+            </a:r>
+            <a:endParaRPr lang="en-US" sz="1050" dirty="0"/>
+          </a:p>
+        </p:txBody>
+      </p:sp>
+      <p:pic>
+        <p:nvPicPr>
+          <p:cNvPr id="24" name="Image 0" descr="/Users/jinwon/Desktop/jinwon-portfolio/apps/web/public/images/projects/smart-order-1.png">    </p:cNvPr>
+          <p:cNvPicPr>
+            <a:picLocks noChangeAspect="1"/>
+          </p:cNvPicPr>
+          <p:nvPr/>
+        </p:nvPicPr>
+        <p:blipFill>
+          <a:blip r:embed="rId1"/>
+          <a:srcRect l="0" r="0" t="0" b="0"/>
+          <a:stretch/>
+        </p:blipFill>
+        <p:spPr>
+          <a:xfrm>
+            <a:off x="6684264" y="1371600"/>
+            <a:ext cx="5266944" cy="1298448"/>
+          </a:xfrm>
+          <a:prstGeom prst="rect">
+            <a:avLst/>
+          </a:prstGeom>
+        </p:spPr>
+      </p:pic>
+      <p:sp>
+        <p:nvSpPr>
+          <p:cNvPr id="25" name="Shape 22"/>
+          <p:cNvSpPr/>
+          <p:nvPr/>
+        </p:nvSpPr>
+        <p:spPr>
+          <a:xfrm>
+            <a:off x="6684264" y="1371600"/>
+            <a:ext cx="5266944" cy="1298448"/>
+          </a:xfrm>
+          <a:prstGeom prst="rect">
+            <a:avLst/>
+          </a:prstGeom>
+          <a:ln w="12700">
+            <a:solidFill>
+              <a:srgbClr val="818CF8">
+                <a:alpha val="60000"/>
+              </a:srgbClr>
+            </a:solidFill>
+            <a:prstDash val="solid"/>
+          </a:ln>
+        </p:spPr>
+      </p:sp>
+      <p:sp>
+        <p:nvSpPr>
+          <p:cNvPr id="26" name="Shape 23"/>
+          <p:cNvSpPr/>
+          <p:nvPr/>
+        </p:nvSpPr>
+        <p:spPr>
+          <a:xfrm>
+            <a:off x="6629400" y="2761488"/>
+            <a:ext cx="5376672" cy="1444752"/>
           </a:xfrm>
           <a:prstGeom prst="rect">
             <a:avLst/>
@@ -2840,53 +3132,117 @@
       </p:sp>
       <p:sp>
         <p:nvSpPr>
-          <p:cNvPr id="18" name="Text 16"/>
-          <p:cNvSpPr/>
-          <p:nvPr/>
-        </p:nvSpPr>
-        <p:spPr>
-          <a:xfrm>
-            <a:off x="640080" y="6163056"/>
-            <a:ext cx="5943600" cy="329184"/>
-          </a:xfrm>
-          <a:prstGeom prst="rect">
-            <a:avLst/>
-          </a:prstGeom>
-          <a:noFill/>
-          <a:ln/>
-        </p:spPr>
-        <p:txBody>
-          <a:bodyPr wrap="square" rtlCol="0" anchor="ctr"/>
-          <a:lstStyle/>
-          <a:p>
-            <a:pPr indent="0" marL="0">
-              <a:buNone/>
-            </a:pPr>
-            <a:r>
-              <a:rPr lang="en-US" sz="900" dirty="0">
-                <a:solidFill>
-                  <a:srgbClr val="48484F"/>
-                </a:solidFill>
-                <a:latin typeface="Malgun Gothic" pitchFamily="34" charset="0"/>
-                <a:ea typeface="Malgun Gothic" pitchFamily="34" charset="-122"/>
-                <a:cs typeface="Malgun Gothic" pitchFamily="34" charset="-120"/>
-              </a:rPr>
-              <a:t>주요업무  ·  PG 연동 유지보수  ·  예외처리 강화  ·  매출 조회 개선  ·  UI/UX 개선</a:t>
-            </a:r>
-            <a:endParaRPr lang="en-US" sz="900" dirty="0"/>
-          </a:p>
-        </p:txBody>
-      </p:sp>
-      <p:sp>
-        <p:nvSpPr>
-          <p:cNvPr id="19" name="Shape 17"/>
-          <p:cNvSpPr/>
-          <p:nvPr/>
-        </p:nvSpPr>
-        <p:spPr>
-          <a:xfrm>
-            <a:off x="6629400" y="1371600"/>
-            <a:ext cx="5376672" cy="2286000"/>
+          <p:cNvPr id="27" name="Shape 24"/>
+          <p:cNvSpPr/>
+          <p:nvPr/>
+        </p:nvSpPr>
+        <p:spPr>
+          <a:xfrm>
+            <a:off x="6629400" y="2761488"/>
+            <a:ext cx="54864" cy="1444752"/>
+          </a:xfrm>
+          <a:prstGeom prst="rect">
+            <a:avLst/>
+          </a:prstGeom>
+          <a:solidFill>
+            <a:srgbClr val="818CF8"/>
+          </a:solidFill>
+          <a:ln w="12700">
+            <a:solidFill>
+              <a:srgbClr val="818CF8"/>
+            </a:solidFill>
+            <a:prstDash val="solid"/>
+          </a:ln>
+        </p:spPr>
+      </p:sp>
+      <p:sp>
+        <p:nvSpPr>
+          <p:cNvPr id="28" name="Text 25"/>
+          <p:cNvSpPr/>
+          <p:nvPr/>
+        </p:nvSpPr>
+        <p:spPr>
+          <a:xfrm>
+            <a:off x="6858000" y="2871216"/>
+            <a:ext cx="5056632" cy="822960"/>
+          </a:xfrm>
+          <a:prstGeom prst="rect">
+            <a:avLst/>
+          </a:prstGeom>
+          <a:noFill/>
+          <a:ln/>
+        </p:spPr>
+        <p:txBody>
+          <a:bodyPr wrap="square" rtlCol="0" anchor="ctr"/>
+          <a:lstStyle/>
+          <a:p>
+            <a:pPr algn="ctr" indent="0" marL="0">
+              <a:buNone/>
+            </a:pPr>
+            <a:r>
+              <a:rPr lang="en-US" sz="4200" b="1" dirty="0">
+                <a:solidFill>
+                  <a:srgbClr val="818CF8"/>
+                </a:solidFill>
+                <a:latin typeface="Malgun Gothic" pitchFamily="34" charset="0"/>
+                <a:ea typeface="Malgun Gothic" pitchFamily="34" charset="-122"/>
+                <a:cs typeface="Malgun Gothic" pitchFamily="34" charset="-120"/>
+              </a:rPr>
+              <a:t>안정화</a:t>
+            </a:r>
+            <a:endParaRPr lang="en-US" sz="4200" dirty="0"/>
+          </a:p>
+        </p:txBody>
+      </p:sp>
+      <p:sp>
+        <p:nvSpPr>
+          <p:cNvPr id="29" name="Text 26"/>
+          <p:cNvSpPr/>
+          <p:nvPr/>
+        </p:nvSpPr>
+        <p:spPr>
+          <a:xfrm>
+            <a:off x="6858000" y="3822192"/>
+            <a:ext cx="5056632" cy="329184"/>
+          </a:xfrm>
+          <a:prstGeom prst="rect">
+            <a:avLst/>
+          </a:prstGeom>
+          <a:noFill/>
+          <a:ln/>
+        </p:spPr>
+        <p:txBody>
+          <a:bodyPr wrap="square" rtlCol="0" anchor="ctr"/>
+          <a:lstStyle/>
+          <a:p>
+            <a:pPr algn="ctr" indent="0" marL="0">
+              <a:buNone/>
+            </a:pPr>
+            <a:r>
+              <a:rPr lang="en-US" sz="1100" dirty="0">
+                <a:solidFill>
+                  <a:srgbClr val="8E8E93"/>
+                </a:solidFill>
+                <a:latin typeface="Malgun Gothic" pitchFamily="34" charset="0"/>
+                <a:ea typeface="Malgun Gothic" pitchFamily="34" charset="-122"/>
+                <a:cs typeface="Malgun Gothic" pitchFamily="34" charset="-120"/>
+              </a:rPr>
+              <a:t>결제 오류·정산 불일치 해소</a:t>
+            </a:r>
+            <a:endParaRPr lang="en-US" sz="1100" dirty="0"/>
+          </a:p>
+        </p:txBody>
+      </p:sp>
+      <p:sp>
+        <p:nvSpPr>
+          <p:cNvPr id="30" name="Shape 27"/>
+          <p:cNvSpPr/>
+          <p:nvPr/>
+        </p:nvSpPr>
+        <p:spPr>
+          <a:xfrm>
+            <a:off x="6629400" y="4315968"/>
+            <a:ext cx="5376672" cy="566928"/>
           </a:xfrm>
           <a:prstGeom prst="rect">
             <a:avLst/>
@@ -2904,117 +3260,78 @@
       </p:sp>
       <p:sp>
         <p:nvSpPr>
-          <p:cNvPr id="20" name="Shape 18"/>
-          <p:cNvSpPr/>
-          <p:nvPr/>
-        </p:nvSpPr>
-        <p:spPr>
-          <a:xfrm>
-            <a:off x="6629400" y="1371600"/>
-            <a:ext cx="54864" cy="2286000"/>
-          </a:xfrm>
-          <a:prstGeom prst="rect">
-            <a:avLst/>
-          </a:prstGeom>
-          <a:solidFill>
-            <a:srgbClr val="818CF8"/>
-          </a:solidFill>
-          <a:ln w="12700">
-            <a:solidFill>
-              <a:srgbClr val="818CF8"/>
-            </a:solidFill>
-            <a:prstDash val="solid"/>
-          </a:ln>
-        </p:spPr>
-      </p:sp>
-      <p:sp>
-        <p:nvSpPr>
-          <p:cNvPr id="21" name="Text 19"/>
-          <p:cNvSpPr/>
-          <p:nvPr/>
-        </p:nvSpPr>
-        <p:spPr>
-          <a:xfrm>
-            <a:off x="6858000" y="1554480"/>
-            <a:ext cx="5056632" cy="1188720"/>
-          </a:xfrm>
-          <a:prstGeom prst="rect">
-            <a:avLst/>
-          </a:prstGeom>
-          <a:noFill/>
-          <a:ln/>
-        </p:spPr>
-        <p:txBody>
-          <a:bodyPr wrap="square" rtlCol="0" anchor="ctr"/>
-          <a:lstStyle/>
-          <a:p>
-            <a:pPr algn="ctr" indent="0" marL="0">
-              <a:buNone/>
-            </a:pPr>
-            <a:r>
-              <a:rPr lang="en-US" sz="5600" b="1" dirty="0">
-                <a:solidFill>
-                  <a:srgbClr val="818CF8"/>
-                </a:solidFill>
-                <a:latin typeface="Malgun Gothic" pitchFamily="34" charset="0"/>
-                <a:ea typeface="Malgun Gothic" pitchFamily="34" charset="-122"/>
-                <a:cs typeface="Malgun Gothic" pitchFamily="34" charset="-120"/>
-              </a:rPr>
-              <a:t>안정화</a:t>
-            </a:r>
-            <a:endParaRPr lang="en-US" sz="5600" dirty="0"/>
-          </a:p>
-        </p:txBody>
-      </p:sp>
-      <p:sp>
-        <p:nvSpPr>
-          <p:cNvPr id="22" name="Text 20"/>
-          <p:cNvSpPr/>
-          <p:nvPr/>
-        </p:nvSpPr>
-        <p:spPr>
-          <a:xfrm>
-            <a:off x="6858000" y="2743200"/>
-            <a:ext cx="5056632" cy="329184"/>
-          </a:xfrm>
-          <a:prstGeom prst="rect">
-            <a:avLst/>
-          </a:prstGeom>
-          <a:noFill/>
-          <a:ln/>
-        </p:spPr>
-        <p:txBody>
-          <a:bodyPr wrap="square" rtlCol="0" anchor="ctr"/>
-          <a:lstStyle/>
-          <a:p>
-            <a:pPr algn="ctr" indent="0" marL="0">
-              <a:buNone/>
-            </a:pPr>
-            <a:r>
-              <a:rPr lang="en-US" sz="1200" dirty="0">
-                <a:solidFill>
-                  <a:srgbClr val="8E8E93"/>
-                </a:solidFill>
-                <a:latin typeface="Malgun Gothic" pitchFamily="34" charset="0"/>
-                <a:ea typeface="Malgun Gothic" pitchFamily="34" charset="-122"/>
-                <a:cs typeface="Malgun Gothic" pitchFamily="34" charset="-120"/>
-              </a:rPr>
-              <a:t>결제 오류·정산 불일치 해소</a:t>
-            </a:r>
-            <a:endParaRPr lang="en-US" sz="1200" dirty="0"/>
-          </a:p>
-        </p:txBody>
-      </p:sp>
-      <p:sp>
-        <p:nvSpPr>
-          <p:cNvPr id="23" name="Shape 21"/>
-          <p:cNvSpPr/>
-          <p:nvPr/>
-        </p:nvSpPr>
-        <p:spPr>
-          <a:xfrm>
-            <a:off x="6629400" y="3858768"/>
-            <a:ext cx="5376672" cy="621792"/>
+          <p:cNvPr id="31" name="Shape 28"/>
+          <p:cNvSpPr/>
+          <p:nvPr/>
+        </p:nvSpPr>
+        <p:spPr>
+          <a:xfrm>
+            <a:off x="6629400" y="4315968"/>
+            <a:ext cx="54864" cy="566928"/>
+          </a:xfrm>
+          <a:prstGeom prst="rect">
+            <a:avLst/>
+          </a:prstGeom>
+          <a:solidFill>
+            <a:srgbClr val="34C759"/>
+          </a:solidFill>
+          <a:ln w="12700">
+            <a:solidFill>
+              <a:srgbClr val="34C759"/>
+            </a:solidFill>
+            <a:prstDash val="solid"/>
+          </a:ln>
+        </p:spPr>
+      </p:sp>
+      <p:sp>
+        <p:nvSpPr>
+          <p:cNvPr id="32" name="Text 29"/>
+          <p:cNvSpPr/>
+          <p:nvPr/>
+        </p:nvSpPr>
+        <p:spPr>
+          <a:xfrm>
+            <a:off x="6858000" y="4361688"/>
+            <a:ext cx="5056632" cy="475488"/>
+          </a:xfrm>
+          <a:prstGeom prst="rect">
+            <a:avLst/>
+          </a:prstGeom>
+          <a:noFill/>
+          <a:ln/>
+        </p:spPr>
+        <p:txBody>
+          <a:bodyPr wrap="square" rtlCol="0" anchor="ctr"/>
+          <a:lstStyle/>
+          <a:p>
+            <a:pPr indent="0" marL="0">
+              <a:buNone/>
+            </a:pPr>
+            <a:r>
+              <a:rPr lang="en-US" sz="1100" dirty="0">
+                <a:solidFill>
+                  <a:srgbClr val="F5F5F7"/>
+                </a:solidFill>
+                <a:latin typeface="Malgun Gothic" pitchFamily="34" charset="0"/>
+                <a:ea typeface="Malgun Gothic" pitchFamily="34" charset="-122"/>
+                <a:cs typeface="Malgun Gothic" pitchFamily="34" charset="-120"/>
+              </a:rPr>
+              <a:t>운영 환경 결제 장애 대응·트러블슈팅 역량 확보</a:t>
+            </a:r>
+            <a:endParaRPr lang="en-US" sz="1100" dirty="0"/>
+          </a:p>
+        </p:txBody>
+      </p:sp>
+      <p:sp>
+        <p:nvSpPr>
+          <p:cNvPr id="33" name="Shape 30"/>
+          <p:cNvSpPr/>
+          <p:nvPr/>
+        </p:nvSpPr>
+        <p:spPr>
+          <a:xfrm>
+            <a:off x="6629400" y="5010912"/>
+            <a:ext cx="5376672" cy="566928"/>
           </a:xfrm>
           <a:prstGeom prst="rect">
             <a:avLst/>
@@ -3032,14 +3349,14 @@
       </p:sp>
       <p:sp>
         <p:nvSpPr>
-          <p:cNvPr id="24" name="Shape 22"/>
-          <p:cNvSpPr/>
-          <p:nvPr/>
-        </p:nvSpPr>
-        <p:spPr>
-          <a:xfrm>
-            <a:off x="6629400" y="3858768"/>
-            <a:ext cx="54864" cy="621792"/>
+          <p:cNvPr id="34" name="Shape 31"/>
+          <p:cNvSpPr/>
+          <p:nvPr/>
+        </p:nvSpPr>
+        <p:spPr>
+          <a:xfrm>
+            <a:off x="6629400" y="5010912"/>
+            <a:ext cx="54864" cy="566928"/>
           </a:xfrm>
           <a:prstGeom prst="rect">
             <a:avLst/>
@@ -3057,30 +3374,30 @@
       </p:sp>
       <p:sp>
         <p:nvSpPr>
-          <p:cNvPr id="25" name="Text 23"/>
-          <p:cNvSpPr/>
-          <p:nvPr/>
-        </p:nvSpPr>
-        <p:spPr>
-          <a:xfrm>
-            <a:off x="6858000" y="3913632"/>
-            <a:ext cx="5056632" cy="512064"/>
-          </a:xfrm>
-          <a:prstGeom prst="rect">
-            <a:avLst/>
-          </a:prstGeom>
-          <a:noFill/>
-          <a:ln/>
-        </p:spPr>
-        <p:txBody>
-          <a:bodyPr wrap="square" rtlCol="0" anchor="ctr"/>
-          <a:lstStyle/>
-          <a:p>
-            <a:pPr indent="0" marL="0">
-              <a:buNone/>
-            </a:pPr>
-            <a:r>
-              <a:rPr lang="en-US" sz="1150" dirty="0">
+          <p:cNvPr id="35" name="Text 32"/>
+          <p:cNvSpPr/>
+          <p:nvPr/>
+        </p:nvSpPr>
+        <p:spPr>
+          <a:xfrm>
+            <a:off x="6858000" y="5056632"/>
+            <a:ext cx="5056632" cy="475488"/>
+          </a:xfrm>
+          <a:prstGeom prst="rect">
+            <a:avLst/>
+          </a:prstGeom>
+          <a:noFill/>
+          <a:ln/>
+        </p:spPr>
+        <p:txBody>
+          <a:bodyPr wrap="square" rtlCol="0" anchor="ctr"/>
+          <a:lstStyle/>
+          <a:p>
+            <a:pPr indent="0" marL="0">
+              <a:buNone/>
+            </a:pPr>
+            <a:r>
+              <a:rPr lang="en-US" sz="1100" dirty="0">
                 <a:solidFill>
                   <a:srgbClr val="F5F5F7"/>
                 </a:solidFill>
@@ -3088,104 +3405,15 @@
                 <a:ea typeface="Malgun Gothic" pitchFamily="34" charset="-122"/>
                 <a:cs typeface="Malgun Gothic" pitchFamily="34" charset="-120"/>
               </a:rPr>
-              <a:t>운영 환경 결제 장애 대응·트러블슈팅 역량 확보</a:t>
-            </a:r>
-            <a:endParaRPr lang="en-US" sz="1150" dirty="0"/>
-          </a:p>
-        </p:txBody>
-      </p:sp>
-      <p:sp>
-        <p:nvSpPr>
-          <p:cNvPr id="26" name="Shape 24"/>
-          <p:cNvSpPr/>
-          <p:nvPr/>
-        </p:nvSpPr>
-        <p:spPr>
-          <a:xfrm>
-            <a:off x="6629400" y="4608576"/>
-            <a:ext cx="5376672" cy="621792"/>
-          </a:xfrm>
-          <a:prstGeom prst="rect">
-            <a:avLst/>
-          </a:prstGeom>
-          <a:solidFill>
-            <a:srgbClr val="111116"/>
-          </a:solidFill>
-          <a:ln w="12700">
-            <a:solidFill>
-              <a:srgbClr val="111116"/>
-            </a:solidFill>
-            <a:prstDash val="solid"/>
-          </a:ln>
-        </p:spPr>
-      </p:sp>
-      <p:sp>
-        <p:nvSpPr>
-          <p:cNvPr id="27" name="Shape 25"/>
-          <p:cNvSpPr/>
-          <p:nvPr/>
-        </p:nvSpPr>
-        <p:spPr>
-          <a:xfrm>
-            <a:off x="6629400" y="4608576"/>
-            <a:ext cx="54864" cy="621792"/>
-          </a:xfrm>
-          <a:prstGeom prst="rect">
-            <a:avLst/>
-          </a:prstGeom>
-          <a:solidFill>
-            <a:srgbClr val="34C759"/>
-          </a:solidFill>
-          <a:ln w="12700">
-            <a:solidFill>
-              <a:srgbClr val="34C759"/>
-            </a:solidFill>
-            <a:prstDash val="solid"/>
-          </a:ln>
-        </p:spPr>
-      </p:sp>
-      <p:sp>
-        <p:nvSpPr>
-          <p:cNvPr id="28" name="Text 26"/>
-          <p:cNvSpPr/>
-          <p:nvPr/>
-        </p:nvSpPr>
-        <p:spPr>
-          <a:xfrm>
-            <a:off x="6858000" y="4663440"/>
-            <a:ext cx="5056632" cy="512064"/>
-          </a:xfrm>
-          <a:prstGeom prst="rect">
-            <a:avLst/>
-          </a:prstGeom>
-          <a:noFill/>
-          <a:ln/>
-        </p:spPr>
-        <p:txBody>
-          <a:bodyPr wrap="square" rtlCol="0" anchor="ctr"/>
-          <a:lstStyle/>
-          <a:p>
-            <a:pPr indent="0" marL="0">
-              <a:buNone/>
-            </a:pPr>
-            <a:r>
-              <a:rPr lang="en-US" sz="1150" dirty="0">
-                <a:solidFill>
-                  <a:srgbClr val="F5F5F7"/>
-                </a:solidFill>
-                <a:latin typeface="Malgun Gothic" pitchFamily="34" charset="0"/>
-                <a:ea typeface="Malgun Gothic" pitchFamily="34" charset="-122"/>
-                <a:cs typeface="Malgun Gothic" pitchFamily="34" charset="-120"/>
-              </a:rPr>
               <a:t>주문→결제→정산 전체 워크플로우 이해</a:t>
             </a:r>
-            <a:endParaRPr lang="en-US" sz="1150" dirty="0"/>
-          </a:p>
-        </p:txBody>
-      </p:sp>
-      <p:sp>
-        <p:nvSpPr>
-          <p:cNvPr id="29" name="Shape 27"/>
+            <a:endParaRPr lang="en-US" sz="1100" dirty="0"/>
+          </a:p>
+        </p:txBody>
+      </p:sp>
+      <p:sp>
+        <p:nvSpPr>
+          <p:cNvPr id="36" name="Shape 33"/>
           <p:cNvSpPr/>
           <p:nvPr/>
         </p:nvSpPr>
@@ -3210,7 +3438,7 @@
       </p:sp>
       <p:sp>
         <p:nvSpPr>
-          <p:cNvPr id="30" name="Text 28"/>
+          <p:cNvPr id="37" name="Text 34"/>
           <p:cNvSpPr/>
           <p:nvPr/>
         </p:nvSpPr>
@@ -6876,7 +7104,7 @@
                 <a:ea typeface="Malgun Gothic" pitchFamily="34" charset="-122"/>
                 <a:cs typeface="Malgun Gothic" pitchFamily="34" charset="-120"/>
               </a:rPr>
-              <a:t>React Native 기반 하이브리드 메시징 서비스 구축</a:t>
+              <a:t>React Native 기반 메시징 앱 신규 개발 — 앱스토어·플레이스토어 정식 출시</a:t>
             </a:r>
             <a:endParaRPr lang="en-US" sz="1100" dirty="0"/>
           </a:p>
@@ -6986,11 +7214,11 @@
             <a:avLst/>
           </a:prstGeom>
           <a:solidFill>
-            <a:srgbClr val="1A0808"/>
-          </a:solidFill>
-          <a:ln w="12700">
-            <a:solidFill>
-              <a:srgbClr val="1A0808"/>
+            <a:srgbClr val="0A0A1A"/>
+          </a:solidFill>
+          <a:ln w="12700">
+            <a:solidFill>
+              <a:srgbClr val="0A0A1A"/>
             </a:solidFill>
             <a:prstDash val="solid"/>
           </a:ln>
@@ -7023,13 +7251,13 @@
             <a:r>
               <a:rPr lang="en-US" sz="800" b="1" spc="150" kern="0" dirty="0">
                 <a:solidFill>
-                  <a:srgbClr val="FF453A"/>
-                </a:solidFill>
-                <a:latin typeface="Malgun Gothic" pitchFamily="34" charset="0"/>
-                <a:ea typeface="Malgun Gothic" pitchFamily="34" charset="-122"/>
-                <a:cs typeface="Malgun Gothic" pitchFamily="34" charset="-120"/>
-              </a:rPr>
-              <a:t>🔴  PROBLEM</a:t>
+                  <a:srgbClr val="A5B4FC"/>
+                </a:solidFill>
+                <a:latin typeface="Malgun Gothic" pitchFamily="34" charset="0"/>
+                <a:ea typeface="Malgun Gothic" pitchFamily="34" charset="-122"/>
+                <a:cs typeface="Malgun Gothic" pitchFamily="34" charset="-120"/>
+              </a:rPr>
+              <a:t>📋  배경 / 목표</a:t>
             </a:r>
             <a:endParaRPr lang="en-US" sz="800" dirty="0"/>
           </a:p>
@@ -7044,23 +7272,23 @@
         <p:spPr>
           <a:xfrm>
             <a:off x="594360" y="1700784"/>
-            <a:ext cx="5943600" cy="1005840"/>
-          </a:xfrm>
-          <a:prstGeom prst="rect">
-            <a:avLst/>
-          </a:prstGeom>
-          <a:noFill/>
-          <a:ln/>
-        </p:spPr>
-        <p:txBody>
-          <a:bodyPr wrap="square" rtlCol="0" anchor="ctr"/>
-          <a:lstStyle/>
-          <a:p>
-            <a:pPr indent="0" marL="0">
-              <a:buNone/>
-            </a:pPr>
-            <a:r>
-              <a:rPr lang="en-US" sz="1250" dirty="0">
+            <a:ext cx="5943600" cy="621792"/>
+          </a:xfrm>
+          <a:prstGeom prst="rect">
+            <a:avLst/>
+          </a:prstGeom>
+          <a:noFill/>
+          <a:ln/>
+        </p:spPr>
+        <p:txBody>
+          <a:bodyPr wrap="square" rtlCol="0" anchor="ctr"/>
+          <a:lstStyle/>
+          <a:p>
+            <a:pPr indent="0" marL="0">
+              <a:buNone/>
+            </a:pPr>
+            <a:r>
+              <a:rPr lang="en-US" sz="1200" dirty="0">
                 <a:solidFill>
                   <a:srgbClr val="F5F5F7"/>
                 </a:solidFill>
@@ -7068,22 +7296,364 @@
                 <a:ea typeface="Malgun Gothic" pitchFamily="34" charset="-122"/>
                 <a:cs typeface="Malgun Gothic" pitchFamily="34" charset="-120"/>
               </a:rPr>
-              <a:t>빈번한 운영 콘텐츠 변경과 알림 진입 속도 이슈로 사용자 경험 저하. 운영팀의 매번 앱 배포 의존도가 높아 운영 비용 급증.</a:t>
-            </a:r>
-            <a:endParaRPr lang="en-US" sz="1250" dirty="0"/>
-          </a:p>
-        </p:txBody>
-      </p:sp>
-      <p:sp>
-        <p:nvSpPr>
-          <p:cNvPr id="12" name="Text 10"/>
-          <p:cNvSpPr/>
-          <p:nvPr/>
-        </p:nvSpPr>
-        <p:spPr>
-          <a:xfrm>
-            <a:off x="594360" y="2761488"/>
-            <a:ext cx="365760" cy="329184"/>
+              <a:t>기존 서비스 없이 처음부터 설계·구축. React Native 기반 하이브리드 메시징 앱을 앱스토어·플레이스토어 동시 출시 목표로 개발.</a:t>
+            </a:r>
+            <a:endParaRPr lang="en-US" sz="1200" dirty="0"/>
+          </a:p>
+        </p:txBody>
+      </p:sp>
+      <p:sp>
+        <p:nvSpPr>
+          <p:cNvPr id="12" name="Shape 10"/>
+          <p:cNvSpPr/>
+          <p:nvPr/>
+        </p:nvSpPr>
+        <p:spPr>
+          <a:xfrm>
+            <a:off x="594360" y="2450592"/>
+            <a:ext cx="5943600" cy="10973"/>
+          </a:xfrm>
+          <a:prstGeom prst="rect">
+            <a:avLst/>
+          </a:prstGeom>
+          <a:solidFill>
+            <a:srgbClr val="18181F"/>
+          </a:solidFill>
+          <a:ln w="12700">
+            <a:solidFill>
+              <a:srgbClr val="18181F"/>
+            </a:solidFill>
+            <a:prstDash val="solid"/>
+          </a:ln>
+        </p:spPr>
+      </p:sp>
+      <p:sp>
+        <p:nvSpPr>
+          <p:cNvPr id="13" name="Shape 11"/>
+          <p:cNvSpPr/>
+          <p:nvPr/>
+        </p:nvSpPr>
+        <p:spPr>
+          <a:xfrm>
+            <a:off x="502920" y="2523744"/>
+            <a:ext cx="6126480" cy="256032"/>
+          </a:xfrm>
+          <a:prstGeom prst="rect">
+            <a:avLst/>
+          </a:prstGeom>
+          <a:solidFill>
+            <a:srgbClr val="071A07"/>
+          </a:solidFill>
+          <a:ln w="12700">
+            <a:solidFill>
+              <a:srgbClr val="071A07"/>
+            </a:solidFill>
+            <a:prstDash val="solid"/>
+          </a:ln>
+        </p:spPr>
+      </p:sp>
+      <p:sp>
+        <p:nvSpPr>
+          <p:cNvPr id="14" name="Text 12"/>
+          <p:cNvSpPr/>
+          <p:nvPr/>
+        </p:nvSpPr>
+        <p:spPr>
+          <a:xfrm>
+            <a:off x="594360" y="2542032"/>
+            <a:ext cx="5943600" cy="219456"/>
+          </a:xfrm>
+          <a:prstGeom prst="rect">
+            <a:avLst/>
+          </a:prstGeom>
+          <a:noFill/>
+          <a:ln/>
+        </p:spPr>
+        <p:txBody>
+          <a:bodyPr wrap="square" rtlCol="0" anchor="ctr"/>
+          <a:lstStyle/>
+          <a:p>
+            <a:pPr indent="0" marL="0">
+              <a:buNone/>
+            </a:pPr>
+            <a:r>
+              <a:rPr lang="en-US" sz="800" b="1" spc="150" kern="0" dirty="0">
+                <a:solidFill>
+                  <a:srgbClr val="34C759"/>
+                </a:solidFill>
+                <a:latin typeface="Malgun Gothic" pitchFamily="34" charset="0"/>
+                <a:ea typeface="Malgun Gothic" pitchFamily="34" charset="-122"/>
+                <a:cs typeface="Malgun Gothic" pitchFamily="34" charset="-120"/>
+              </a:rPr>
+              <a:t>🔨  주요 담당 업무</a:t>
+            </a:r>
+            <a:endParaRPr lang="en-US" sz="800" dirty="0"/>
+          </a:p>
+        </p:txBody>
+      </p:sp>
+      <p:sp>
+        <p:nvSpPr>
+          <p:cNvPr id="15" name="Text 13"/>
+          <p:cNvSpPr/>
+          <p:nvPr/>
+        </p:nvSpPr>
+        <p:spPr>
+          <a:xfrm>
+            <a:off x="594360" y="2871216"/>
+            <a:ext cx="5943600" cy="658368"/>
+          </a:xfrm>
+          <a:prstGeom prst="rect">
+            <a:avLst/>
+          </a:prstGeom>
+          <a:noFill/>
+          <a:ln/>
+        </p:spPr>
+        <p:txBody>
+          <a:bodyPr wrap="square" rtlCol="0" anchor="ctr"/>
+          <a:lstStyle/>
+          <a:p>
+            <a:pPr indent="0" marL="0">
+              <a:buNone/>
+            </a:pPr>
+            <a:r>
+              <a:rPr lang="en-US" sz="1200" dirty="0">
+                <a:solidFill>
+                  <a:srgbClr val="F5F5F7"/>
+                </a:solidFill>
+                <a:latin typeface="Malgun Gothic" pitchFamily="34" charset="0"/>
+                <a:ea typeface="Malgun Gothic" pitchFamily="34" charset="-122"/>
+                <a:cs typeface="Malgun Gothic" pitchFamily="34" charset="-120"/>
+              </a:rPr>
+              <a:t>•  앱 전반 아키텍처 설계 및 기술 스택 선정 — Expo 배제, 순수 RN 0.81 채택 (Native 모듈 확장성 확보)</a:t>
+            </a:r>
+            <a:endParaRPr lang="en-US" sz="1200" dirty="0"/>
+          </a:p>
+        </p:txBody>
+      </p:sp>
+      <p:sp>
+        <p:nvSpPr>
+          <p:cNvPr id="16" name="Text 14"/>
+          <p:cNvSpPr/>
+          <p:nvPr/>
+        </p:nvSpPr>
+        <p:spPr>
+          <a:xfrm>
+            <a:off x="594360" y="3602736"/>
+            <a:ext cx="5943600" cy="658368"/>
+          </a:xfrm>
+          <a:prstGeom prst="rect">
+            <a:avLst/>
+          </a:prstGeom>
+          <a:noFill/>
+          <a:ln/>
+        </p:spPr>
+        <p:txBody>
+          <a:bodyPr wrap="square" rtlCol="0" anchor="ctr"/>
+          <a:lstStyle/>
+          <a:p>
+            <a:pPr indent="0" marL="0">
+              <a:buNone/>
+            </a:pPr>
+            <a:r>
+              <a:rPr lang="en-US" sz="1200" dirty="0">
+                <a:solidFill>
+                  <a:srgbClr val="F5F5F7"/>
+                </a:solidFill>
+                <a:latin typeface="Malgun Gothic" pitchFamily="34" charset="0"/>
+                <a:ea typeface="Malgun Gothic" pitchFamily="34" charset="-122"/>
+                <a:cs typeface="Malgun Gothic" pitchFamily="34" charset="-120"/>
+              </a:rPr>
+              <a:t>•  WebView + Native 하이브리드 구조 설계 — 콘텐츠는 웹으로 운영, 핵심 기능은 Native로 처리</a:t>
+            </a:r>
+            <a:endParaRPr lang="en-US" sz="1200" dirty="0"/>
+          </a:p>
+        </p:txBody>
+      </p:sp>
+      <p:sp>
+        <p:nvSpPr>
+          <p:cNvPr id="17" name="Text 15"/>
+          <p:cNvSpPr/>
+          <p:nvPr/>
+        </p:nvSpPr>
+        <p:spPr>
+          <a:xfrm>
+            <a:off x="594360" y="4334256"/>
+            <a:ext cx="5943600" cy="658368"/>
+          </a:xfrm>
+          <a:prstGeom prst="rect">
+            <a:avLst/>
+          </a:prstGeom>
+          <a:noFill/>
+          <a:ln/>
+        </p:spPr>
+        <p:txBody>
+          <a:bodyPr wrap="square" rtlCol="0" anchor="ctr"/>
+          <a:lstStyle/>
+          <a:p>
+            <a:pPr indent="0" marL="0">
+              <a:buNone/>
+            </a:pPr>
+            <a:r>
+              <a:rPr lang="en-US" sz="1200" dirty="0">
+                <a:solidFill>
+                  <a:srgbClr val="F5F5F7"/>
+                </a:solidFill>
+                <a:latin typeface="Malgun Gothic" pitchFamily="34" charset="0"/>
+                <a:ea typeface="Malgun Gothic" pitchFamily="34" charset="-122"/>
+                <a:cs typeface="Malgun Gothic" pitchFamily="34" charset="-120"/>
+              </a:rPr>
+              <a:t>•  인앱결제 구현 — iOS App Store · Android Google Play 각 스토어 정책 대응 및 영수증 검증</a:t>
+            </a:r>
+            <a:endParaRPr lang="en-US" sz="1200" dirty="0"/>
+          </a:p>
+        </p:txBody>
+      </p:sp>
+      <p:sp>
+        <p:nvSpPr>
+          <p:cNvPr id="18" name="Text 16"/>
+          <p:cNvSpPr/>
+          <p:nvPr/>
+        </p:nvSpPr>
+        <p:spPr>
+          <a:xfrm>
+            <a:off x="594360" y="5065776"/>
+            <a:ext cx="5943600" cy="658368"/>
+          </a:xfrm>
+          <a:prstGeom prst="rect">
+            <a:avLst/>
+          </a:prstGeom>
+          <a:noFill/>
+          <a:ln/>
+        </p:spPr>
+        <p:txBody>
+          <a:bodyPr wrap="square" rtlCol="0" anchor="ctr"/>
+          <a:lstStyle/>
+          <a:p>
+            <a:pPr indent="0" marL="0">
+              <a:buNone/>
+            </a:pPr>
+            <a:r>
+              <a:rPr lang="en-US" sz="1200" dirty="0">
+                <a:solidFill>
+                  <a:srgbClr val="F5F5F7"/>
+                </a:solidFill>
+                <a:latin typeface="Malgun Gothic" pitchFamily="34" charset="0"/>
+                <a:ea typeface="Malgun Gothic" pitchFamily="34" charset="-122"/>
+                <a:cs typeface="Malgun Gothic" pitchFamily="34" charset="-120"/>
+              </a:rPr>
+              <a:t>•  FCM/Notifee 푸시 알림 시스템 + WebView↔Native 통신 브릿지 (postMessage 프로토콜 설계)</a:t>
+            </a:r>
+            <a:endParaRPr lang="en-US" sz="1200" dirty="0"/>
+          </a:p>
+        </p:txBody>
+      </p:sp>
+      <p:pic>
+        <p:nvPicPr>
+          <p:cNvPr id="19" name="Image 0" descr="/Users/jinwon/Desktop/jinwon-portfolio/apps/web/public/images/projects/bbi-1.png">    </p:cNvPr>
+          <p:cNvPicPr>
+            <a:picLocks noChangeAspect="1"/>
+          </p:cNvPicPr>
+          <p:nvPr/>
+        </p:nvPicPr>
+        <p:blipFill>
+          <a:blip r:embed="rId1"/>
+          <a:srcRect l="0" r="0" t="0" b="0"/>
+          <a:stretch/>
+        </p:blipFill>
+        <p:spPr>
+          <a:xfrm>
+            <a:off x="6684264" y="1371600"/>
+            <a:ext cx="5266944" cy="1298448"/>
+          </a:xfrm>
+          <a:prstGeom prst="rect">
+            <a:avLst/>
+          </a:prstGeom>
+        </p:spPr>
+      </p:pic>
+      <p:sp>
+        <p:nvSpPr>
+          <p:cNvPr id="20" name="Shape 17"/>
+          <p:cNvSpPr/>
+          <p:nvPr/>
+        </p:nvSpPr>
+        <p:spPr>
+          <a:xfrm>
+            <a:off x="6684264" y="1371600"/>
+            <a:ext cx="5266944" cy="1298448"/>
+          </a:xfrm>
+          <a:prstGeom prst="rect">
+            <a:avLst/>
+          </a:prstGeom>
+          <a:ln w="12700">
+            <a:solidFill>
+              <a:srgbClr val="818CF8">
+                <a:alpha val="60000"/>
+              </a:srgbClr>
+            </a:solidFill>
+            <a:prstDash val="solid"/>
+          </a:ln>
+        </p:spPr>
+      </p:sp>
+      <p:sp>
+        <p:nvSpPr>
+          <p:cNvPr id="21" name="Shape 18"/>
+          <p:cNvSpPr/>
+          <p:nvPr/>
+        </p:nvSpPr>
+        <p:spPr>
+          <a:xfrm>
+            <a:off x="6629400" y="2761488"/>
+            <a:ext cx="5376672" cy="1444752"/>
+          </a:xfrm>
+          <a:prstGeom prst="rect">
+            <a:avLst/>
+          </a:prstGeom>
+          <a:solidFill>
+            <a:srgbClr val="111116"/>
+          </a:solidFill>
+          <a:ln w="12700">
+            <a:solidFill>
+              <a:srgbClr val="111116"/>
+            </a:solidFill>
+            <a:prstDash val="solid"/>
+          </a:ln>
+        </p:spPr>
+      </p:sp>
+      <p:sp>
+        <p:nvSpPr>
+          <p:cNvPr id="22" name="Shape 19"/>
+          <p:cNvSpPr/>
+          <p:nvPr/>
+        </p:nvSpPr>
+        <p:spPr>
+          <a:xfrm>
+            <a:off x="6629400" y="2761488"/>
+            <a:ext cx="54864" cy="1444752"/>
+          </a:xfrm>
+          <a:prstGeom prst="rect">
+            <a:avLst/>
+          </a:prstGeom>
+          <a:solidFill>
+            <a:srgbClr val="818CF8"/>
+          </a:solidFill>
+          <a:ln w="12700">
+            <a:solidFill>
+              <a:srgbClr val="818CF8"/>
+            </a:solidFill>
+            <a:prstDash val="solid"/>
+          </a:ln>
+        </p:spPr>
+      </p:sp>
+      <p:sp>
+        <p:nvSpPr>
+          <p:cNvPr id="23" name="Text 20"/>
+          <p:cNvSpPr/>
+          <p:nvPr/>
+        </p:nvSpPr>
+        <p:spPr>
+          <a:xfrm>
+            <a:off x="6858000" y="2871216"/>
+            <a:ext cx="5056632" cy="822960"/>
           </a:xfrm>
           <a:prstGeom prst="rect">
             <a:avLst/>
@@ -7099,110 +7669,135 @@
               <a:buNone/>
             </a:pPr>
             <a:r>
-              <a:rPr lang="en-US" sz="1800" dirty="0">
-                <a:solidFill>
-                  <a:srgbClr val="48484F"/>
-                </a:solidFill>
-                <a:latin typeface="Malgun Gothic" pitchFamily="34" charset="0"/>
-                <a:ea typeface="Malgun Gothic" pitchFamily="34" charset="-122"/>
-                <a:cs typeface="Malgun Gothic" pitchFamily="34" charset="-120"/>
-              </a:rPr>
-              <a:t>↓</a:t>
-            </a:r>
-            <a:endParaRPr lang="en-US" sz="1800" dirty="0"/>
-          </a:p>
-        </p:txBody>
-      </p:sp>
-      <p:sp>
-        <p:nvSpPr>
-          <p:cNvPr id="13" name="Shape 11"/>
-          <p:cNvSpPr/>
-          <p:nvPr/>
-        </p:nvSpPr>
-        <p:spPr>
-          <a:xfrm>
-            <a:off x="502920" y="3145536"/>
-            <a:ext cx="6126480" cy="256032"/>
-          </a:xfrm>
-          <a:prstGeom prst="rect">
-            <a:avLst/>
-          </a:prstGeom>
-          <a:solidFill>
-            <a:srgbClr val="071A07"/>
-          </a:solidFill>
-          <a:ln w="12700">
-            <a:solidFill>
-              <a:srgbClr val="071A07"/>
-            </a:solidFill>
-            <a:prstDash val="solid"/>
-          </a:ln>
-        </p:spPr>
-      </p:sp>
-      <p:sp>
-        <p:nvSpPr>
-          <p:cNvPr id="14" name="Text 12"/>
-          <p:cNvSpPr/>
-          <p:nvPr/>
-        </p:nvSpPr>
-        <p:spPr>
-          <a:xfrm>
-            <a:off x="594360" y="3163824"/>
-            <a:ext cx="5943600" cy="219456"/>
-          </a:xfrm>
-          <a:prstGeom prst="rect">
-            <a:avLst/>
-          </a:prstGeom>
-          <a:noFill/>
-          <a:ln/>
-        </p:spPr>
-        <p:txBody>
-          <a:bodyPr wrap="square" rtlCol="0" anchor="ctr"/>
-          <a:lstStyle/>
-          <a:p>
-            <a:pPr indent="0" marL="0">
-              <a:buNone/>
-            </a:pPr>
-            <a:r>
-              <a:rPr lang="en-US" sz="800" b="1" spc="150" kern="0" dirty="0">
-                <a:solidFill>
-                  <a:srgbClr val="34C759"/>
-                </a:solidFill>
-                <a:latin typeface="Malgun Gothic" pitchFamily="34" charset="0"/>
-                <a:ea typeface="Malgun Gothic" pitchFamily="34" charset="-122"/>
-                <a:cs typeface="Malgun Gothic" pitchFamily="34" charset="-120"/>
-              </a:rPr>
-              <a:t>💡  SOLUTION</a:t>
-            </a:r>
-            <a:endParaRPr lang="en-US" sz="800" dirty="0"/>
-          </a:p>
-        </p:txBody>
-      </p:sp>
-      <p:sp>
-        <p:nvSpPr>
-          <p:cNvPr id="15" name="Text 13"/>
-          <p:cNvSpPr/>
-          <p:nvPr/>
-        </p:nvSpPr>
-        <p:spPr>
-          <a:xfrm>
-            <a:off x="594360" y="3493008"/>
-            <a:ext cx="5943600" cy="594360"/>
-          </a:xfrm>
-          <a:prstGeom prst="rect">
-            <a:avLst/>
-          </a:prstGeom>
-          <a:noFill/>
-          <a:ln/>
-        </p:spPr>
-        <p:txBody>
-          <a:bodyPr wrap="square" rtlCol="0" anchor="ctr"/>
-          <a:lstStyle/>
-          <a:p>
-            <a:pPr indent="0" marL="0">
-              <a:buNone/>
-            </a:pPr>
-            <a:r>
-              <a:rPr lang="en-US" sz="1200" dirty="0">
+              <a:rPr lang="en-US" sz="4200" b="1" dirty="0">
+                <a:solidFill>
+                  <a:srgbClr val="818CF8"/>
+                </a:solidFill>
+                <a:latin typeface="Malgun Gothic" pitchFamily="34" charset="0"/>
+                <a:ea typeface="Malgun Gothic" pitchFamily="34" charset="-122"/>
+                <a:cs typeface="Malgun Gothic" pitchFamily="34" charset="-120"/>
+              </a:rPr>
+              <a:t>정식 출시</a:t>
+            </a:r>
+            <a:endParaRPr lang="en-US" sz="4200" dirty="0"/>
+          </a:p>
+        </p:txBody>
+      </p:sp>
+      <p:sp>
+        <p:nvSpPr>
+          <p:cNvPr id="24" name="Text 21"/>
+          <p:cNvSpPr/>
+          <p:nvPr/>
+        </p:nvSpPr>
+        <p:spPr>
+          <a:xfrm>
+            <a:off x="6858000" y="3822192"/>
+            <a:ext cx="5056632" cy="329184"/>
+          </a:xfrm>
+          <a:prstGeom prst="rect">
+            <a:avLst/>
+          </a:prstGeom>
+          <a:noFill/>
+          <a:ln/>
+        </p:spPr>
+        <p:txBody>
+          <a:bodyPr wrap="square" rtlCol="0" anchor="ctr"/>
+          <a:lstStyle/>
+          <a:p>
+            <a:pPr algn="ctr" indent="0" marL="0">
+              <a:buNone/>
+            </a:pPr>
+            <a:r>
+              <a:rPr lang="en-US" sz="1100" dirty="0">
+                <a:solidFill>
+                  <a:srgbClr val="8E8E93"/>
+                </a:solidFill>
+                <a:latin typeface="Malgun Gothic" pitchFamily="34" charset="0"/>
+                <a:ea typeface="Malgun Gothic" pitchFamily="34" charset="-122"/>
+                <a:cs typeface="Malgun Gothic" pitchFamily="34" charset="-120"/>
+              </a:rPr>
+              <a:t>앱스토어 · 플레이스토어 동시 론칭</a:t>
+            </a:r>
+            <a:endParaRPr lang="en-US" sz="1100" dirty="0"/>
+          </a:p>
+        </p:txBody>
+      </p:sp>
+      <p:sp>
+        <p:nvSpPr>
+          <p:cNvPr id="25" name="Shape 22"/>
+          <p:cNvSpPr/>
+          <p:nvPr/>
+        </p:nvSpPr>
+        <p:spPr>
+          <a:xfrm>
+            <a:off x="6629400" y="4315968"/>
+            <a:ext cx="5376672" cy="566928"/>
+          </a:xfrm>
+          <a:prstGeom prst="rect">
+            <a:avLst/>
+          </a:prstGeom>
+          <a:solidFill>
+            <a:srgbClr val="111116"/>
+          </a:solidFill>
+          <a:ln w="12700">
+            <a:solidFill>
+              <a:srgbClr val="111116"/>
+            </a:solidFill>
+            <a:prstDash val="solid"/>
+          </a:ln>
+        </p:spPr>
+      </p:sp>
+      <p:sp>
+        <p:nvSpPr>
+          <p:cNvPr id="26" name="Shape 23"/>
+          <p:cNvSpPr/>
+          <p:nvPr/>
+        </p:nvSpPr>
+        <p:spPr>
+          <a:xfrm>
+            <a:off x="6629400" y="4315968"/>
+            <a:ext cx="54864" cy="566928"/>
+          </a:xfrm>
+          <a:prstGeom prst="rect">
+            <a:avLst/>
+          </a:prstGeom>
+          <a:solidFill>
+            <a:srgbClr val="34C759"/>
+          </a:solidFill>
+          <a:ln w="12700">
+            <a:solidFill>
+              <a:srgbClr val="34C759"/>
+            </a:solidFill>
+            <a:prstDash val="solid"/>
+          </a:ln>
+        </p:spPr>
+      </p:sp>
+      <p:sp>
+        <p:nvSpPr>
+          <p:cNvPr id="27" name="Text 24"/>
+          <p:cNvSpPr/>
+          <p:nvPr/>
+        </p:nvSpPr>
+        <p:spPr>
+          <a:xfrm>
+            <a:off x="6858000" y="4361688"/>
+            <a:ext cx="5056632" cy="475488"/>
+          </a:xfrm>
+          <a:prstGeom prst="rect">
+            <a:avLst/>
+          </a:prstGeom>
+          <a:noFill/>
+          <a:ln/>
+        </p:spPr>
+        <p:txBody>
+          <a:bodyPr wrap="square" rtlCol="0" anchor="ctr"/>
+          <a:lstStyle/>
+          <a:p>
+            <a:pPr indent="0" marL="0">
+              <a:buNone/>
+            </a:pPr>
+            <a:r>
+              <a:rPr lang="en-US" sz="1100" dirty="0">
                 <a:solidFill>
                   <a:srgbClr val="F5F5F7"/>
                 </a:solidFill>
@@ -7210,38 +7805,88 @@
                 <a:ea typeface="Malgun Gothic" pitchFamily="34" charset="-122"/>
                 <a:cs typeface="Malgun Gothic" pitchFamily="34" charset="-120"/>
               </a:rPr>
-              <a:t>•  React Native WebView + Native 혼합 구조 설계 — 콘텐츠는 웹으로, 핵심 기능은 Native로</a:t>
-            </a:r>
-            <a:endParaRPr lang="en-US" sz="1200" dirty="0"/>
-          </a:p>
-        </p:txBody>
-      </p:sp>
-      <p:sp>
-        <p:nvSpPr>
-          <p:cNvPr id="16" name="Text 14"/>
-          <p:cNvSpPr/>
-          <p:nvPr/>
-        </p:nvSpPr>
-        <p:spPr>
-          <a:xfrm>
-            <a:off x="594360" y="4151376"/>
-            <a:ext cx="5943600" cy="594360"/>
-          </a:xfrm>
-          <a:prstGeom prst="rect">
-            <a:avLst/>
-          </a:prstGeom>
-          <a:noFill/>
-          <a:ln/>
-        </p:spPr>
-        <p:txBody>
-          <a:bodyPr wrap="square" rtlCol="0" anchor="ctr"/>
-          <a:lstStyle/>
-          <a:p>
-            <a:pPr indent="0" marL="0">
-              <a:buNone/>
-            </a:pPr>
-            <a:r>
-              <a:rPr lang="en-US" sz="1200" dirty="0">
+              <a:t>개발·운영 공수 50% 절감 (하이브리드 구조 도입)</a:t>
+            </a:r>
+            <a:endParaRPr lang="en-US" sz="1100" dirty="0"/>
+          </a:p>
+        </p:txBody>
+      </p:sp>
+      <p:sp>
+        <p:nvSpPr>
+          <p:cNvPr id="28" name="Shape 25"/>
+          <p:cNvSpPr/>
+          <p:nvPr/>
+        </p:nvSpPr>
+        <p:spPr>
+          <a:xfrm>
+            <a:off x="6629400" y="5010912"/>
+            <a:ext cx="5376672" cy="566928"/>
+          </a:xfrm>
+          <a:prstGeom prst="rect">
+            <a:avLst/>
+          </a:prstGeom>
+          <a:solidFill>
+            <a:srgbClr val="111116"/>
+          </a:solidFill>
+          <a:ln w="12700">
+            <a:solidFill>
+              <a:srgbClr val="111116"/>
+            </a:solidFill>
+            <a:prstDash val="solid"/>
+          </a:ln>
+        </p:spPr>
+      </p:sp>
+      <p:sp>
+        <p:nvSpPr>
+          <p:cNvPr id="29" name="Shape 26"/>
+          <p:cNvSpPr/>
+          <p:nvPr/>
+        </p:nvSpPr>
+        <p:spPr>
+          <a:xfrm>
+            <a:off x="6629400" y="5010912"/>
+            <a:ext cx="54864" cy="566928"/>
+          </a:xfrm>
+          <a:prstGeom prst="rect">
+            <a:avLst/>
+          </a:prstGeom>
+          <a:solidFill>
+            <a:srgbClr val="34C759"/>
+          </a:solidFill>
+          <a:ln w="12700">
+            <a:solidFill>
+              <a:srgbClr val="34C759"/>
+            </a:solidFill>
+            <a:prstDash val="solid"/>
+          </a:ln>
+        </p:spPr>
+      </p:sp>
+      <p:sp>
+        <p:nvSpPr>
+          <p:cNvPr id="30" name="Text 27"/>
+          <p:cNvSpPr/>
+          <p:nvPr/>
+        </p:nvSpPr>
+        <p:spPr>
+          <a:xfrm>
+            <a:off x="6858000" y="5056632"/>
+            <a:ext cx="5056632" cy="475488"/>
+          </a:xfrm>
+          <a:prstGeom prst="rect">
+            <a:avLst/>
+          </a:prstGeom>
+          <a:noFill/>
+          <a:ln/>
+        </p:spPr>
+        <p:txBody>
+          <a:bodyPr wrap="square" rtlCol="0" anchor="ctr"/>
+          <a:lstStyle/>
+          <a:p>
+            <a:pPr indent="0" marL="0">
+              <a:buNone/>
+            </a:pPr>
+            <a:r>
+              <a:rPr lang="en-US" sz="1100" dirty="0">
                 <a:solidFill>
                   <a:srgbClr val="F5F5F7"/>
                 </a:solidFill>
@@ -7249,385 +7894,15 @@
                 <a:ea typeface="Malgun Gothic" pitchFamily="34" charset="-122"/>
                 <a:cs typeface="Malgun Gothic" pitchFamily="34" charset="-120"/>
               </a:rPr>
-              <a:t>•  Expo 대신 순수 React Native 선택 — Native 모듈 확장성 확보</a:t>
-            </a:r>
-            <a:endParaRPr lang="en-US" sz="1200" dirty="0"/>
-          </a:p>
-        </p:txBody>
-      </p:sp>
-      <p:sp>
-        <p:nvSpPr>
-          <p:cNvPr id="17" name="Shape 15"/>
-          <p:cNvSpPr/>
-          <p:nvPr/>
-        </p:nvSpPr>
-        <p:spPr>
-          <a:xfrm>
-            <a:off x="502920" y="6144768"/>
-            <a:ext cx="6126480" cy="384048"/>
-          </a:xfrm>
-          <a:prstGeom prst="rect">
-            <a:avLst/>
-          </a:prstGeom>
-          <a:solidFill>
-            <a:srgbClr val="111116"/>
-          </a:solidFill>
-          <a:ln w="12700">
-            <a:solidFill>
-              <a:srgbClr val="111116"/>
-            </a:solidFill>
-            <a:prstDash val="solid"/>
-          </a:ln>
-        </p:spPr>
-      </p:sp>
-      <p:sp>
-        <p:nvSpPr>
-          <p:cNvPr id="18" name="Text 16"/>
-          <p:cNvSpPr/>
-          <p:nvPr/>
-        </p:nvSpPr>
-        <p:spPr>
-          <a:xfrm>
-            <a:off x="640080" y="6163056"/>
-            <a:ext cx="5943600" cy="329184"/>
-          </a:xfrm>
-          <a:prstGeom prst="rect">
-            <a:avLst/>
-          </a:prstGeom>
-          <a:noFill/>
-          <a:ln/>
-        </p:spPr>
-        <p:txBody>
-          <a:bodyPr wrap="square" rtlCol="0" anchor="ctr"/>
-          <a:lstStyle/>
-          <a:p>
-            <a:pPr indent="0" marL="0">
-              <a:buNone/>
-            </a:pPr>
-            <a:r>
-              <a:rPr lang="en-US" sz="900" dirty="0">
-                <a:solidFill>
-                  <a:srgbClr val="48484F"/>
-                </a:solidFill>
-                <a:latin typeface="Malgun Gothic" pitchFamily="34" charset="0"/>
-                <a:ea typeface="Malgun Gothic" pitchFamily="34" charset="-122"/>
-                <a:cs typeface="Malgun Gothic" pitchFamily="34" charset="-120"/>
-              </a:rPr>
-              <a:t>주요업무  ·  앱 전반 아키텍처 설계  ·  인앱결제·FCM 개발  ·  WebView↔Native 통신 구조</a:t>
-            </a:r>
-            <a:endParaRPr lang="en-US" sz="900" dirty="0"/>
-          </a:p>
-        </p:txBody>
-      </p:sp>
-      <p:sp>
-        <p:nvSpPr>
-          <p:cNvPr id="19" name="Shape 17"/>
-          <p:cNvSpPr/>
-          <p:nvPr/>
-        </p:nvSpPr>
-        <p:spPr>
-          <a:xfrm>
-            <a:off x="6629400" y="1371600"/>
-            <a:ext cx="5376672" cy="2286000"/>
-          </a:xfrm>
-          <a:prstGeom prst="rect">
-            <a:avLst/>
-          </a:prstGeom>
-          <a:solidFill>
-            <a:srgbClr val="111116"/>
-          </a:solidFill>
-          <a:ln w="12700">
-            <a:solidFill>
-              <a:srgbClr val="111116"/>
-            </a:solidFill>
-            <a:prstDash val="solid"/>
-          </a:ln>
-        </p:spPr>
-      </p:sp>
-      <p:sp>
-        <p:nvSpPr>
-          <p:cNvPr id="20" name="Shape 18"/>
-          <p:cNvSpPr/>
-          <p:nvPr/>
-        </p:nvSpPr>
-        <p:spPr>
-          <a:xfrm>
-            <a:off x="6629400" y="1371600"/>
-            <a:ext cx="54864" cy="2286000"/>
-          </a:xfrm>
-          <a:prstGeom prst="rect">
-            <a:avLst/>
-          </a:prstGeom>
-          <a:solidFill>
-            <a:srgbClr val="818CF8"/>
-          </a:solidFill>
-          <a:ln w="12700">
-            <a:solidFill>
-              <a:srgbClr val="818CF8"/>
-            </a:solidFill>
-            <a:prstDash val="solid"/>
-          </a:ln>
-        </p:spPr>
-      </p:sp>
-      <p:sp>
-        <p:nvSpPr>
-          <p:cNvPr id="21" name="Text 19"/>
-          <p:cNvSpPr/>
-          <p:nvPr/>
-        </p:nvSpPr>
-        <p:spPr>
-          <a:xfrm>
-            <a:off x="6858000" y="1554480"/>
-            <a:ext cx="5056632" cy="1188720"/>
-          </a:xfrm>
-          <a:prstGeom prst="rect">
-            <a:avLst/>
-          </a:prstGeom>
-          <a:noFill/>
-          <a:ln/>
-        </p:spPr>
-        <p:txBody>
-          <a:bodyPr wrap="square" rtlCol="0" anchor="ctr"/>
-          <a:lstStyle/>
-          <a:p>
-            <a:pPr algn="ctr" indent="0" marL="0">
-              <a:buNone/>
-            </a:pPr>
-            <a:r>
-              <a:rPr lang="en-US" sz="5600" b="1" dirty="0">
-                <a:solidFill>
-                  <a:srgbClr val="818CF8"/>
-                </a:solidFill>
-                <a:latin typeface="Malgun Gothic" pitchFamily="34" charset="0"/>
-                <a:ea typeface="Malgun Gothic" pitchFamily="34" charset="-122"/>
-                <a:cs typeface="Malgun Gothic" pitchFamily="34" charset="-120"/>
-              </a:rPr>
-              <a:t>50%</a:t>
-            </a:r>
-            <a:endParaRPr lang="en-US" sz="5600" dirty="0"/>
-          </a:p>
-        </p:txBody>
-      </p:sp>
-      <p:sp>
-        <p:nvSpPr>
-          <p:cNvPr id="22" name="Text 20"/>
-          <p:cNvSpPr/>
-          <p:nvPr/>
-        </p:nvSpPr>
-        <p:spPr>
-          <a:xfrm>
-            <a:off x="6858000" y="2743200"/>
-            <a:ext cx="5056632" cy="329184"/>
-          </a:xfrm>
-          <a:prstGeom prst="rect">
-            <a:avLst/>
-          </a:prstGeom>
-          <a:noFill/>
-          <a:ln/>
-        </p:spPr>
-        <p:txBody>
-          <a:bodyPr wrap="square" rtlCol="0" anchor="ctr"/>
-          <a:lstStyle/>
-          <a:p>
-            <a:pPr algn="ctr" indent="0" marL="0">
-              <a:buNone/>
-            </a:pPr>
-            <a:r>
-              <a:rPr lang="en-US" sz="1200" dirty="0">
-                <a:solidFill>
-                  <a:srgbClr val="8E8E93"/>
-                </a:solidFill>
-                <a:latin typeface="Malgun Gothic" pitchFamily="34" charset="0"/>
-                <a:ea typeface="Malgun Gothic" pitchFamily="34" charset="-122"/>
-                <a:cs typeface="Malgun Gothic" pitchFamily="34" charset="-120"/>
-              </a:rPr>
-              <a:t>개발·운영 공수 절감</a:t>
-            </a:r>
-            <a:endParaRPr lang="en-US" sz="1200" dirty="0"/>
-          </a:p>
-        </p:txBody>
-      </p:sp>
-      <p:sp>
-        <p:nvSpPr>
-          <p:cNvPr id="23" name="Shape 21"/>
-          <p:cNvSpPr/>
-          <p:nvPr/>
-        </p:nvSpPr>
-        <p:spPr>
-          <a:xfrm>
-            <a:off x="6629400" y="3858768"/>
-            <a:ext cx="5376672" cy="621792"/>
-          </a:xfrm>
-          <a:prstGeom prst="rect">
-            <a:avLst/>
-          </a:prstGeom>
-          <a:solidFill>
-            <a:srgbClr val="111116"/>
-          </a:solidFill>
-          <a:ln w="12700">
-            <a:solidFill>
-              <a:srgbClr val="111116"/>
-            </a:solidFill>
-            <a:prstDash val="solid"/>
-          </a:ln>
-        </p:spPr>
-      </p:sp>
-      <p:sp>
-        <p:nvSpPr>
-          <p:cNvPr id="24" name="Shape 22"/>
-          <p:cNvSpPr/>
-          <p:nvPr/>
-        </p:nvSpPr>
-        <p:spPr>
-          <a:xfrm>
-            <a:off x="6629400" y="3858768"/>
-            <a:ext cx="54864" cy="621792"/>
-          </a:xfrm>
-          <a:prstGeom prst="rect">
-            <a:avLst/>
-          </a:prstGeom>
-          <a:solidFill>
-            <a:srgbClr val="34C759"/>
-          </a:solidFill>
-          <a:ln w="12700">
-            <a:solidFill>
-              <a:srgbClr val="34C759"/>
-            </a:solidFill>
-            <a:prstDash val="solid"/>
-          </a:ln>
-        </p:spPr>
-      </p:sp>
-      <p:sp>
-        <p:nvSpPr>
-          <p:cNvPr id="25" name="Text 23"/>
-          <p:cNvSpPr/>
-          <p:nvPr/>
-        </p:nvSpPr>
-        <p:spPr>
-          <a:xfrm>
-            <a:off x="6858000" y="3913632"/>
-            <a:ext cx="5056632" cy="512064"/>
-          </a:xfrm>
-          <a:prstGeom prst="rect">
-            <a:avLst/>
-          </a:prstGeom>
-          <a:noFill/>
-          <a:ln/>
-        </p:spPr>
-        <p:txBody>
-          <a:bodyPr wrap="square" rtlCol="0" anchor="ctr"/>
-          <a:lstStyle/>
-          <a:p>
-            <a:pPr indent="0" marL="0">
-              <a:buNone/>
-            </a:pPr>
-            <a:r>
-              <a:rPr lang="en-US" sz="1150" dirty="0">
-                <a:solidFill>
-                  <a:srgbClr val="F5F5F7"/>
-                </a:solidFill>
-                <a:latin typeface="Malgun Gothic" pitchFamily="34" charset="0"/>
-                <a:ea typeface="Malgun Gothic" pitchFamily="34" charset="-122"/>
-                <a:cs typeface="Malgun Gothic" pitchFamily="34" charset="-120"/>
-              </a:rPr>
-              <a:t>015 삐삐 앱 정식 런칭 및 안정적 실서비스 운영</a:t>
-            </a:r>
-            <a:endParaRPr lang="en-US" sz="1150" dirty="0"/>
-          </a:p>
-        </p:txBody>
-      </p:sp>
-      <p:sp>
-        <p:nvSpPr>
-          <p:cNvPr id="26" name="Shape 24"/>
-          <p:cNvSpPr/>
-          <p:nvPr/>
-        </p:nvSpPr>
-        <p:spPr>
-          <a:xfrm>
-            <a:off x="6629400" y="4608576"/>
-            <a:ext cx="5376672" cy="621792"/>
-          </a:xfrm>
-          <a:prstGeom prst="rect">
-            <a:avLst/>
-          </a:prstGeom>
-          <a:solidFill>
-            <a:srgbClr val="111116"/>
-          </a:solidFill>
-          <a:ln w="12700">
-            <a:solidFill>
-              <a:srgbClr val="111116"/>
-            </a:solidFill>
-            <a:prstDash val="solid"/>
-          </a:ln>
-        </p:spPr>
-      </p:sp>
-      <p:sp>
-        <p:nvSpPr>
-          <p:cNvPr id="27" name="Shape 25"/>
-          <p:cNvSpPr/>
-          <p:nvPr/>
-        </p:nvSpPr>
-        <p:spPr>
-          <a:xfrm>
-            <a:off x="6629400" y="4608576"/>
-            <a:ext cx="54864" cy="621792"/>
-          </a:xfrm>
-          <a:prstGeom prst="rect">
-            <a:avLst/>
-          </a:prstGeom>
-          <a:solidFill>
-            <a:srgbClr val="34C759"/>
-          </a:solidFill>
-          <a:ln w="12700">
-            <a:solidFill>
-              <a:srgbClr val="34C759"/>
-            </a:solidFill>
-            <a:prstDash val="solid"/>
-          </a:ln>
-        </p:spPr>
-      </p:sp>
-      <p:sp>
-        <p:nvSpPr>
-          <p:cNvPr id="28" name="Text 26"/>
-          <p:cNvSpPr/>
-          <p:nvPr/>
-        </p:nvSpPr>
-        <p:spPr>
-          <a:xfrm>
-            <a:off x="6858000" y="4663440"/>
-            <a:ext cx="5056632" cy="512064"/>
-          </a:xfrm>
-          <a:prstGeom prst="rect">
-            <a:avLst/>
-          </a:prstGeom>
-          <a:noFill/>
-          <a:ln/>
-        </p:spPr>
-        <p:txBody>
-          <a:bodyPr wrap="square" rtlCol="0" anchor="ctr"/>
-          <a:lstStyle/>
-          <a:p>
-            <a:pPr indent="0" marL="0">
-              <a:buNone/>
-            </a:pPr>
-            <a:r>
-              <a:rPr lang="en-US" sz="1150" dirty="0">
-                <a:solidFill>
-                  <a:srgbClr val="F5F5F7"/>
-                </a:solidFill>
-                <a:latin typeface="Malgun Gothic" pitchFamily="34" charset="0"/>
-                <a:ea typeface="Malgun Gothic" pitchFamily="34" charset="-122"/>
-                <a:cs typeface="Malgun Gothic" pitchFamily="34" charset="-120"/>
-              </a:rPr>
               <a:t>콜드스타트·푸시 응답속도 획기적 개선</a:t>
             </a:r>
-            <a:endParaRPr lang="en-US" sz="1150" dirty="0"/>
-          </a:p>
-        </p:txBody>
-      </p:sp>
-      <p:sp>
-        <p:nvSpPr>
-          <p:cNvPr id="29" name="Shape 27"/>
+            <a:endParaRPr lang="en-US" sz="1100" dirty="0"/>
+          </a:p>
+        </p:txBody>
+      </p:sp>
+      <p:sp>
+        <p:nvSpPr>
+          <p:cNvPr id="31" name="Shape 28"/>
           <p:cNvSpPr/>
           <p:nvPr/>
         </p:nvSpPr>
@@ -7652,7 +7927,7 @@
       </p:sp>
       <p:sp>
         <p:nvSpPr>
-          <p:cNvPr id="30" name="Text 28"/>
+          <p:cNvPr id="32" name="Text 29"/>
           <p:cNvSpPr/>
           <p:nvPr/>
         </p:nvSpPr>
@@ -8025,23 +8300,23 @@
         <p:spPr>
           <a:xfrm>
             <a:off x="594360" y="1700784"/>
-            <a:ext cx="5943600" cy="1005840"/>
-          </a:xfrm>
-          <a:prstGeom prst="rect">
-            <a:avLst/>
-          </a:prstGeom>
-          <a:noFill/>
-          <a:ln/>
-        </p:spPr>
-        <p:txBody>
-          <a:bodyPr wrap="square" rtlCol="0" anchor="ctr"/>
-          <a:lstStyle/>
-          <a:p>
-            <a:pPr indent="0" marL="0">
-              <a:buNone/>
-            </a:pPr>
-            <a:r>
-              <a:rPr lang="en-US" sz="1250" dirty="0">
+            <a:ext cx="5943600" cy="804672"/>
+          </a:xfrm>
+          <a:prstGeom prst="rect">
+            <a:avLst/>
+          </a:prstGeom>
+          <a:noFill/>
+          <a:ln/>
+        </p:spPr>
+        <p:txBody>
+          <a:bodyPr wrap="square" rtlCol="0" anchor="ctr"/>
+          <a:lstStyle/>
+          <a:p>
+            <a:pPr indent="0" marL="0">
+              <a:buNone/>
+            </a:pPr>
+            <a:r>
+              <a:rPr lang="en-US" sz="1200" dirty="0">
                 <a:solidFill>
                   <a:srgbClr val="F5F5F7"/>
                 </a:solidFill>
@@ -8049,9 +8324,9 @@
                 <a:ea typeface="Malgun Gothic" pitchFamily="34" charset="-122"/>
                 <a:cs typeface="Malgun Gothic" pitchFamily="34" charset="-120"/>
               </a:rPr>
-              <a:t>코딩 컨벤션 부재로 개발자마다 파일 구조·컴포넌트 방식이 달라 유지보수 비용 급증. 주소록 대량 업로드 시 엑셀 숫자 서식으로 전화번호 앞 0이 사라지는 문의가 반복 — "셀 서식을 텍스트로 바꿔주세요"라는 안내를 고객에게 전가 중이었음.</a:t>
-            </a:r>
-            <a:endParaRPr lang="en-US" sz="1250" dirty="0"/>
+              <a:t>코딩 컨벤션 부재로 개발자마다 파일 구조·컴포넌트 방식이 달라 유지보수 비용 급증. 주소록 업로드 시 엑셀 숫자 서식으로 전화번호 앞 0이 사라지는 문의가 반복.</a:t>
+            </a:r>
+            <a:endParaRPr lang="en-US" sz="1200" dirty="0"/>
           </a:p>
         </p:txBody>
       </p:sp>
@@ -8063,8 +8338,8 @@
         </p:nvSpPr>
         <p:spPr>
           <a:xfrm>
-            <a:off x="594360" y="2761488"/>
-            <a:ext cx="365760" cy="329184"/>
+            <a:off x="594360" y="2560320"/>
+            <a:ext cx="365760" cy="292608"/>
           </a:xfrm>
           <a:prstGeom prst="rect">
             <a:avLst/>
@@ -8080,7 +8355,7 @@
               <a:buNone/>
             </a:pPr>
             <a:r>
-              <a:rPr lang="en-US" sz="1800" dirty="0">
+              <a:rPr lang="en-US" sz="1600" dirty="0">
                 <a:solidFill>
                   <a:srgbClr val="48484F"/>
                 </a:solidFill>
@@ -8090,7 +8365,7 @@
               </a:rPr>
               <a:t>↓</a:t>
             </a:r>
-            <a:endParaRPr lang="en-US" sz="1800" dirty="0"/>
+            <a:endParaRPr lang="en-US" sz="1600" dirty="0"/>
           </a:p>
         </p:txBody>
       </p:sp>
@@ -8102,7 +8377,7 @@
         </p:nvSpPr>
         <p:spPr>
           <a:xfrm>
-            <a:off x="502920" y="3145536"/>
+            <a:off x="502920" y="2889504"/>
             <a:ext cx="6126480" cy="256032"/>
           </a:xfrm>
           <a:prstGeom prst="rect">
@@ -8127,7 +8402,7 @@
         </p:nvSpPr>
         <p:spPr>
           <a:xfrm>
-            <a:off x="594360" y="3163824"/>
+            <a:off x="594360" y="2907792"/>
             <a:ext cx="5943600" cy="219456"/>
           </a:xfrm>
           <a:prstGeom prst="rect">
@@ -8166,8 +8441,8 @@
         </p:nvSpPr>
         <p:spPr>
           <a:xfrm>
-            <a:off x="594360" y="3493008"/>
-            <a:ext cx="5943600" cy="594360"/>
+            <a:off x="594360" y="3218688"/>
+            <a:ext cx="5943600" cy="566928"/>
           </a:xfrm>
           <a:prstGeom prst="rect">
             <a:avLst/>
@@ -8191,7 +8466,7 @@
                 <a:ea typeface="Malgun Gothic" pitchFamily="34" charset="-122"/>
                 <a:cs typeface="Malgun Gothic" pitchFamily="34" charset="-120"/>
               </a:rPr>
-              <a:t>•  컨벤션 수립 + React Query 도입으로 구조 표준화. API 캐싱·Code Splitting으로 속도 개선. Knip으로 미사용 파일 297개 제거, Unused exports 182→0, types 63→0</a:t>
+              <a:t>•  컨벤션 수립 + React Query 표준화. Code Splitting·API 캐싱 적용. Knip으로 파일 297개↓, exports 182→0</a:t>
             </a:r>
             <a:endParaRPr lang="en-US" sz="1200" dirty="0"/>
           </a:p>
@@ -8205,8 +8480,8 @@
         </p:nvSpPr>
         <p:spPr>
           <a:xfrm>
-            <a:off x="594360" y="4151376"/>
-            <a:ext cx="5943600" cy="594360"/>
+            <a:off x="594360" y="3840480"/>
+            <a:ext cx="5943600" cy="566928"/>
           </a:xfrm>
           <a:prstGeom prst="rect">
             <a:avLst/>
@@ -8230,7 +8505,7 @@
                 <a:ea typeface="Malgun Gothic" pitchFamily="34" charset="-122"/>
                 <a:cs typeface="Malgun Gothic" pitchFamily="34" charset="-120"/>
               </a:rPr>
-              <a:t>•  엑셀 주소록 양식의 전화번호 열을 텍스트 서식으로 미리 설정하여 제공 — 고객에게 해결 책임을 전가하지 않고 업로드 양식 자체를 개선, 반복 문의 근본 해소</a:t>
+              <a:t>•  엑셀 양식 전화번호 열을 텍스트 서식으로 미리 제공 — 고객 전가 대신 양식 자체를 개선해 반복 문의 근본 해소</a:t>
             </a:r>
             <a:endParaRPr lang="en-US" sz="1200" dirty="0"/>
           </a:p>
@@ -8244,8 +8519,300 @@
         </p:nvSpPr>
         <p:spPr>
           <a:xfrm>
-            <a:off x="502920" y="6144768"/>
-            <a:ext cx="6126480" cy="384048"/>
+            <a:off x="594360" y="4535424"/>
+            <a:ext cx="5943600" cy="10973"/>
+          </a:xfrm>
+          <a:prstGeom prst="rect">
+            <a:avLst/>
+          </a:prstGeom>
+          <a:solidFill>
+            <a:srgbClr val="18181F"/>
+          </a:solidFill>
+          <a:ln w="12700">
+            <a:solidFill>
+              <a:srgbClr val="18181F"/>
+            </a:solidFill>
+            <a:prstDash val="solid"/>
+          </a:ln>
+        </p:spPr>
+      </p:sp>
+      <p:sp>
+        <p:nvSpPr>
+          <p:cNvPr id="18" name="Shape 16"/>
+          <p:cNvSpPr/>
+          <p:nvPr/>
+        </p:nvSpPr>
+        <p:spPr>
+          <a:xfrm>
+            <a:off x="502920" y="4626864"/>
+            <a:ext cx="6126480" cy="237744"/>
+          </a:xfrm>
+          <a:prstGeom prst="rect">
+            <a:avLst/>
+          </a:prstGeom>
+          <a:solidFill>
+            <a:srgbClr val="0A0A1A"/>
+          </a:solidFill>
+          <a:ln w="12700">
+            <a:solidFill>
+              <a:srgbClr val="0A0A1A"/>
+            </a:solidFill>
+            <a:prstDash val="solid"/>
+          </a:ln>
+        </p:spPr>
+      </p:sp>
+      <p:sp>
+        <p:nvSpPr>
+          <p:cNvPr id="19" name="Text 17"/>
+          <p:cNvSpPr/>
+          <p:nvPr/>
+        </p:nvSpPr>
+        <p:spPr>
+          <a:xfrm>
+            <a:off x="594360" y="4645152"/>
+            <a:ext cx="5943600" cy="201168"/>
+          </a:xfrm>
+          <a:prstGeom prst="rect">
+            <a:avLst/>
+          </a:prstGeom>
+          <a:noFill/>
+          <a:ln/>
+        </p:spPr>
+        <p:txBody>
+          <a:bodyPr wrap="square" rtlCol="0" anchor="ctr"/>
+          <a:lstStyle/>
+          <a:p>
+            <a:pPr indent="0" marL="0">
+              <a:buNone/>
+            </a:pPr>
+            <a:r>
+              <a:rPr lang="en-US" sz="800" b="1" spc="150" kern="0" dirty="0">
+                <a:solidFill>
+                  <a:srgbClr val="A5B4FC"/>
+                </a:solidFill>
+                <a:latin typeface="Malgun Gothic" pitchFamily="34" charset="0"/>
+                <a:ea typeface="Malgun Gothic" pitchFamily="34" charset="-122"/>
+                <a:cs typeface="Malgun Gothic" pitchFamily="34" charset="-120"/>
+              </a:rPr>
+              <a:t>📋  담당 업무</a:t>
+            </a:r>
+            <a:endParaRPr lang="en-US" sz="800" dirty="0"/>
+          </a:p>
+        </p:txBody>
+      </p:sp>
+      <p:sp>
+        <p:nvSpPr>
+          <p:cNvPr id="20" name="Text 18"/>
+          <p:cNvSpPr/>
+          <p:nvPr/>
+        </p:nvSpPr>
+        <p:spPr>
+          <a:xfrm>
+            <a:off x="594360" y="4937760"/>
+            <a:ext cx="2834640" cy="347472"/>
+          </a:xfrm>
+          <a:prstGeom prst="rect">
+            <a:avLst/>
+          </a:prstGeom>
+          <a:noFill/>
+          <a:ln/>
+        </p:spPr>
+        <p:txBody>
+          <a:bodyPr wrap="square" rtlCol="0" anchor="ctr"/>
+          <a:lstStyle/>
+          <a:p>
+            <a:pPr indent="0" marL="0">
+              <a:buNone/>
+            </a:pPr>
+            <a:r>
+              <a:rPr lang="en-US" sz="1050" dirty="0">
+                <a:solidFill>
+                  <a:srgbClr val="F5F5F7"/>
+                </a:solidFill>
+                <a:latin typeface="Malgun Gothic" pitchFamily="34" charset="0"/>
+                <a:ea typeface="Malgun Gothic" pitchFamily="34" charset="-122"/>
+                <a:cs typeface="Malgun Gothic" pitchFamily="34" charset="-120"/>
+              </a:rPr>
+              <a:t>•  알림톡·메시지 발송 프로세스 개발</a:t>
+            </a:r>
+            <a:endParaRPr lang="en-US" sz="1050" dirty="0"/>
+          </a:p>
+        </p:txBody>
+      </p:sp>
+      <p:sp>
+        <p:nvSpPr>
+          <p:cNvPr id="21" name="Text 19"/>
+          <p:cNvSpPr/>
+          <p:nvPr/>
+        </p:nvSpPr>
+        <p:spPr>
+          <a:xfrm>
+            <a:off x="594360" y="5340096"/>
+            <a:ext cx="2834640" cy="347472"/>
+          </a:xfrm>
+          <a:prstGeom prst="rect">
+            <a:avLst/>
+          </a:prstGeom>
+          <a:noFill/>
+          <a:ln/>
+        </p:spPr>
+        <p:txBody>
+          <a:bodyPr wrap="square" rtlCol="0" anchor="ctr"/>
+          <a:lstStyle/>
+          <a:p>
+            <a:pPr indent="0" marL="0">
+              <a:buNone/>
+            </a:pPr>
+            <a:r>
+              <a:rPr lang="en-US" sz="1050" dirty="0">
+                <a:solidFill>
+                  <a:srgbClr val="F5F5F7"/>
+                </a:solidFill>
+                <a:latin typeface="Malgun Gothic" pitchFamily="34" charset="0"/>
+                <a:ea typeface="Malgun Gothic" pitchFamily="34" charset="-122"/>
+                <a:cs typeface="Malgun Gothic" pitchFamily="34" charset="-120"/>
+              </a:rPr>
+              <a:t>•  발송 대상·템플릿 관리 시스템 구축</a:t>
+            </a:r>
+            <a:endParaRPr lang="en-US" sz="1050" dirty="0"/>
+          </a:p>
+        </p:txBody>
+      </p:sp>
+      <p:sp>
+        <p:nvSpPr>
+          <p:cNvPr id="22" name="Text 20"/>
+          <p:cNvSpPr/>
+          <p:nvPr/>
+        </p:nvSpPr>
+        <p:spPr>
+          <a:xfrm>
+            <a:off x="3493008" y="4937760"/>
+            <a:ext cx="2834640" cy="347472"/>
+          </a:xfrm>
+          <a:prstGeom prst="rect">
+            <a:avLst/>
+          </a:prstGeom>
+          <a:noFill/>
+          <a:ln/>
+        </p:spPr>
+        <p:txBody>
+          <a:bodyPr wrap="square" rtlCol="0" anchor="ctr"/>
+          <a:lstStyle/>
+          <a:p>
+            <a:pPr indent="0" marL="0">
+              <a:buNone/>
+            </a:pPr>
+            <a:r>
+              <a:rPr lang="en-US" sz="1050" dirty="0">
+                <a:solidFill>
+                  <a:srgbClr val="F5F5F7"/>
+                </a:solidFill>
+                <a:latin typeface="Malgun Gothic" pitchFamily="34" charset="0"/>
+                <a:ea typeface="Malgun Gothic" pitchFamily="34" charset="-122"/>
+                <a:cs typeface="Malgun Gothic" pitchFamily="34" charset="-120"/>
+              </a:rPr>
+              <a:t>•  UI/UX 리뉴얼 및 디자인 시스템 개선</a:t>
+            </a:r>
+            <a:endParaRPr lang="en-US" sz="1050" dirty="0"/>
+          </a:p>
+        </p:txBody>
+      </p:sp>
+      <p:sp>
+        <p:nvSpPr>
+          <p:cNvPr id="23" name="Text 21"/>
+          <p:cNvSpPr/>
+          <p:nvPr/>
+        </p:nvSpPr>
+        <p:spPr>
+          <a:xfrm>
+            <a:off x="3493008" y="5340096"/>
+            <a:ext cx="2834640" cy="347472"/>
+          </a:xfrm>
+          <a:prstGeom prst="rect">
+            <a:avLst/>
+          </a:prstGeom>
+          <a:noFill/>
+          <a:ln/>
+        </p:spPr>
+        <p:txBody>
+          <a:bodyPr wrap="square" rtlCol="0" anchor="ctr"/>
+          <a:lstStyle/>
+          <a:p>
+            <a:pPr indent="0" marL="0">
+              <a:buNone/>
+            </a:pPr>
+            <a:r>
+              <a:rPr lang="en-US" sz="1050" dirty="0">
+                <a:solidFill>
+                  <a:srgbClr val="F5F5F7"/>
+                </a:solidFill>
+                <a:latin typeface="Malgun Gothic" pitchFamily="34" charset="0"/>
+                <a:ea typeface="Malgun Gothic" pitchFamily="34" charset="-122"/>
+                <a:cs typeface="Malgun Gothic" pitchFamily="34" charset="-120"/>
+              </a:rPr>
+              <a:t>•  컨벤션 수립·기술 문서 관리 (Claude.md 기반)</a:t>
+            </a:r>
+            <a:endParaRPr lang="en-US" sz="1050" dirty="0"/>
+          </a:p>
+        </p:txBody>
+      </p:sp>
+      <p:pic>
+        <p:nvPicPr>
+          <p:cNvPr id="24" name="Image 0" descr="/Users/jinwon/Desktop/jinwon-portfolio/apps/web/public/images/projects/web015-3.png">    </p:cNvPr>
+          <p:cNvPicPr>
+            <a:picLocks noChangeAspect="1"/>
+          </p:cNvPicPr>
+          <p:nvPr/>
+        </p:nvPicPr>
+        <p:blipFill>
+          <a:blip r:embed="rId1"/>
+          <a:srcRect l="0" r="0" t="0" b="0"/>
+          <a:stretch/>
+        </p:blipFill>
+        <p:spPr>
+          <a:xfrm>
+            <a:off x="6684264" y="1371600"/>
+            <a:ext cx="5266944" cy="1298448"/>
+          </a:xfrm>
+          <a:prstGeom prst="rect">
+            <a:avLst/>
+          </a:prstGeom>
+        </p:spPr>
+      </p:pic>
+      <p:sp>
+        <p:nvSpPr>
+          <p:cNvPr id="25" name="Shape 22"/>
+          <p:cNvSpPr/>
+          <p:nvPr/>
+        </p:nvSpPr>
+        <p:spPr>
+          <a:xfrm>
+            <a:off x="6684264" y="1371600"/>
+            <a:ext cx="5266944" cy="1298448"/>
+          </a:xfrm>
+          <a:prstGeom prst="rect">
+            <a:avLst/>
+          </a:prstGeom>
+          <a:ln w="12700">
+            <a:solidFill>
+              <a:srgbClr val="818CF8">
+                <a:alpha val="60000"/>
+              </a:srgbClr>
+            </a:solidFill>
+            <a:prstDash val="solid"/>
+          </a:ln>
+        </p:spPr>
+      </p:sp>
+      <p:sp>
+        <p:nvSpPr>
+          <p:cNvPr id="26" name="Shape 23"/>
+          <p:cNvSpPr/>
+          <p:nvPr/>
+        </p:nvSpPr>
+        <p:spPr>
+          <a:xfrm>
+            <a:off x="6629400" y="2761488"/>
+            <a:ext cx="5376672" cy="1444752"/>
           </a:xfrm>
           <a:prstGeom prst="rect">
             <a:avLst/>
@@ -8263,53 +8830,117 @@
       </p:sp>
       <p:sp>
         <p:nvSpPr>
-          <p:cNvPr id="18" name="Text 16"/>
-          <p:cNvSpPr/>
-          <p:nvPr/>
-        </p:nvSpPr>
-        <p:spPr>
-          <a:xfrm>
-            <a:off x="640080" y="6163056"/>
-            <a:ext cx="5943600" cy="329184"/>
-          </a:xfrm>
-          <a:prstGeom prst="rect">
-            <a:avLst/>
-          </a:prstGeom>
-          <a:noFill/>
-          <a:ln/>
-        </p:spPr>
-        <p:txBody>
-          <a:bodyPr wrap="square" rtlCol="0" anchor="ctr"/>
-          <a:lstStyle/>
-          <a:p>
-            <a:pPr indent="0" marL="0">
-              <a:buNone/>
-            </a:pPr>
-            <a:r>
-              <a:rPr lang="en-US" sz="900" dirty="0">
-                <a:solidFill>
-                  <a:srgbClr val="48484F"/>
-                </a:solidFill>
-                <a:latin typeface="Malgun Gothic" pitchFamily="34" charset="0"/>
-                <a:ea typeface="Malgun Gothic" pitchFamily="34" charset="-122"/>
-                <a:cs typeface="Malgun Gothic" pitchFamily="34" charset="-120"/>
-              </a:rPr>
-              <a:t>주요업무  ·  알림톡·메시지 발송 프로세스 개발  ·  발송 대상·템플릿 관리 시스템  ·  UI/UX 리뉴얼·디자인 시스템 개선  ·  컨벤션 수립 및 기술 문서 관리</a:t>
-            </a:r>
-            <a:endParaRPr lang="en-US" sz="900" dirty="0"/>
-          </a:p>
-        </p:txBody>
-      </p:sp>
-      <p:sp>
-        <p:nvSpPr>
-          <p:cNvPr id="19" name="Shape 17"/>
-          <p:cNvSpPr/>
-          <p:nvPr/>
-        </p:nvSpPr>
-        <p:spPr>
-          <a:xfrm>
-            <a:off x="6629400" y="1371600"/>
-            <a:ext cx="5376672" cy="2286000"/>
+          <p:cNvPr id="27" name="Shape 24"/>
+          <p:cNvSpPr/>
+          <p:nvPr/>
+        </p:nvSpPr>
+        <p:spPr>
+          <a:xfrm>
+            <a:off x="6629400" y="2761488"/>
+            <a:ext cx="54864" cy="1444752"/>
+          </a:xfrm>
+          <a:prstGeom prst="rect">
+            <a:avLst/>
+          </a:prstGeom>
+          <a:solidFill>
+            <a:srgbClr val="818CF8"/>
+          </a:solidFill>
+          <a:ln w="12700">
+            <a:solidFill>
+              <a:srgbClr val="818CF8"/>
+            </a:solidFill>
+            <a:prstDash val="solid"/>
+          </a:ln>
+        </p:spPr>
+      </p:sp>
+      <p:sp>
+        <p:nvSpPr>
+          <p:cNvPr id="28" name="Text 25"/>
+          <p:cNvSpPr/>
+          <p:nvPr/>
+        </p:nvSpPr>
+        <p:spPr>
+          <a:xfrm>
+            <a:off x="6858000" y="2871216"/>
+            <a:ext cx="5056632" cy="822960"/>
+          </a:xfrm>
+          <a:prstGeom prst="rect">
+            <a:avLst/>
+          </a:prstGeom>
+          <a:noFill/>
+          <a:ln/>
+        </p:spPr>
+        <p:txBody>
+          <a:bodyPr wrap="square" rtlCol="0" anchor="ctr"/>
+          <a:lstStyle/>
+          <a:p>
+            <a:pPr algn="ctr" indent="0" marL="0">
+              <a:buNone/>
+            </a:pPr>
+            <a:r>
+              <a:rPr lang="en-US" sz="4200" b="1" dirty="0">
+                <a:solidFill>
+                  <a:srgbClr val="818CF8"/>
+                </a:solidFill>
+                <a:latin typeface="Malgun Gothic" pitchFamily="34" charset="0"/>
+                <a:ea typeface="Malgun Gothic" pitchFamily="34" charset="-122"/>
+                <a:cs typeface="Malgun Gothic" pitchFamily="34" charset="-120"/>
+              </a:rPr>
+              <a:t>40%</a:t>
+            </a:r>
+            <a:endParaRPr lang="en-US" sz="4200" dirty="0"/>
+          </a:p>
+        </p:txBody>
+      </p:sp>
+      <p:sp>
+        <p:nvSpPr>
+          <p:cNvPr id="29" name="Text 26"/>
+          <p:cNvSpPr/>
+          <p:nvPr/>
+        </p:nvSpPr>
+        <p:spPr>
+          <a:xfrm>
+            <a:off x="6858000" y="3822192"/>
+            <a:ext cx="5056632" cy="329184"/>
+          </a:xfrm>
+          <a:prstGeom prst="rect">
+            <a:avLst/>
+          </a:prstGeom>
+          <a:noFill/>
+          <a:ln/>
+        </p:spPr>
+        <p:txBody>
+          <a:bodyPr wrap="square" rtlCol="0" anchor="ctr"/>
+          <a:lstStyle/>
+          <a:p>
+            <a:pPr algn="ctr" indent="0" marL="0">
+              <a:buNone/>
+            </a:pPr>
+            <a:r>
+              <a:rPr lang="en-US" sz="1100" dirty="0">
+                <a:solidFill>
+                  <a:srgbClr val="8E8E93"/>
+                </a:solidFill>
+                <a:latin typeface="Malgun Gothic" pitchFamily="34" charset="0"/>
+                <a:ea typeface="Malgun Gothic" pitchFamily="34" charset="-122"/>
+                <a:cs typeface="Malgun Gothic" pitchFamily="34" charset="-120"/>
+              </a:rPr>
+              <a:t>유지보수 공수 절감</a:t>
+            </a:r>
+            <a:endParaRPr lang="en-US" sz="1100" dirty="0"/>
+          </a:p>
+        </p:txBody>
+      </p:sp>
+      <p:sp>
+        <p:nvSpPr>
+          <p:cNvPr id="30" name="Shape 27"/>
+          <p:cNvSpPr/>
+          <p:nvPr/>
+        </p:nvSpPr>
+        <p:spPr>
+          <a:xfrm>
+            <a:off x="6629400" y="4315968"/>
+            <a:ext cx="5376672" cy="566928"/>
           </a:xfrm>
           <a:prstGeom prst="rect">
             <a:avLst/>
@@ -8327,117 +8958,78 @@
       </p:sp>
       <p:sp>
         <p:nvSpPr>
-          <p:cNvPr id="20" name="Shape 18"/>
-          <p:cNvSpPr/>
-          <p:nvPr/>
-        </p:nvSpPr>
-        <p:spPr>
-          <a:xfrm>
-            <a:off x="6629400" y="1371600"/>
-            <a:ext cx="54864" cy="2286000"/>
-          </a:xfrm>
-          <a:prstGeom prst="rect">
-            <a:avLst/>
-          </a:prstGeom>
-          <a:solidFill>
-            <a:srgbClr val="818CF8"/>
-          </a:solidFill>
-          <a:ln w="12700">
-            <a:solidFill>
-              <a:srgbClr val="818CF8"/>
-            </a:solidFill>
-            <a:prstDash val="solid"/>
-          </a:ln>
-        </p:spPr>
-      </p:sp>
-      <p:sp>
-        <p:nvSpPr>
-          <p:cNvPr id="21" name="Text 19"/>
-          <p:cNvSpPr/>
-          <p:nvPr/>
-        </p:nvSpPr>
-        <p:spPr>
-          <a:xfrm>
-            <a:off x="6858000" y="1554480"/>
-            <a:ext cx="5056632" cy="1188720"/>
-          </a:xfrm>
-          <a:prstGeom prst="rect">
-            <a:avLst/>
-          </a:prstGeom>
-          <a:noFill/>
-          <a:ln/>
-        </p:spPr>
-        <p:txBody>
-          <a:bodyPr wrap="square" rtlCol="0" anchor="ctr"/>
-          <a:lstStyle/>
-          <a:p>
-            <a:pPr algn="ctr" indent="0" marL="0">
-              <a:buNone/>
-            </a:pPr>
-            <a:r>
-              <a:rPr lang="en-US" sz="5600" b="1" dirty="0">
-                <a:solidFill>
-                  <a:srgbClr val="818CF8"/>
-                </a:solidFill>
-                <a:latin typeface="Malgun Gothic" pitchFamily="34" charset="0"/>
-                <a:ea typeface="Malgun Gothic" pitchFamily="34" charset="-122"/>
-                <a:cs typeface="Malgun Gothic" pitchFamily="34" charset="-120"/>
-              </a:rPr>
-              <a:t>40%</a:t>
-            </a:r>
-            <a:endParaRPr lang="en-US" sz="5600" dirty="0"/>
-          </a:p>
-        </p:txBody>
-      </p:sp>
-      <p:sp>
-        <p:nvSpPr>
-          <p:cNvPr id="22" name="Text 20"/>
-          <p:cNvSpPr/>
-          <p:nvPr/>
-        </p:nvSpPr>
-        <p:spPr>
-          <a:xfrm>
-            <a:off x="6858000" y="2743200"/>
-            <a:ext cx="5056632" cy="329184"/>
-          </a:xfrm>
-          <a:prstGeom prst="rect">
-            <a:avLst/>
-          </a:prstGeom>
-          <a:noFill/>
-          <a:ln/>
-        </p:spPr>
-        <p:txBody>
-          <a:bodyPr wrap="square" rtlCol="0" anchor="ctr"/>
-          <a:lstStyle/>
-          <a:p>
-            <a:pPr algn="ctr" indent="0" marL="0">
-              <a:buNone/>
-            </a:pPr>
-            <a:r>
-              <a:rPr lang="en-US" sz="1200" dirty="0">
-                <a:solidFill>
-                  <a:srgbClr val="8E8E93"/>
-                </a:solidFill>
-                <a:latin typeface="Malgun Gothic" pitchFamily="34" charset="0"/>
-                <a:ea typeface="Malgun Gothic" pitchFamily="34" charset="-122"/>
-                <a:cs typeface="Malgun Gothic" pitchFamily="34" charset="-120"/>
-              </a:rPr>
-              <a:t>유지보수 공수 절감</a:t>
-            </a:r>
-            <a:endParaRPr lang="en-US" sz="1200" dirty="0"/>
-          </a:p>
-        </p:txBody>
-      </p:sp>
-      <p:sp>
-        <p:nvSpPr>
-          <p:cNvPr id="23" name="Shape 21"/>
-          <p:cNvSpPr/>
-          <p:nvPr/>
-        </p:nvSpPr>
-        <p:spPr>
-          <a:xfrm>
-            <a:off x="6629400" y="3858768"/>
-            <a:ext cx="5376672" cy="621792"/>
+          <p:cNvPr id="31" name="Shape 28"/>
+          <p:cNvSpPr/>
+          <p:nvPr/>
+        </p:nvSpPr>
+        <p:spPr>
+          <a:xfrm>
+            <a:off x="6629400" y="4315968"/>
+            <a:ext cx="54864" cy="566928"/>
+          </a:xfrm>
+          <a:prstGeom prst="rect">
+            <a:avLst/>
+          </a:prstGeom>
+          <a:solidFill>
+            <a:srgbClr val="34C759"/>
+          </a:solidFill>
+          <a:ln w="12700">
+            <a:solidFill>
+              <a:srgbClr val="34C759"/>
+            </a:solidFill>
+            <a:prstDash val="solid"/>
+          </a:ln>
+        </p:spPr>
+      </p:sp>
+      <p:sp>
+        <p:nvSpPr>
+          <p:cNvPr id="32" name="Text 29"/>
+          <p:cNvSpPr/>
+          <p:nvPr/>
+        </p:nvSpPr>
+        <p:spPr>
+          <a:xfrm>
+            <a:off x="6858000" y="4361688"/>
+            <a:ext cx="5056632" cy="475488"/>
+          </a:xfrm>
+          <a:prstGeom prst="rect">
+            <a:avLst/>
+          </a:prstGeom>
+          <a:noFill/>
+          <a:ln/>
+        </p:spPr>
+        <p:txBody>
+          <a:bodyPr wrap="square" rtlCol="0" anchor="ctr"/>
+          <a:lstStyle/>
+          <a:p>
+            <a:pPr indent="0" marL="0">
+              <a:buNone/>
+            </a:pPr>
+            <a:r>
+              <a:rPr lang="en-US" sz="1100" dirty="0">
+                <a:solidFill>
+                  <a:srgbClr val="F5F5F7"/>
+                </a:solidFill>
+                <a:latin typeface="Malgun Gothic" pitchFamily="34" charset="0"/>
+                <a:ea typeface="Malgun Gothic" pitchFamily="34" charset="-122"/>
+                <a:cs typeface="Malgun Gothic" pitchFamily="34" charset="-120"/>
+              </a:rPr>
+              <a:t>고객 문의 감소 및 업로드 UX 개선</a:t>
+            </a:r>
+            <a:endParaRPr lang="en-US" sz="1100" dirty="0"/>
+          </a:p>
+        </p:txBody>
+      </p:sp>
+      <p:sp>
+        <p:nvSpPr>
+          <p:cNvPr id="33" name="Shape 30"/>
+          <p:cNvSpPr/>
+          <p:nvPr/>
+        </p:nvSpPr>
+        <p:spPr>
+          <a:xfrm>
+            <a:off x="6629400" y="5010912"/>
+            <a:ext cx="5376672" cy="566928"/>
           </a:xfrm>
           <a:prstGeom prst="rect">
             <a:avLst/>
@@ -8455,14 +9047,14 @@
       </p:sp>
       <p:sp>
         <p:nvSpPr>
-          <p:cNvPr id="24" name="Shape 22"/>
-          <p:cNvSpPr/>
-          <p:nvPr/>
-        </p:nvSpPr>
-        <p:spPr>
-          <a:xfrm>
-            <a:off x="6629400" y="3858768"/>
-            <a:ext cx="54864" cy="621792"/>
+          <p:cNvPr id="34" name="Shape 31"/>
+          <p:cNvSpPr/>
+          <p:nvPr/>
+        </p:nvSpPr>
+        <p:spPr>
+          <a:xfrm>
+            <a:off x="6629400" y="5010912"/>
+            <a:ext cx="54864" cy="566928"/>
           </a:xfrm>
           <a:prstGeom prst="rect">
             <a:avLst/>
@@ -8480,30 +9072,30 @@
       </p:sp>
       <p:sp>
         <p:nvSpPr>
-          <p:cNvPr id="25" name="Text 23"/>
-          <p:cNvSpPr/>
-          <p:nvPr/>
-        </p:nvSpPr>
-        <p:spPr>
-          <a:xfrm>
-            <a:off x="6858000" y="3913632"/>
-            <a:ext cx="5056632" cy="512064"/>
-          </a:xfrm>
-          <a:prstGeom prst="rect">
-            <a:avLst/>
-          </a:prstGeom>
-          <a:noFill/>
-          <a:ln/>
-        </p:spPr>
-        <p:txBody>
-          <a:bodyPr wrap="square" rtlCol="0" anchor="ctr"/>
-          <a:lstStyle/>
-          <a:p>
-            <a:pPr indent="0" marL="0">
-              <a:buNone/>
-            </a:pPr>
-            <a:r>
-              <a:rPr lang="en-US" sz="1150" dirty="0">
+          <p:cNvPr id="35" name="Text 32"/>
+          <p:cNvSpPr/>
+          <p:nvPr/>
+        </p:nvSpPr>
+        <p:spPr>
+          <a:xfrm>
+            <a:off x="6858000" y="5056632"/>
+            <a:ext cx="5056632" cy="475488"/>
+          </a:xfrm>
+          <a:prstGeom prst="rect">
+            <a:avLst/>
+          </a:prstGeom>
+          <a:noFill/>
+          <a:ln/>
+        </p:spPr>
+        <p:txBody>
+          <a:bodyPr wrap="square" rtlCol="0" anchor="ctr"/>
+          <a:lstStyle/>
+          <a:p>
+            <a:pPr indent="0" marL="0">
+              <a:buNone/>
+            </a:pPr>
+            <a:r>
+              <a:rPr lang="en-US" sz="1100" dirty="0">
                 <a:solidFill>
                   <a:srgbClr val="F5F5F7"/>
                 </a:solidFill>
@@ -8511,104 +9103,15 @@
                 <a:ea typeface="Malgun Gothic" pitchFamily="34" charset="-122"/>
                 <a:cs typeface="Malgun Gothic" pitchFamily="34" charset="-120"/>
               </a:rPr>
-              <a:t>고객 문의 감소 및 업로드 UX 개선 (엑셀 서식 트러블슈팅)</a:t>
-            </a:r>
-            <a:endParaRPr lang="en-US" sz="1150" dirty="0"/>
-          </a:p>
-        </p:txBody>
-      </p:sp>
-      <p:sp>
-        <p:nvSpPr>
-          <p:cNvPr id="26" name="Shape 24"/>
-          <p:cNvSpPr/>
-          <p:nvPr/>
-        </p:nvSpPr>
-        <p:spPr>
-          <a:xfrm>
-            <a:off x="6629400" y="4608576"/>
-            <a:ext cx="5376672" cy="621792"/>
-          </a:xfrm>
-          <a:prstGeom prst="rect">
-            <a:avLst/>
-          </a:prstGeom>
-          <a:solidFill>
-            <a:srgbClr val="111116"/>
-          </a:solidFill>
-          <a:ln w="12700">
-            <a:solidFill>
-              <a:srgbClr val="111116"/>
-            </a:solidFill>
-            <a:prstDash val="solid"/>
-          </a:ln>
-        </p:spPr>
-      </p:sp>
-      <p:sp>
-        <p:nvSpPr>
-          <p:cNvPr id="27" name="Shape 25"/>
-          <p:cNvSpPr/>
-          <p:nvPr/>
-        </p:nvSpPr>
-        <p:spPr>
-          <a:xfrm>
-            <a:off x="6629400" y="4608576"/>
-            <a:ext cx="54864" cy="621792"/>
-          </a:xfrm>
-          <a:prstGeom prst="rect">
-            <a:avLst/>
-          </a:prstGeom>
-          <a:solidFill>
-            <a:srgbClr val="34C759"/>
-          </a:solidFill>
-          <a:ln w="12700">
-            <a:solidFill>
-              <a:srgbClr val="34C759"/>
-            </a:solidFill>
-            <a:prstDash val="solid"/>
-          </a:ln>
-        </p:spPr>
-      </p:sp>
-      <p:sp>
-        <p:nvSpPr>
-          <p:cNvPr id="28" name="Text 26"/>
-          <p:cNvSpPr/>
-          <p:nvPr/>
-        </p:nvSpPr>
-        <p:spPr>
-          <a:xfrm>
-            <a:off x="6858000" y="4663440"/>
-            <a:ext cx="5056632" cy="512064"/>
-          </a:xfrm>
-          <a:prstGeom prst="rect">
-            <a:avLst/>
-          </a:prstGeom>
-          <a:noFill/>
-          <a:ln/>
-        </p:spPr>
-        <p:txBody>
-          <a:bodyPr wrap="square" rtlCol="0" anchor="ctr"/>
-          <a:lstStyle/>
-          <a:p>
-            <a:pPr indent="0" marL="0">
-              <a:buNone/>
-            </a:pPr>
-            <a:r>
-              <a:rPr lang="en-US" sz="1150" dirty="0">
-                <a:solidFill>
-                  <a:srgbClr val="F5F5F7"/>
-                </a:solidFill>
-                <a:latin typeface="Malgun Gothic" pitchFamily="34" charset="0"/>
-                <a:ea typeface="Malgun Gothic" pitchFamily="34" charset="-122"/>
-                <a:cs typeface="Malgun Gothic" pitchFamily="34" charset="-120"/>
-              </a:rPr>
-              <a:t>일관된 구조 정립으로 팀원 온보딩·협업 효율성 강화</a:t>
-            </a:r>
-            <a:endParaRPr lang="en-US" sz="1150" dirty="0"/>
-          </a:p>
-        </p:txBody>
-      </p:sp>
-      <p:sp>
-        <p:nvSpPr>
-          <p:cNvPr id="29" name="Shape 27"/>
+              <a:t>일관된 구조로 팀원 온보딩·협업 효율 강화</a:t>
+            </a:r>
+            <a:endParaRPr lang="en-US" sz="1100" dirty="0"/>
+          </a:p>
+        </p:txBody>
+      </p:sp>
+      <p:sp>
+        <p:nvSpPr>
+          <p:cNvPr id="36" name="Shape 33"/>
           <p:cNvSpPr/>
           <p:nvPr/>
         </p:nvSpPr>
@@ -8633,7 +9136,7 @@
       </p:sp>
       <p:sp>
         <p:nvSpPr>
-          <p:cNvPr id="30" name="Text 28"/>
+          <p:cNvPr id="37" name="Text 34"/>
           <p:cNvSpPr/>
           <p:nvPr/>
         </p:nvSpPr>
@@ -8664,7 +9167,7 @@
                 <a:ea typeface="Malgun Gothic" pitchFamily="34" charset="-122"/>
                 <a:cs typeface="Malgun Gothic" pitchFamily="34" charset="-120"/>
               </a:rPr>
-              <a:t>React 18  ·  TypeScript  ·  TanStack Query  ·  Vite  ·  Recoil  ·  Styled-Components  ·  Ant Design  ·  STOMP/WebSocket  ·  JsSIP  ·  React Hook Form</a:t>
+              <a:t>React 18  ·  TypeScript  ·  TanStack Query  ·  Vite  ·  Recoil  ·  Styled-Components  ·  Ant Design  ·  STOMP/WebSocket  ·  JsSIP</a:t>
             </a:r>
             <a:endParaRPr lang="en-US" sz="800" dirty="0"/>
           </a:p>
@@ -8838,7 +9341,7 @@
                 <a:ea typeface="Malgun Gothic" pitchFamily="34" charset="-122"/>
                 <a:cs typeface="Malgun Gothic" pitchFamily="34" charset="-120"/>
               </a:rPr>
-              <a:t>기존 관리자 시스템을 대체하는 차세대 운영 플랫폼 — FE 2인 주도</a:t>
+              <a:t>기존 노후 관리자 시스템을 대체하는 차세대 운영 플랫폼 — FE 2인 주도 신규 구축</a:t>
             </a:r>
             <a:endParaRPr lang="en-US" sz="1100" dirty="0"/>
           </a:p>
@@ -8948,11 +9451,11 @@
             <a:avLst/>
           </a:prstGeom>
           <a:solidFill>
-            <a:srgbClr val="1A0808"/>
-          </a:solidFill>
-          <a:ln w="12700">
-            <a:solidFill>
-              <a:srgbClr val="1A0808"/>
+            <a:srgbClr val="0A0A1A"/>
+          </a:solidFill>
+          <a:ln w="12700">
+            <a:solidFill>
+              <a:srgbClr val="0A0A1A"/>
             </a:solidFill>
             <a:prstDash val="solid"/>
           </a:ln>
@@ -8985,13 +9488,13 @@
             <a:r>
               <a:rPr lang="en-US" sz="800" b="1" spc="150" kern="0" dirty="0">
                 <a:solidFill>
-                  <a:srgbClr val="FF453A"/>
-                </a:solidFill>
-                <a:latin typeface="Malgun Gothic" pitchFamily="34" charset="0"/>
-                <a:ea typeface="Malgun Gothic" pitchFamily="34" charset="-122"/>
-                <a:cs typeface="Malgun Gothic" pitchFamily="34" charset="-120"/>
-              </a:rPr>
-              <a:t>🔴  PROBLEM</a:t>
+                  <a:srgbClr val="A5B4FC"/>
+                </a:solidFill>
+                <a:latin typeface="Malgun Gothic" pitchFamily="34" charset="0"/>
+                <a:ea typeface="Malgun Gothic" pitchFamily="34" charset="-122"/>
+                <a:cs typeface="Malgun Gothic" pitchFamily="34" charset="-120"/>
+              </a:rPr>
+              <a:t>📋  배경 / 목표</a:t>
             </a:r>
             <a:endParaRPr lang="en-US" sz="800" dirty="0"/>
           </a:p>
@@ -9006,23 +9509,23 @@
         <p:spPr>
           <a:xfrm>
             <a:off x="594360" y="1700784"/>
-            <a:ext cx="5943600" cy="1005840"/>
-          </a:xfrm>
-          <a:prstGeom prst="rect">
-            <a:avLst/>
-          </a:prstGeom>
-          <a:noFill/>
-          <a:ln/>
-        </p:spPr>
-        <p:txBody>
-          <a:bodyPr wrap="square" rtlCol="0" anchor="ctr"/>
-          <a:lstStyle/>
-          <a:p>
-            <a:pPr indent="0" marL="0">
-              <a:buNone/>
-            </a:pPr>
-            <a:r>
-              <a:rPr lang="en-US" sz="1250" dirty="0">
+            <a:ext cx="5943600" cy="621792"/>
+          </a:xfrm>
+          <a:prstGeom prst="rect">
+            <a:avLst/>
+          </a:prstGeom>
+          <a:noFill/>
+          <a:ln/>
+        </p:spPr>
+        <p:txBody>
+          <a:bodyPr wrap="square" rtlCol="0" anchor="ctr"/>
+          <a:lstStyle/>
+          <a:p>
+            <a:pPr indent="0" marL="0">
+              <a:buNone/>
+            </a:pPr>
+            <a:r>
+              <a:rPr lang="en-US" sz="1200" dirty="0">
                 <a:solidFill>
                   <a:srgbClr val="F5F5F7"/>
                 </a:solidFill>
@@ -9030,22 +9533,364 @@
                 <a:ea typeface="Malgun Gothic" pitchFamily="34" charset="-122"/>
                 <a:cs typeface="Malgun Gothic" pitchFamily="34" charset="-120"/>
               </a:rPr>
-              <a:t>노후화된 기존 시스템의 데이터 시각화 부재로 운영 담당자가 통계를 수동으로 집계. FE 전담 없이 비효율적 구조.</a:t>
-            </a:r>
-            <a:endParaRPr lang="en-US" sz="1250" dirty="0"/>
-          </a:p>
-        </p:txBody>
-      </p:sp>
-      <p:sp>
-        <p:nvSpPr>
-          <p:cNvPr id="12" name="Text 10"/>
-          <p:cNvSpPr/>
-          <p:nvPr/>
-        </p:nvSpPr>
-        <p:spPr>
-          <a:xfrm>
-            <a:off x="594360" y="2761488"/>
-            <a:ext cx="365760" cy="329184"/>
+              <a:t>FE 2인이 초기 아키텍처 설계부터 배포까지 전 과정 주도. 기존 시스템 대체를 위해 처음부터 설계·개발한 대규모 운영 관리 플랫폼.</a:t>
+            </a:r>
+            <a:endParaRPr lang="en-US" sz="1200" dirty="0"/>
+          </a:p>
+        </p:txBody>
+      </p:sp>
+      <p:sp>
+        <p:nvSpPr>
+          <p:cNvPr id="12" name="Shape 10"/>
+          <p:cNvSpPr/>
+          <p:nvPr/>
+        </p:nvSpPr>
+        <p:spPr>
+          <a:xfrm>
+            <a:off x="594360" y="2450592"/>
+            <a:ext cx="5943600" cy="10973"/>
+          </a:xfrm>
+          <a:prstGeom prst="rect">
+            <a:avLst/>
+          </a:prstGeom>
+          <a:solidFill>
+            <a:srgbClr val="18181F"/>
+          </a:solidFill>
+          <a:ln w="12700">
+            <a:solidFill>
+              <a:srgbClr val="18181F"/>
+            </a:solidFill>
+            <a:prstDash val="solid"/>
+          </a:ln>
+        </p:spPr>
+      </p:sp>
+      <p:sp>
+        <p:nvSpPr>
+          <p:cNvPr id="13" name="Shape 11"/>
+          <p:cNvSpPr/>
+          <p:nvPr/>
+        </p:nvSpPr>
+        <p:spPr>
+          <a:xfrm>
+            <a:off x="502920" y="2523744"/>
+            <a:ext cx="6126480" cy="256032"/>
+          </a:xfrm>
+          <a:prstGeom prst="rect">
+            <a:avLst/>
+          </a:prstGeom>
+          <a:solidFill>
+            <a:srgbClr val="071A07"/>
+          </a:solidFill>
+          <a:ln w="12700">
+            <a:solidFill>
+              <a:srgbClr val="071A07"/>
+            </a:solidFill>
+            <a:prstDash val="solid"/>
+          </a:ln>
+        </p:spPr>
+      </p:sp>
+      <p:sp>
+        <p:nvSpPr>
+          <p:cNvPr id="14" name="Text 12"/>
+          <p:cNvSpPr/>
+          <p:nvPr/>
+        </p:nvSpPr>
+        <p:spPr>
+          <a:xfrm>
+            <a:off x="594360" y="2542032"/>
+            <a:ext cx="5943600" cy="219456"/>
+          </a:xfrm>
+          <a:prstGeom prst="rect">
+            <a:avLst/>
+          </a:prstGeom>
+          <a:noFill/>
+          <a:ln/>
+        </p:spPr>
+        <p:txBody>
+          <a:bodyPr wrap="square" rtlCol="0" anchor="ctr"/>
+          <a:lstStyle/>
+          <a:p>
+            <a:pPr indent="0" marL="0">
+              <a:buNone/>
+            </a:pPr>
+            <a:r>
+              <a:rPr lang="en-US" sz="800" b="1" spc="150" kern="0" dirty="0">
+                <a:solidFill>
+                  <a:srgbClr val="34C759"/>
+                </a:solidFill>
+                <a:latin typeface="Malgun Gothic" pitchFamily="34" charset="0"/>
+                <a:ea typeface="Malgun Gothic" pitchFamily="34" charset="-122"/>
+                <a:cs typeface="Malgun Gothic" pitchFamily="34" charset="-120"/>
+              </a:rPr>
+              <a:t>🔨  주요 담당 업무</a:t>
+            </a:r>
+            <a:endParaRPr lang="en-US" sz="800" dirty="0"/>
+          </a:p>
+        </p:txBody>
+      </p:sp>
+      <p:sp>
+        <p:nvSpPr>
+          <p:cNvPr id="15" name="Text 13"/>
+          <p:cNvSpPr/>
+          <p:nvPr/>
+        </p:nvSpPr>
+        <p:spPr>
+          <a:xfrm>
+            <a:off x="594360" y="2871216"/>
+            <a:ext cx="5943600" cy="658368"/>
+          </a:xfrm>
+          <a:prstGeom prst="rect">
+            <a:avLst/>
+          </a:prstGeom>
+          <a:noFill/>
+          <a:ln/>
+        </p:spPr>
+        <p:txBody>
+          <a:bodyPr wrap="square" rtlCol="0" anchor="ctr"/>
+          <a:lstStyle/>
+          <a:p>
+            <a:pPr indent="0" marL="0">
+              <a:buNone/>
+            </a:pPr>
+            <a:r>
+              <a:rPr lang="en-US" sz="1200" dirty="0">
+                <a:solidFill>
+                  <a:srgbClr val="F5F5F7"/>
+                </a:solidFill>
+                <a:latin typeface="Malgun Gothic" pitchFamily="34" charset="0"/>
+                <a:ea typeface="Malgun Gothic" pitchFamily="34" charset="-122"/>
+                <a:cs typeface="Malgun Gothic" pitchFamily="34" charset="-120"/>
+              </a:rPr>
+              <a:t>•  FE 아키텍처 설계 및 기술 스택 선정 주도 — 팀 컨벤션·폴더 구조·API 모델 협의까지 전담</a:t>
+            </a:r>
+            <a:endParaRPr lang="en-US" sz="1200" dirty="0"/>
+          </a:p>
+        </p:txBody>
+      </p:sp>
+      <p:sp>
+        <p:nvSpPr>
+          <p:cNvPr id="16" name="Text 14"/>
+          <p:cNvSpPr/>
+          <p:nvPr/>
+        </p:nvSpPr>
+        <p:spPr>
+          <a:xfrm>
+            <a:off x="594360" y="3602736"/>
+            <a:ext cx="5943600" cy="658368"/>
+          </a:xfrm>
+          <a:prstGeom prst="rect">
+            <a:avLst/>
+          </a:prstGeom>
+          <a:noFill/>
+          <a:ln/>
+        </p:spPr>
+        <p:txBody>
+          <a:bodyPr wrap="square" rtlCol="0" anchor="ctr"/>
+          <a:lstStyle/>
+          <a:p>
+            <a:pPr indent="0" marL="0">
+              <a:buNone/>
+            </a:pPr>
+            <a:r>
+              <a:rPr lang="en-US" sz="1200" dirty="0">
+                <a:solidFill>
+                  <a:srgbClr val="F5F5F7"/>
+                </a:solidFill>
+                <a:latin typeface="Malgun Gothic" pitchFamily="34" charset="0"/>
+                <a:ea typeface="Malgun Gothic" pitchFamily="34" charset="-122"/>
+                <a:cs typeface="Malgun Gothic" pitchFamily="34" charset="-120"/>
+              </a:rPr>
+              <a:t>•  DnD Kit 위젯 대시보드 구현 — 운영자가 드래그로 직접 레이아웃 커스터마이징 가능</a:t>
+            </a:r>
+            <a:endParaRPr lang="en-US" sz="1200" dirty="0"/>
+          </a:p>
+        </p:txBody>
+      </p:sp>
+      <p:sp>
+        <p:nvSpPr>
+          <p:cNvPr id="17" name="Text 15"/>
+          <p:cNvSpPr/>
+          <p:nvPr/>
+        </p:nvSpPr>
+        <p:spPr>
+          <a:xfrm>
+            <a:off x="594360" y="4334256"/>
+            <a:ext cx="5943600" cy="658368"/>
+          </a:xfrm>
+          <a:prstGeom prst="rect">
+            <a:avLst/>
+          </a:prstGeom>
+          <a:noFill/>
+          <a:ln/>
+        </p:spPr>
+        <p:txBody>
+          <a:bodyPr wrap="square" rtlCol="0" anchor="ctr"/>
+          <a:lstStyle/>
+          <a:p>
+            <a:pPr indent="0" marL="0">
+              <a:buNone/>
+            </a:pPr>
+            <a:r>
+              <a:rPr lang="en-US" sz="1200" dirty="0">
+                <a:solidFill>
+                  <a:srgbClr val="F5F5F7"/>
+                </a:solidFill>
+                <a:latin typeface="Malgun Gothic" pitchFamily="34" charset="0"/>
+                <a:ea typeface="Malgun Gothic" pitchFamily="34" charset="-122"/>
+                <a:cs typeface="Malgun Gothic" pitchFamily="34" charset="-120"/>
+              </a:rPr>
+              <a:t>•  Chart.js 실시간 통계 시각화 (월별 이용 현황·충전·정산) + ExcelJS 정산 데이터 내보내기</a:t>
+            </a:r>
+            <a:endParaRPr lang="en-US" sz="1200" dirty="0"/>
+          </a:p>
+        </p:txBody>
+      </p:sp>
+      <p:sp>
+        <p:nvSpPr>
+          <p:cNvPr id="18" name="Text 16"/>
+          <p:cNvSpPr/>
+          <p:nvPr/>
+        </p:nvSpPr>
+        <p:spPr>
+          <a:xfrm>
+            <a:off x="594360" y="5065776"/>
+            <a:ext cx="5943600" cy="658368"/>
+          </a:xfrm>
+          <a:prstGeom prst="rect">
+            <a:avLst/>
+          </a:prstGeom>
+          <a:noFill/>
+          <a:ln/>
+        </p:spPr>
+        <p:txBody>
+          <a:bodyPr wrap="square" rtlCol="0" anchor="ctr"/>
+          <a:lstStyle/>
+          <a:p>
+            <a:pPr indent="0" marL="0">
+              <a:buNone/>
+            </a:pPr>
+            <a:r>
+              <a:rPr lang="en-US" sz="1200" dirty="0">
+                <a:solidFill>
+                  <a:srgbClr val="F5F5F7"/>
+                </a:solidFill>
+                <a:latin typeface="Malgun Gothic" pitchFamily="34" charset="0"/>
+                <a:ea typeface="Malgun Gothic" pitchFamily="34" charset="-122"/>
+                <a:cs typeface="Malgun Gothic" pitchFamily="34" charset="-120"/>
+              </a:rPr>
+              <a:t>•  공통 컴포넌트 라이브러리 구축 및 TanStack Table 기반 대용량 데이터 테이블 처리</a:t>
+            </a:r>
+            <a:endParaRPr lang="en-US" sz="1200" dirty="0"/>
+          </a:p>
+        </p:txBody>
+      </p:sp>
+      <p:pic>
+        <p:nvPicPr>
+          <p:cNvPr id="19" name="Image 0" descr="/Users/jinwon/Desktop/jinwon-portfolio/apps/web/public/images/projects/customer-1.png">    </p:cNvPr>
+          <p:cNvPicPr>
+            <a:picLocks noChangeAspect="1"/>
+          </p:cNvPicPr>
+          <p:nvPr/>
+        </p:nvPicPr>
+        <p:blipFill>
+          <a:blip r:embed="rId1"/>
+          <a:srcRect l="0" r="0" t="0" b="0"/>
+          <a:stretch/>
+        </p:blipFill>
+        <p:spPr>
+          <a:xfrm>
+            <a:off x="6684264" y="1371600"/>
+            <a:ext cx="5266944" cy="1298448"/>
+          </a:xfrm>
+          <a:prstGeom prst="rect">
+            <a:avLst/>
+          </a:prstGeom>
+        </p:spPr>
+      </p:pic>
+      <p:sp>
+        <p:nvSpPr>
+          <p:cNvPr id="20" name="Shape 17"/>
+          <p:cNvSpPr/>
+          <p:nvPr/>
+        </p:nvSpPr>
+        <p:spPr>
+          <a:xfrm>
+            <a:off x="6684264" y="1371600"/>
+            <a:ext cx="5266944" cy="1298448"/>
+          </a:xfrm>
+          <a:prstGeom prst="rect">
+            <a:avLst/>
+          </a:prstGeom>
+          <a:ln w="12700">
+            <a:solidFill>
+              <a:srgbClr val="818CF8">
+                <a:alpha val="60000"/>
+              </a:srgbClr>
+            </a:solidFill>
+            <a:prstDash val="solid"/>
+          </a:ln>
+        </p:spPr>
+      </p:sp>
+      <p:sp>
+        <p:nvSpPr>
+          <p:cNvPr id="21" name="Shape 18"/>
+          <p:cNvSpPr/>
+          <p:nvPr/>
+        </p:nvSpPr>
+        <p:spPr>
+          <a:xfrm>
+            <a:off x="6629400" y="2761488"/>
+            <a:ext cx="5376672" cy="1444752"/>
+          </a:xfrm>
+          <a:prstGeom prst="rect">
+            <a:avLst/>
+          </a:prstGeom>
+          <a:solidFill>
+            <a:srgbClr val="111116"/>
+          </a:solidFill>
+          <a:ln w="12700">
+            <a:solidFill>
+              <a:srgbClr val="111116"/>
+            </a:solidFill>
+            <a:prstDash val="solid"/>
+          </a:ln>
+        </p:spPr>
+      </p:sp>
+      <p:sp>
+        <p:nvSpPr>
+          <p:cNvPr id="22" name="Shape 19"/>
+          <p:cNvSpPr/>
+          <p:nvPr/>
+        </p:nvSpPr>
+        <p:spPr>
+          <a:xfrm>
+            <a:off x="6629400" y="2761488"/>
+            <a:ext cx="54864" cy="1444752"/>
+          </a:xfrm>
+          <a:prstGeom prst="rect">
+            <a:avLst/>
+          </a:prstGeom>
+          <a:solidFill>
+            <a:srgbClr val="818CF8"/>
+          </a:solidFill>
+          <a:ln w="12700">
+            <a:solidFill>
+              <a:srgbClr val="818CF8"/>
+            </a:solidFill>
+            <a:prstDash val="solid"/>
+          </a:ln>
+        </p:spPr>
+      </p:sp>
+      <p:sp>
+        <p:nvSpPr>
+          <p:cNvPr id="23" name="Text 20"/>
+          <p:cNvSpPr/>
+          <p:nvPr/>
+        </p:nvSpPr>
+        <p:spPr>
+          <a:xfrm>
+            <a:off x="6858000" y="2871216"/>
+            <a:ext cx="5056632" cy="822960"/>
           </a:xfrm>
           <a:prstGeom prst="rect">
             <a:avLst/>
@@ -9061,110 +9906,135 @@
               <a:buNone/>
             </a:pPr>
             <a:r>
-              <a:rPr lang="en-US" sz="1800" dirty="0">
-                <a:solidFill>
-                  <a:srgbClr val="48484F"/>
-                </a:solidFill>
-                <a:latin typeface="Malgun Gothic" pitchFamily="34" charset="0"/>
-                <a:ea typeface="Malgun Gothic" pitchFamily="34" charset="-122"/>
-                <a:cs typeface="Malgun Gothic" pitchFamily="34" charset="-120"/>
-              </a:rPr>
-              <a:t>↓</a:t>
-            </a:r>
-            <a:endParaRPr lang="en-US" sz="1800" dirty="0"/>
-          </a:p>
-        </p:txBody>
-      </p:sp>
-      <p:sp>
-        <p:nvSpPr>
-          <p:cNvPr id="13" name="Shape 11"/>
-          <p:cNvSpPr/>
-          <p:nvPr/>
-        </p:nvSpPr>
-        <p:spPr>
-          <a:xfrm>
-            <a:off x="502920" y="3145536"/>
-            <a:ext cx="6126480" cy="256032"/>
-          </a:xfrm>
-          <a:prstGeom prst="rect">
-            <a:avLst/>
-          </a:prstGeom>
-          <a:solidFill>
-            <a:srgbClr val="071A07"/>
-          </a:solidFill>
-          <a:ln w="12700">
-            <a:solidFill>
-              <a:srgbClr val="071A07"/>
-            </a:solidFill>
-            <a:prstDash val="solid"/>
-          </a:ln>
-        </p:spPr>
-      </p:sp>
-      <p:sp>
-        <p:nvSpPr>
-          <p:cNvPr id="14" name="Text 12"/>
-          <p:cNvSpPr/>
-          <p:nvPr/>
-        </p:nvSpPr>
-        <p:spPr>
-          <a:xfrm>
-            <a:off x="594360" y="3163824"/>
-            <a:ext cx="5943600" cy="219456"/>
-          </a:xfrm>
-          <a:prstGeom prst="rect">
-            <a:avLst/>
-          </a:prstGeom>
-          <a:noFill/>
-          <a:ln/>
-        </p:spPr>
-        <p:txBody>
-          <a:bodyPr wrap="square" rtlCol="0" anchor="ctr"/>
-          <a:lstStyle/>
-          <a:p>
-            <a:pPr indent="0" marL="0">
-              <a:buNone/>
-            </a:pPr>
-            <a:r>
-              <a:rPr lang="en-US" sz="800" b="1" spc="150" kern="0" dirty="0">
-                <a:solidFill>
-                  <a:srgbClr val="34C759"/>
-                </a:solidFill>
-                <a:latin typeface="Malgun Gothic" pitchFamily="34" charset="0"/>
-                <a:ea typeface="Malgun Gothic" pitchFamily="34" charset="-122"/>
-                <a:cs typeface="Malgun Gothic" pitchFamily="34" charset="-120"/>
-              </a:rPr>
-              <a:t>💡  SOLUTION</a:t>
-            </a:r>
-            <a:endParaRPr lang="en-US" sz="800" dirty="0"/>
-          </a:p>
-        </p:txBody>
-      </p:sp>
-      <p:sp>
-        <p:nvSpPr>
-          <p:cNvPr id="15" name="Text 13"/>
-          <p:cNvSpPr/>
-          <p:nvPr/>
-        </p:nvSpPr>
-        <p:spPr>
-          <a:xfrm>
-            <a:off x="594360" y="3493008"/>
-            <a:ext cx="5943600" cy="594360"/>
-          </a:xfrm>
-          <a:prstGeom prst="rect">
-            <a:avLst/>
-          </a:prstGeom>
-          <a:noFill/>
-          <a:ln/>
-        </p:spPr>
-        <p:txBody>
-          <a:bodyPr wrap="square" rtlCol="0" anchor="ctr"/>
-          <a:lstStyle/>
-          <a:p>
-            <a:pPr indent="0" marL="0">
-              <a:buNone/>
-            </a:pPr>
-            <a:r>
-              <a:rPr lang="en-US" sz="1200" dirty="0">
+              <a:rPr lang="en-US" sz="4200" b="1" dirty="0">
+                <a:solidFill>
+                  <a:srgbClr val="818CF8"/>
+                </a:solidFill>
+                <a:latin typeface="Malgun Gothic" pitchFamily="34" charset="0"/>
+                <a:ea typeface="Malgun Gothic" pitchFamily="34" charset="-122"/>
+                <a:cs typeface="Malgun Gothic" pitchFamily="34" charset="-120"/>
+              </a:rPr>
+              <a:t>FE 2인</a:t>
+            </a:r>
+            <a:endParaRPr lang="en-US" sz="4200" dirty="0"/>
+          </a:p>
+        </p:txBody>
+      </p:sp>
+      <p:sp>
+        <p:nvSpPr>
+          <p:cNvPr id="24" name="Text 21"/>
+          <p:cNvSpPr/>
+          <p:nvPr/>
+        </p:nvSpPr>
+        <p:spPr>
+          <a:xfrm>
+            <a:off x="6858000" y="3822192"/>
+            <a:ext cx="5056632" cy="329184"/>
+          </a:xfrm>
+          <a:prstGeom prst="rect">
+            <a:avLst/>
+          </a:prstGeom>
+          <a:noFill/>
+          <a:ln/>
+        </p:spPr>
+        <p:txBody>
+          <a:bodyPr wrap="square" rtlCol="0" anchor="ctr"/>
+          <a:lstStyle/>
+          <a:p>
+            <a:pPr algn="ctr" indent="0" marL="0">
+              <a:buNone/>
+            </a:pPr>
+            <a:r>
+              <a:rPr lang="en-US" sz="1100" dirty="0">
+                <a:solidFill>
+                  <a:srgbClr val="8E8E93"/>
+                </a:solidFill>
+                <a:latin typeface="Malgun Gothic" pitchFamily="34" charset="0"/>
+                <a:ea typeface="Malgun Gothic" pitchFamily="34" charset="-122"/>
+                <a:cs typeface="Malgun Gothic" pitchFamily="34" charset="-120"/>
+              </a:rPr>
+              <a:t>설계 → 배포 전 과정 주도</a:t>
+            </a:r>
+            <a:endParaRPr lang="en-US" sz="1100" dirty="0"/>
+          </a:p>
+        </p:txBody>
+      </p:sp>
+      <p:sp>
+        <p:nvSpPr>
+          <p:cNvPr id="25" name="Shape 22"/>
+          <p:cNvSpPr/>
+          <p:nvPr/>
+        </p:nvSpPr>
+        <p:spPr>
+          <a:xfrm>
+            <a:off x="6629400" y="4315968"/>
+            <a:ext cx="5376672" cy="566928"/>
+          </a:xfrm>
+          <a:prstGeom prst="rect">
+            <a:avLst/>
+          </a:prstGeom>
+          <a:solidFill>
+            <a:srgbClr val="111116"/>
+          </a:solidFill>
+          <a:ln w="12700">
+            <a:solidFill>
+              <a:srgbClr val="111116"/>
+            </a:solidFill>
+            <a:prstDash val="solid"/>
+          </a:ln>
+        </p:spPr>
+      </p:sp>
+      <p:sp>
+        <p:nvSpPr>
+          <p:cNvPr id="26" name="Shape 23"/>
+          <p:cNvSpPr/>
+          <p:nvPr/>
+        </p:nvSpPr>
+        <p:spPr>
+          <a:xfrm>
+            <a:off x="6629400" y="4315968"/>
+            <a:ext cx="54864" cy="566928"/>
+          </a:xfrm>
+          <a:prstGeom prst="rect">
+            <a:avLst/>
+          </a:prstGeom>
+          <a:solidFill>
+            <a:srgbClr val="34C759"/>
+          </a:solidFill>
+          <a:ln w="12700">
+            <a:solidFill>
+              <a:srgbClr val="34C759"/>
+            </a:solidFill>
+            <a:prstDash val="solid"/>
+          </a:ln>
+        </p:spPr>
+      </p:sp>
+      <p:sp>
+        <p:nvSpPr>
+          <p:cNvPr id="27" name="Text 24"/>
+          <p:cNvSpPr/>
+          <p:nvPr/>
+        </p:nvSpPr>
+        <p:spPr>
+          <a:xfrm>
+            <a:off x="6858000" y="4361688"/>
+            <a:ext cx="5056632" cy="475488"/>
+          </a:xfrm>
+          <a:prstGeom prst="rect">
+            <a:avLst/>
+          </a:prstGeom>
+          <a:noFill/>
+          <a:ln/>
+        </p:spPr>
+        <p:txBody>
+          <a:bodyPr wrap="square" rtlCol="0" anchor="ctr"/>
+          <a:lstStyle/>
+          <a:p>
+            <a:pPr indent="0" marL="0">
+              <a:buNone/>
+            </a:pPr>
+            <a:r>
+              <a:rPr lang="en-US" sz="1100" dirty="0">
                 <a:solidFill>
                   <a:srgbClr val="F5F5F7"/>
                 </a:solidFill>
@@ -9172,38 +10042,88 @@
                 <a:ea typeface="Malgun Gothic" pitchFamily="34" charset="-122"/>
                 <a:cs typeface="Malgun Gothic" pitchFamily="34" charset="-120"/>
               </a:rPr>
-              <a:t>•  DnD Kit 위젯 대시보드 + Chart.js 실시간 통계 시각화 — 운영 담당자 통계 수동 집계 제거</a:t>
-            </a:r>
-            <a:endParaRPr lang="en-US" sz="1200" dirty="0"/>
-          </a:p>
-        </p:txBody>
-      </p:sp>
-      <p:sp>
-        <p:nvSpPr>
-          <p:cNvPr id="16" name="Text 14"/>
-          <p:cNvSpPr/>
-          <p:nvPr/>
-        </p:nvSpPr>
-        <p:spPr>
-          <a:xfrm>
-            <a:off x="594360" y="4151376"/>
-            <a:ext cx="5943600" cy="594360"/>
-          </a:xfrm>
-          <a:prstGeom prst="rect">
-            <a:avLst/>
-          </a:prstGeom>
-          <a:noFill/>
-          <a:ln/>
-        </p:spPr>
-        <p:txBody>
-          <a:bodyPr wrap="square" rtlCol="0" anchor="ctr"/>
-          <a:lstStyle/>
-          <a:p>
-            <a:pPr indent="0" marL="0">
-              <a:buNone/>
-            </a:pPr>
-            <a:r>
-              <a:rPr lang="en-US" sz="1200" dirty="0">
+              <a:t>대규모 관리 시스템 0→1 구축 전 과정 경험</a:t>
+            </a:r>
+            <a:endParaRPr lang="en-US" sz="1100" dirty="0"/>
+          </a:p>
+        </p:txBody>
+      </p:sp>
+      <p:sp>
+        <p:nvSpPr>
+          <p:cNvPr id="28" name="Shape 25"/>
+          <p:cNvSpPr/>
+          <p:nvPr/>
+        </p:nvSpPr>
+        <p:spPr>
+          <a:xfrm>
+            <a:off x="6629400" y="5010912"/>
+            <a:ext cx="5376672" cy="566928"/>
+          </a:xfrm>
+          <a:prstGeom prst="rect">
+            <a:avLst/>
+          </a:prstGeom>
+          <a:solidFill>
+            <a:srgbClr val="111116"/>
+          </a:solidFill>
+          <a:ln w="12700">
+            <a:solidFill>
+              <a:srgbClr val="111116"/>
+            </a:solidFill>
+            <a:prstDash val="solid"/>
+          </a:ln>
+        </p:spPr>
+      </p:sp>
+      <p:sp>
+        <p:nvSpPr>
+          <p:cNvPr id="29" name="Shape 26"/>
+          <p:cNvSpPr/>
+          <p:nvPr/>
+        </p:nvSpPr>
+        <p:spPr>
+          <a:xfrm>
+            <a:off x="6629400" y="5010912"/>
+            <a:ext cx="54864" cy="566928"/>
+          </a:xfrm>
+          <a:prstGeom prst="rect">
+            <a:avLst/>
+          </a:prstGeom>
+          <a:solidFill>
+            <a:srgbClr val="34C759"/>
+          </a:solidFill>
+          <a:ln w="12700">
+            <a:solidFill>
+              <a:srgbClr val="34C759"/>
+            </a:solidFill>
+            <a:prstDash val="solid"/>
+          </a:ln>
+        </p:spPr>
+      </p:sp>
+      <p:sp>
+        <p:nvSpPr>
+          <p:cNvPr id="30" name="Text 27"/>
+          <p:cNvSpPr/>
+          <p:nvPr/>
+        </p:nvSpPr>
+        <p:spPr>
+          <a:xfrm>
+            <a:off x="6858000" y="5056632"/>
+            <a:ext cx="5056632" cy="475488"/>
+          </a:xfrm>
+          <a:prstGeom prst="rect">
+            <a:avLst/>
+          </a:prstGeom>
+          <a:noFill/>
+          <a:ln/>
+        </p:spPr>
+        <p:txBody>
+          <a:bodyPr wrap="square" rtlCol="0" anchor="ctr"/>
+          <a:lstStyle/>
+          <a:p>
+            <a:pPr indent="0" marL="0">
+              <a:buNone/>
+            </a:pPr>
+            <a:r>
+              <a:rPr lang="en-US" sz="1100" dirty="0">
                 <a:solidFill>
                   <a:srgbClr val="F5F5F7"/>
                 </a:solidFill>
@@ -9211,385 +10131,15 @@
                 <a:ea typeface="Malgun Gothic" pitchFamily="34" charset="-122"/>
                 <a:cs typeface="Malgun Gothic" pitchFamily="34" charset="-120"/>
               </a:rPr>
-              <a:t>•  FE 2인이 아키텍처 설계부터 배포까지 전 과정 주도. ExcelJS 정산 내보내기 구현</a:t>
-            </a:r>
-            <a:endParaRPr lang="en-US" sz="1200" dirty="0"/>
-          </a:p>
-        </p:txBody>
-      </p:sp>
-      <p:sp>
-        <p:nvSpPr>
-          <p:cNvPr id="17" name="Shape 15"/>
-          <p:cNvSpPr/>
-          <p:nvPr/>
-        </p:nvSpPr>
-        <p:spPr>
-          <a:xfrm>
-            <a:off x="502920" y="6144768"/>
-            <a:ext cx="6126480" cy="384048"/>
-          </a:xfrm>
-          <a:prstGeom prst="rect">
-            <a:avLst/>
-          </a:prstGeom>
-          <a:solidFill>
-            <a:srgbClr val="111116"/>
-          </a:solidFill>
-          <a:ln w="12700">
-            <a:solidFill>
-              <a:srgbClr val="111116"/>
-            </a:solidFill>
-            <a:prstDash val="solid"/>
-          </a:ln>
-        </p:spPr>
-      </p:sp>
-      <p:sp>
-        <p:nvSpPr>
-          <p:cNvPr id="18" name="Text 16"/>
-          <p:cNvSpPr/>
-          <p:nvPr/>
-        </p:nvSpPr>
-        <p:spPr>
-          <a:xfrm>
-            <a:off x="640080" y="6163056"/>
-            <a:ext cx="5943600" cy="329184"/>
-          </a:xfrm>
-          <a:prstGeom prst="rect">
-            <a:avLst/>
-          </a:prstGeom>
-          <a:noFill/>
-          <a:ln/>
-        </p:spPr>
-        <p:txBody>
-          <a:bodyPr wrap="square" rtlCol="0" anchor="ctr"/>
-          <a:lstStyle/>
-          <a:p>
-            <a:pPr indent="0" marL="0">
-              <a:buNone/>
-            </a:pPr>
-            <a:r>
-              <a:rPr lang="en-US" sz="900" dirty="0">
-                <a:solidFill>
-                  <a:srgbClr val="48484F"/>
-                </a:solidFill>
-                <a:latin typeface="Malgun Gothic" pitchFamily="34" charset="0"/>
-                <a:ea typeface="Malgun Gothic" pitchFamily="34" charset="-122"/>
-                <a:cs typeface="Malgun Gothic" pitchFamily="34" charset="-120"/>
-              </a:rPr>
-              <a:t>주요업무  ·  대시보드·정산 관리  ·  공통 컴포넌트 라이브러리  ·  API 모델 협의</a:t>
-            </a:r>
-            <a:endParaRPr lang="en-US" sz="900" dirty="0"/>
-          </a:p>
-        </p:txBody>
-      </p:sp>
-      <p:sp>
-        <p:nvSpPr>
-          <p:cNvPr id="19" name="Shape 17"/>
-          <p:cNvSpPr/>
-          <p:nvPr/>
-        </p:nvSpPr>
-        <p:spPr>
-          <a:xfrm>
-            <a:off x="6629400" y="1371600"/>
-            <a:ext cx="5376672" cy="2286000"/>
-          </a:xfrm>
-          <a:prstGeom prst="rect">
-            <a:avLst/>
-          </a:prstGeom>
-          <a:solidFill>
-            <a:srgbClr val="111116"/>
-          </a:solidFill>
-          <a:ln w="12700">
-            <a:solidFill>
-              <a:srgbClr val="111116"/>
-            </a:solidFill>
-            <a:prstDash val="solid"/>
-          </a:ln>
-        </p:spPr>
-      </p:sp>
-      <p:sp>
-        <p:nvSpPr>
-          <p:cNvPr id="20" name="Shape 18"/>
-          <p:cNvSpPr/>
-          <p:nvPr/>
-        </p:nvSpPr>
-        <p:spPr>
-          <a:xfrm>
-            <a:off x="6629400" y="1371600"/>
-            <a:ext cx="54864" cy="2286000"/>
-          </a:xfrm>
-          <a:prstGeom prst="rect">
-            <a:avLst/>
-          </a:prstGeom>
-          <a:solidFill>
-            <a:srgbClr val="818CF8"/>
-          </a:solidFill>
-          <a:ln w="12700">
-            <a:solidFill>
-              <a:srgbClr val="818CF8"/>
-            </a:solidFill>
-            <a:prstDash val="solid"/>
-          </a:ln>
-        </p:spPr>
-      </p:sp>
-      <p:sp>
-        <p:nvSpPr>
-          <p:cNvPr id="21" name="Text 19"/>
-          <p:cNvSpPr/>
-          <p:nvPr/>
-        </p:nvSpPr>
-        <p:spPr>
-          <a:xfrm>
-            <a:off x="6858000" y="1554480"/>
-            <a:ext cx="5056632" cy="1188720"/>
-          </a:xfrm>
-          <a:prstGeom prst="rect">
-            <a:avLst/>
-          </a:prstGeom>
-          <a:noFill/>
-          <a:ln/>
-        </p:spPr>
-        <p:txBody>
-          <a:bodyPr wrap="square" rtlCol="0" anchor="ctr"/>
-          <a:lstStyle/>
-          <a:p>
-            <a:pPr algn="ctr" indent="0" marL="0">
-              <a:buNone/>
-            </a:pPr>
-            <a:r>
-              <a:rPr lang="en-US" sz="5600" b="1" dirty="0">
-                <a:solidFill>
-                  <a:srgbClr val="818CF8"/>
-                </a:solidFill>
-                <a:latin typeface="Malgun Gothic" pitchFamily="34" charset="0"/>
-                <a:ea typeface="Malgun Gothic" pitchFamily="34" charset="-122"/>
-                <a:cs typeface="Malgun Gothic" pitchFamily="34" charset="-120"/>
-              </a:rPr>
-              <a:t>FE 2인</a:t>
-            </a:r>
-            <a:endParaRPr lang="en-US" sz="5600" dirty="0"/>
-          </a:p>
-        </p:txBody>
-      </p:sp>
-      <p:sp>
-        <p:nvSpPr>
-          <p:cNvPr id="22" name="Text 20"/>
-          <p:cNvSpPr/>
-          <p:nvPr/>
-        </p:nvSpPr>
-        <p:spPr>
-          <a:xfrm>
-            <a:off x="6858000" y="2743200"/>
-            <a:ext cx="5056632" cy="329184"/>
-          </a:xfrm>
-          <a:prstGeom prst="rect">
-            <a:avLst/>
-          </a:prstGeom>
-          <a:noFill/>
-          <a:ln/>
-        </p:spPr>
-        <p:txBody>
-          <a:bodyPr wrap="square" rtlCol="0" anchor="ctr"/>
-          <a:lstStyle/>
-          <a:p>
-            <a:pPr algn="ctr" indent="0" marL="0">
-              <a:buNone/>
-            </a:pPr>
-            <a:r>
-              <a:rPr lang="en-US" sz="1200" dirty="0">
-                <a:solidFill>
-                  <a:srgbClr val="8E8E93"/>
-                </a:solidFill>
-                <a:latin typeface="Malgun Gothic" pitchFamily="34" charset="0"/>
-                <a:ea typeface="Malgun Gothic" pitchFamily="34" charset="-122"/>
-                <a:cs typeface="Malgun Gothic" pitchFamily="34" charset="-120"/>
-              </a:rPr>
-              <a:t>초기 설계 → 배포 전 과정 주도</a:t>
-            </a:r>
-            <a:endParaRPr lang="en-US" sz="1200" dirty="0"/>
-          </a:p>
-        </p:txBody>
-      </p:sp>
-      <p:sp>
-        <p:nvSpPr>
-          <p:cNvPr id="23" name="Shape 21"/>
-          <p:cNvSpPr/>
-          <p:nvPr/>
-        </p:nvSpPr>
-        <p:spPr>
-          <a:xfrm>
-            <a:off x="6629400" y="3858768"/>
-            <a:ext cx="5376672" cy="621792"/>
-          </a:xfrm>
-          <a:prstGeom prst="rect">
-            <a:avLst/>
-          </a:prstGeom>
-          <a:solidFill>
-            <a:srgbClr val="111116"/>
-          </a:solidFill>
-          <a:ln w="12700">
-            <a:solidFill>
-              <a:srgbClr val="111116"/>
-            </a:solidFill>
-            <a:prstDash val="solid"/>
-          </a:ln>
-        </p:spPr>
-      </p:sp>
-      <p:sp>
-        <p:nvSpPr>
-          <p:cNvPr id="24" name="Shape 22"/>
-          <p:cNvSpPr/>
-          <p:nvPr/>
-        </p:nvSpPr>
-        <p:spPr>
-          <a:xfrm>
-            <a:off x="6629400" y="3858768"/>
-            <a:ext cx="54864" cy="621792"/>
-          </a:xfrm>
-          <a:prstGeom prst="rect">
-            <a:avLst/>
-          </a:prstGeom>
-          <a:solidFill>
-            <a:srgbClr val="34C759"/>
-          </a:solidFill>
-          <a:ln w="12700">
-            <a:solidFill>
-              <a:srgbClr val="34C759"/>
-            </a:solidFill>
-            <a:prstDash val="solid"/>
-          </a:ln>
-        </p:spPr>
-      </p:sp>
-      <p:sp>
-        <p:nvSpPr>
-          <p:cNvPr id="25" name="Text 23"/>
-          <p:cNvSpPr/>
-          <p:nvPr/>
-        </p:nvSpPr>
-        <p:spPr>
-          <a:xfrm>
-            <a:off x="6858000" y="3913632"/>
-            <a:ext cx="5056632" cy="512064"/>
-          </a:xfrm>
-          <a:prstGeom prst="rect">
-            <a:avLst/>
-          </a:prstGeom>
-          <a:noFill/>
-          <a:ln/>
-        </p:spPr>
-        <p:txBody>
-          <a:bodyPr wrap="square" rtlCol="0" anchor="ctr"/>
-          <a:lstStyle/>
-          <a:p>
-            <a:pPr indent="0" marL="0">
-              <a:buNone/>
-            </a:pPr>
-            <a:r>
-              <a:rPr lang="en-US" sz="1150" dirty="0">
-                <a:solidFill>
-                  <a:srgbClr val="F5F5F7"/>
-                </a:solidFill>
-                <a:latin typeface="Malgun Gothic" pitchFamily="34" charset="0"/>
-                <a:ea typeface="Malgun Gothic" pitchFamily="34" charset="-122"/>
-                <a:cs typeface="Malgun Gothic" pitchFamily="34" charset="-120"/>
-              </a:rPr>
-              <a:t>대규모 관리 시스템 설계·배포 전 과정 경험</a:t>
-            </a:r>
-            <a:endParaRPr lang="en-US" sz="1150" dirty="0"/>
-          </a:p>
-        </p:txBody>
-      </p:sp>
-      <p:sp>
-        <p:nvSpPr>
-          <p:cNvPr id="26" name="Shape 24"/>
-          <p:cNvSpPr/>
-          <p:nvPr/>
-        </p:nvSpPr>
-        <p:spPr>
-          <a:xfrm>
-            <a:off x="6629400" y="4608576"/>
-            <a:ext cx="5376672" cy="621792"/>
-          </a:xfrm>
-          <a:prstGeom prst="rect">
-            <a:avLst/>
-          </a:prstGeom>
-          <a:solidFill>
-            <a:srgbClr val="111116"/>
-          </a:solidFill>
-          <a:ln w="12700">
-            <a:solidFill>
-              <a:srgbClr val="111116"/>
-            </a:solidFill>
-            <a:prstDash val="solid"/>
-          </a:ln>
-        </p:spPr>
-      </p:sp>
-      <p:sp>
-        <p:nvSpPr>
-          <p:cNvPr id="27" name="Shape 25"/>
-          <p:cNvSpPr/>
-          <p:nvPr/>
-        </p:nvSpPr>
-        <p:spPr>
-          <a:xfrm>
-            <a:off x="6629400" y="4608576"/>
-            <a:ext cx="54864" cy="621792"/>
-          </a:xfrm>
-          <a:prstGeom prst="rect">
-            <a:avLst/>
-          </a:prstGeom>
-          <a:solidFill>
-            <a:srgbClr val="34C759"/>
-          </a:solidFill>
-          <a:ln w="12700">
-            <a:solidFill>
-              <a:srgbClr val="34C759"/>
-            </a:solidFill>
-            <a:prstDash val="solid"/>
-          </a:ln>
-        </p:spPr>
-      </p:sp>
-      <p:sp>
-        <p:nvSpPr>
-          <p:cNvPr id="28" name="Text 26"/>
-          <p:cNvSpPr/>
-          <p:nvPr/>
-        </p:nvSpPr>
-        <p:spPr>
-          <a:xfrm>
-            <a:off x="6858000" y="4663440"/>
-            <a:ext cx="5056632" cy="512064"/>
-          </a:xfrm>
-          <a:prstGeom prst="rect">
-            <a:avLst/>
-          </a:prstGeom>
-          <a:noFill/>
-          <a:ln/>
-        </p:spPr>
-        <p:txBody>
-          <a:bodyPr wrap="square" rtlCol="0" anchor="ctr"/>
-          <a:lstStyle/>
-          <a:p>
-            <a:pPr indent="0" marL="0">
-              <a:buNone/>
-            </a:pPr>
-            <a:r>
-              <a:rPr lang="en-US" sz="1150" dirty="0">
-                <a:solidFill>
-                  <a:srgbClr val="F5F5F7"/>
-                </a:solidFill>
-                <a:latin typeface="Malgun Gothic" pitchFamily="34" charset="0"/>
-                <a:ea typeface="Malgun Gothic" pitchFamily="34" charset="-122"/>
-                <a:cs typeface="Malgun Gothic" pitchFamily="34" charset="-120"/>
-              </a:rPr>
-              <a:t>운영자 피드백 반영한 직관적 관리 환경</a:t>
-            </a:r>
-            <a:endParaRPr lang="en-US" sz="1150" dirty="0"/>
-          </a:p>
-        </p:txBody>
-      </p:sp>
-      <p:sp>
-        <p:nvSpPr>
-          <p:cNvPr id="29" name="Shape 27"/>
+              <a:t>운영자 피드백 기반 직관적 관리 환경 완성</a:t>
+            </a:r>
+            <a:endParaRPr lang="en-US" sz="1100" dirty="0"/>
+          </a:p>
+        </p:txBody>
+      </p:sp>
+      <p:sp>
+        <p:nvSpPr>
+          <p:cNvPr id="31" name="Shape 28"/>
           <p:cNvSpPr/>
           <p:nvPr/>
         </p:nvSpPr>
@@ -9614,7 +10164,7 @@
       </p:sp>
       <p:sp>
         <p:nvSpPr>
-          <p:cNvPr id="30" name="Text 28"/>
+          <p:cNvPr id="32" name="Text 29"/>
           <p:cNvSpPr/>
           <p:nvPr/>
         </p:nvSpPr>
@@ -9819,7 +10369,7 @@
                 <a:ea typeface="Malgun Gothic" pitchFamily="34" charset="-122"/>
                 <a:cs typeface="Malgun Gothic" pitchFamily="34" charset="-120"/>
               </a:rPr>
-              <a:t>레거시 인트라넷을 Next.js 14 기반 차세대 시스템으로 전환</a:t>
+              <a:t>레거시 인트라넷 전면 재구축 — Next.js 14 기반 차세대 시스템으로 완전 교체</a:t>
             </a:r>
             <a:endParaRPr lang="en-US" sz="1100" dirty="0"/>
           </a:p>
@@ -9929,11 +10479,11 @@
             <a:avLst/>
           </a:prstGeom>
           <a:solidFill>
-            <a:srgbClr val="1A0808"/>
-          </a:solidFill>
-          <a:ln w="12700">
-            <a:solidFill>
-              <a:srgbClr val="1A0808"/>
+            <a:srgbClr val="0A0A1A"/>
+          </a:solidFill>
+          <a:ln w="12700">
+            <a:solidFill>
+              <a:srgbClr val="0A0A1A"/>
             </a:solidFill>
             <a:prstDash val="solid"/>
           </a:ln>
@@ -9966,13 +10516,13 @@
             <a:r>
               <a:rPr lang="en-US" sz="800" b="1" spc="150" kern="0" dirty="0">
                 <a:solidFill>
-                  <a:srgbClr val="FF453A"/>
-                </a:solidFill>
-                <a:latin typeface="Malgun Gothic" pitchFamily="34" charset="0"/>
-                <a:ea typeface="Malgun Gothic" pitchFamily="34" charset="-122"/>
-                <a:cs typeface="Malgun Gothic" pitchFamily="34" charset="-120"/>
-              </a:rPr>
-              <a:t>🔴  PROBLEM</a:t>
+                  <a:srgbClr val="A5B4FC"/>
+                </a:solidFill>
+                <a:latin typeface="Malgun Gothic" pitchFamily="34" charset="0"/>
+                <a:ea typeface="Malgun Gothic" pitchFamily="34" charset="-122"/>
+                <a:cs typeface="Malgun Gothic" pitchFamily="34" charset="-120"/>
+              </a:rPr>
+              <a:t>📋  배경 / 목표</a:t>
             </a:r>
             <a:endParaRPr lang="en-US" sz="800" dirty="0"/>
           </a:p>
@@ -9987,23 +10537,23 @@
         <p:spPr>
           <a:xfrm>
             <a:off x="594360" y="1700784"/>
-            <a:ext cx="5943600" cy="1005840"/>
-          </a:xfrm>
-          <a:prstGeom prst="rect">
-            <a:avLst/>
-          </a:prstGeom>
-          <a:noFill/>
-          <a:ln/>
-        </p:spPr>
-        <p:txBody>
-          <a:bodyPr wrap="square" rtlCol="0" anchor="ctr"/>
-          <a:lstStyle/>
-          <a:p>
-            <a:pPr indent="0" marL="0">
-              <a:buNone/>
-            </a:pPr>
-            <a:r>
-              <a:rPr lang="en-US" sz="1250" dirty="0">
+            <a:ext cx="5943600" cy="621792"/>
+          </a:xfrm>
+          <a:prstGeom prst="rect">
+            <a:avLst/>
+          </a:prstGeom>
+          <a:noFill/>
+          <a:ln/>
+        </p:spPr>
+        <p:txBody>
+          <a:bodyPr wrap="square" rtlCol="0" anchor="ctr"/>
+          <a:lstStyle/>
+          <a:p>
+            <a:pPr indent="0" marL="0">
+              <a:buNone/>
+            </a:pPr>
+            <a:r>
+              <a:rPr lang="en-US" sz="1200" dirty="0">
                 <a:solidFill>
                   <a:srgbClr val="F5F5F7"/>
                 </a:solidFill>
@@ -10011,50 +10561,36 @@
                 <a:ea typeface="Malgun Gothic" pitchFamily="34" charset="-122"/>
                 <a:cs typeface="Malgun Gothic" pitchFamily="34" charset="-120"/>
               </a:rPr>
-              <a:t>30여 종의 품의서가 각각 개별 구조로 운영되어, 한 항목 수정에 여러 파일을 함께 수정해야 하는 구조적 문제 존재.</a:t>
-            </a:r>
-            <a:endParaRPr lang="en-US" sz="1250" dirty="0"/>
-          </a:p>
-        </p:txBody>
-      </p:sp>
-      <p:sp>
-        <p:nvSpPr>
-          <p:cNvPr id="12" name="Text 10"/>
-          <p:cNvSpPr/>
-          <p:nvPr/>
-        </p:nvSpPr>
-        <p:spPr>
-          <a:xfrm>
-            <a:off x="594360" y="2761488"/>
-            <a:ext cx="365760" cy="329184"/>
-          </a:xfrm>
-          <a:prstGeom prst="rect">
-            <a:avLst/>
-          </a:prstGeom>
-          <a:noFill/>
-          <a:ln/>
-        </p:spPr>
-        <p:txBody>
-          <a:bodyPr wrap="square" rtlCol="0" anchor="ctr"/>
-          <a:lstStyle/>
-          <a:p>
-            <a:pPr algn="ctr" indent="0" marL="0">
-              <a:buNone/>
-            </a:pPr>
-            <a:r>
-              <a:rPr lang="en-US" sz="1800" dirty="0">
-                <a:solidFill>
-                  <a:srgbClr val="48484F"/>
-                </a:solidFill>
-                <a:latin typeface="Malgun Gothic" pitchFamily="34" charset="0"/>
-                <a:ea typeface="Malgun Gothic" pitchFamily="34" charset="-122"/>
-                <a:cs typeface="Malgun Gothic" pitchFamily="34" charset="-120"/>
-              </a:rPr>
-              <a:t>↓</a:t>
-            </a:r>
-            <a:endParaRPr lang="en-US" sz="1800" dirty="0"/>
-          </a:p>
-        </p:txBody>
+              <a:t>레거시 인트라넷을 Next.js 14로 완전히 재구축하는 프로젝트. 아키텍처 설계부터 핵심 모듈 개발, 팀 컨벤션 수립까지 FE 주도.</a:t>
+            </a:r>
+            <a:endParaRPr lang="en-US" sz="1200" dirty="0"/>
+          </a:p>
+        </p:txBody>
+      </p:sp>
+      <p:sp>
+        <p:nvSpPr>
+          <p:cNvPr id="12" name="Shape 10"/>
+          <p:cNvSpPr/>
+          <p:nvPr/>
+        </p:nvSpPr>
+        <p:spPr>
+          <a:xfrm>
+            <a:off x="594360" y="2450592"/>
+            <a:ext cx="5943600" cy="10973"/>
+          </a:xfrm>
+          <a:prstGeom prst="rect">
+            <a:avLst/>
+          </a:prstGeom>
+          <a:solidFill>
+            <a:srgbClr val="18181F"/>
+          </a:solidFill>
+          <a:ln w="12700">
+            <a:solidFill>
+              <a:srgbClr val="18181F"/>
+            </a:solidFill>
+            <a:prstDash val="solid"/>
+          </a:ln>
+        </p:spPr>
       </p:sp>
       <p:sp>
         <p:nvSpPr>
@@ -10064,7 +10600,7 @@
         </p:nvSpPr>
         <p:spPr>
           <a:xfrm>
-            <a:off x="502920" y="3145536"/>
+            <a:off x="502920" y="2523744"/>
             <a:ext cx="6126480" cy="256032"/>
           </a:xfrm>
           <a:prstGeom prst="rect">
@@ -10089,7 +10625,7 @@
         </p:nvSpPr>
         <p:spPr>
           <a:xfrm>
-            <a:off x="594360" y="3163824"/>
+            <a:off x="594360" y="2542032"/>
             <a:ext cx="5943600" cy="219456"/>
           </a:xfrm>
           <a:prstGeom prst="rect">
@@ -10114,7 +10650,7 @@
                 <a:ea typeface="Malgun Gothic" pitchFamily="34" charset="-122"/>
                 <a:cs typeface="Malgun Gothic" pitchFamily="34" charset="-120"/>
               </a:rPr>
-              <a:t>💡  SOLUTION</a:t>
+              <a:t>🔨  주요 담당 업무</a:t>
             </a:r>
             <a:endParaRPr lang="en-US" sz="800" dirty="0"/>
           </a:p>
@@ -10128,8 +10664,8 @@
         </p:nvSpPr>
         <p:spPr>
           <a:xfrm>
-            <a:off x="594360" y="3493008"/>
-            <a:ext cx="5943600" cy="594360"/>
+            <a:off x="594360" y="2871216"/>
+            <a:ext cx="5943600" cy="658368"/>
           </a:xfrm>
           <a:prstGeom prst="rect">
             <a:avLst/>
@@ -10153,7 +10689,7 @@
                 <a:ea typeface="Malgun Gothic" pitchFamily="34" charset="-122"/>
                 <a:cs typeface="Malgun Gothic" pitchFamily="34" charset="-120"/>
               </a:rPr>
-              <a:t>•  품의서 구조 분석 → 공통 패턴 도출 → 단일 범용 Form 컴포넌트 설계 및 API 표준화 제안</a:t>
+              <a:t>•  아키텍처 설계 및 기술 스택 선정 — Next.js 14 App Router 기반 전체 구조 수립</a:t>
             </a:r>
             <a:endParaRPr lang="en-US" sz="1200" dirty="0"/>
           </a:p>
@@ -10167,8 +10703,8 @@
         </p:nvSpPr>
         <p:spPr>
           <a:xfrm>
-            <a:off x="594360" y="4151376"/>
-            <a:ext cx="5943600" cy="594360"/>
+            <a:off x="594360" y="3602736"/>
+            <a:ext cx="5943600" cy="658368"/>
           </a:xfrm>
           <a:prstGeom prst="rect">
             <a:avLst/>
@@ -10192,7 +10728,7 @@
                 <a:ea typeface="Malgun Gothic" pitchFamily="34" charset="-122"/>
                 <a:cs typeface="Malgun Gothic" pitchFamily="34" charset="-120"/>
               </a:rPr>
-              <a:t>•  NextAuth RBAC 기반 인증, Next.js 14 현대적 아키텍처로 레거시 전면 전환</a:t>
+              <a:t>•  NextAuth 기반 RBAC 인증 시스템 구축 — 역할(관리자·임직원)별 메뉴·기능 접근 제어</a:t>
             </a:r>
             <a:endParaRPr lang="en-US" sz="1200" dirty="0"/>
           </a:p>
@@ -10200,28 +10736,42 @@
       </p:sp>
       <p:sp>
         <p:nvSpPr>
-          <p:cNvPr id="17" name="Shape 15"/>
-          <p:cNvSpPr/>
-          <p:nvPr/>
-        </p:nvSpPr>
-        <p:spPr>
-          <a:xfrm>
-            <a:off x="502920" y="6144768"/>
-            <a:ext cx="6126480" cy="384048"/>
-          </a:xfrm>
-          <a:prstGeom prst="rect">
-            <a:avLst/>
-          </a:prstGeom>
-          <a:solidFill>
-            <a:srgbClr val="111116"/>
-          </a:solidFill>
-          <a:ln w="12700">
-            <a:solidFill>
-              <a:srgbClr val="111116"/>
-            </a:solidFill>
-            <a:prstDash val="solid"/>
-          </a:ln>
-        </p:spPr>
+          <p:cNvPr id="17" name="Text 15"/>
+          <p:cNvSpPr/>
+          <p:nvPr/>
+        </p:nvSpPr>
+        <p:spPr>
+          <a:xfrm>
+            <a:off x="594360" y="4334256"/>
+            <a:ext cx="5943600" cy="658368"/>
+          </a:xfrm>
+          <a:prstGeom prst="rect">
+            <a:avLst/>
+          </a:prstGeom>
+          <a:noFill/>
+          <a:ln/>
+        </p:spPr>
+        <p:txBody>
+          <a:bodyPr wrap="square" rtlCol="0" anchor="ctr"/>
+          <a:lstStyle/>
+          <a:p>
+            <a:pPr indent="0" marL="0">
+              <a:buNone/>
+            </a:pPr>
+            <a:r>
+              <a:rPr lang="en-US" sz="1200" dirty="0">
+                <a:solidFill>
+                  <a:srgbClr val="F5F5F7"/>
+                </a:solidFill>
+                <a:latin typeface="Malgun Gothic" pitchFamily="34" charset="0"/>
+                <a:ea typeface="Malgun Gothic" pitchFamily="34" charset="-122"/>
+                <a:cs typeface="Malgun Gothic" pitchFamily="34" charset="-120"/>
+              </a:rPr>
+              <a:t>•  30여 종 품의서 구조 분석 → 공통 패턴 도출 → 범용 Form 컴포넌트 설계 (30→1 통합)</a:t>
+            </a:r>
+            <a:endParaRPr lang="en-US" sz="1200" dirty="0"/>
+          </a:p>
+        </p:txBody>
       </p:sp>
       <p:sp>
         <p:nvSpPr>
@@ -10231,34 +10781,34 @@
         </p:nvSpPr>
         <p:spPr>
           <a:xfrm>
-            <a:off x="640080" y="6163056"/>
-            <a:ext cx="5943600" cy="329184"/>
-          </a:xfrm>
-          <a:prstGeom prst="rect">
-            <a:avLst/>
-          </a:prstGeom>
-          <a:noFill/>
-          <a:ln/>
-        </p:spPr>
-        <p:txBody>
-          <a:bodyPr wrap="square" rtlCol="0" anchor="ctr"/>
-          <a:lstStyle/>
-          <a:p>
-            <a:pPr indent="0" marL="0">
-              <a:buNone/>
-            </a:pPr>
-            <a:r>
-              <a:rPr lang="en-US" sz="900" dirty="0">
-                <a:solidFill>
-                  <a:srgbClr val="48484F"/>
-                </a:solidFill>
-                <a:latin typeface="Malgun Gothic" pitchFamily="34" charset="0"/>
-                <a:ea typeface="Malgun Gothic" pitchFamily="34" charset="-122"/>
-                <a:cs typeface="Malgun Gothic" pitchFamily="34" charset="-120"/>
-              </a:rPr>
-              <a:t>주요업무  ·  아키텍처 설계  ·  RBAC 인증 구축  ·  핵심 모듈 개발  ·  범용 Form 제작</a:t>
-            </a:r>
-            <a:endParaRPr lang="en-US" sz="900" dirty="0"/>
+            <a:off x="594360" y="5065776"/>
+            <a:ext cx="5943600" cy="658368"/>
+          </a:xfrm>
+          <a:prstGeom prst="rect">
+            <a:avLst/>
+          </a:prstGeom>
+          <a:noFill/>
+          <a:ln/>
+        </p:spPr>
+        <p:txBody>
+          <a:bodyPr wrap="square" rtlCol="0" anchor="ctr"/>
+          <a:lstStyle/>
+          <a:p>
+            <a:pPr indent="0" marL="0">
+              <a:buNone/>
+            </a:pPr>
+            <a:r>
+              <a:rPr lang="en-US" sz="1200" dirty="0">
+                <a:solidFill>
+                  <a:srgbClr val="F5F5F7"/>
+                </a:solidFill>
+                <a:latin typeface="Malgun Gothic" pitchFamily="34" charset="0"/>
+                <a:ea typeface="Malgun Gothic" pitchFamily="34" charset="-122"/>
+                <a:cs typeface="Malgun Gothic" pitchFamily="34" charset="-120"/>
+              </a:rPr>
+              <a:t>•  Storybook + MSW 개발 환경 구축 및 API 표준화 제안, 팀 내 컨벤션·기술 문서 수립</a:t>
+            </a:r>
+            <a:endParaRPr lang="en-US" sz="1200" dirty="0"/>
           </a:p>
         </p:txBody>
       </p:sp>
@@ -10384,7 +10934,7 @@
                 <a:ea typeface="Malgun Gothic" pitchFamily="34" charset="-122"/>
                 <a:cs typeface="Malgun Gothic" pitchFamily="34" charset="-120"/>
               </a:rPr>
-              <a:t>품의서 구조 통합</a:t>
+              <a:t>품의서 개별 구조 → 범용 Form 통합</a:t>
             </a:r>
             <a:endParaRPr lang="en-US" sz="1200" dirty="0"/>
           </a:p>
@@ -10473,7 +11023,7 @@
                 <a:ea typeface="Malgun Gothic" pitchFamily="34" charset="-122"/>
                 <a:cs typeface="Malgun Gothic" pitchFamily="34" charset="-120"/>
               </a:rPr>
-              <a:t>시스템 유지보수성·확장성 획기적 향상</a:t>
+              <a:t>레거시 시스템 완전 전환 성공</a:t>
             </a:r>
             <a:endParaRPr lang="en-US" sz="1150" dirty="0"/>
           </a:p>
@@ -10562,7 +11112,7 @@
                 <a:ea typeface="Malgun Gothic" pitchFamily="34" charset="-122"/>
                 <a:cs typeface="Malgun Gothic" pitchFamily="34" charset="-120"/>
               </a:rPr>
-              <a:t>엔터프라이즈급 레거시 전환 경험</a:t>
+              <a:t>엔터프라이즈급 레거시 마이그레이션 경험</a:t>
             </a:r>
             <a:endParaRPr lang="en-US" sz="1150" dirty="0"/>
           </a:p>
@@ -10800,7 +11350,7 @@
                 <a:ea typeface="Malgun Gothic" pitchFamily="34" charset="-122"/>
                 <a:cs typeface="Malgun Gothic" pitchFamily="34" charset="-120"/>
               </a:rPr>
-              <a:t>015·싸다오·아레오 등 분산 서비스의 통합 운영 플랫폼</a:t>
+              <a:t>015·싸다오·아레오 분산 서비스 운영 시스템 → 단일 통합 관리자 플랫폼 신규 구축</a:t>
             </a:r>
             <a:endParaRPr lang="en-US" sz="1100" dirty="0"/>
           </a:p>
@@ -10910,11 +11460,11 @@
             <a:avLst/>
           </a:prstGeom>
           <a:solidFill>
-            <a:srgbClr val="1A0808"/>
-          </a:solidFill>
-          <a:ln w="12700">
-            <a:solidFill>
-              <a:srgbClr val="1A0808"/>
+            <a:srgbClr val="0A0A1A"/>
+          </a:solidFill>
+          <a:ln w="12700">
+            <a:solidFill>
+              <a:srgbClr val="0A0A1A"/>
             </a:solidFill>
             <a:prstDash val="solid"/>
           </a:ln>
@@ -10947,13 +11497,13 @@
             <a:r>
               <a:rPr lang="en-US" sz="800" b="1" spc="150" kern="0" dirty="0">
                 <a:solidFill>
-                  <a:srgbClr val="FF453A"/>
-                </a:solidFill>
-                <a:latin typeface="Malgun Gothic" pitchFamily="34" charset="0"/>
-                <a:ea typeface="Malgun Gothic" pitchFamily="34" charset="-122"/>
-                <a:cs typeface="Malgun Gothic" pitchFamily="34" charset="-120"/>
-              </a:rPr>
-              <a:t>🔴  PROBLEM</a:t>
+                  <a:srgbClr val="A5B4FC"/>
+                </a:solidFill>
+                <a:latin typeface="Malgun Gothic" pitchFamily="34" charset="0"/>
+                <a:ea typeface="Malgun Gothic" pitchFamily="34" charset="-122"/>
+                <a:cs typeface="Malgun Gothic" pitchFamily="34" charset="-120"/>
+              </a:rPr>
+              <a:t>📋  배경 / 목표</a:t>
             </a:r>
             <a:endParaRPr lang="en-US" sz="800" dirty="0"/>
           </a:p>
@@ -10968,23 +11518,23 @@
         <p:spPr>
           <a:xfrm>
             <a:off x="594360" y="1700784"/>
-            <a:ext cx="5943600" cy="1005840"/>
-          </a:xfrm>
-          <a:prstGeom prst="rect">
-            <a:avLst/>
-          </a:prstGeom>
-          <a:noFill/>
-          <a:ln/>
-        </p:spPr>
-        <p:txBody>
-          <a:bodyPr wrap="square" rtlCol="0" anchor="ctr"/>
-          <a:lstStyle/>
-          <a:p>
-            <a:pPr indent="0" marL="0">
-              <a:buNone/>
-            </a:pPr>
-            <a:r>
-              <a:rPr lang="en-US" sz="1250" dirty="0">
+            <a:ext cx="5943600" cy="621792"/>
+          </a:xfrm>
+          <a:prstGeom prst="rect">
+            <a:avLst/>
+          </a:prstGeom>
+          <a:noFill/>
+          <a:ln/>
+        </p:spPr>
+        <p:txBody>
+          <a:bodyPr wrap="square" rtlCol="0" anchor="ctr"/>
+          <a:lstStyle/>
+          <a:p>
+            <a:pPr indent="0" marL="0">
+              <a:buNone/>
+            </a:pPr>
+            <a:r>
+              <a:rPr lang="en-US" sz="1200" dirty="0">
                 <a:solidFill>
                   <a:srgbClr val="F5F5F7"/>
                 </a:solidFill>
@@ -10992,50 +11542,36 @@
                 <a:ea typeface="Malgun Gothic" pitchFamily="34" charset="-122"/>
                 <a:cs typeface="Malgun Gothic" pitchFamily="34" charset="-120"/>
               </a:rPr>
-              <a:t>015, 싸다오, 아레오 등 서비스별로 운영 시스템이 분리되어 담당자가 여러 곳을 오가며 업무 처리. 신규 서비스 추가 시마다 별도 개발 필요.</a:t>
-            </a:r>
-            <a:endParaRPr lang="en-US" sz="1250" dirty="0"/>
-          </a:p>
-        </p:txBody>
-      </p:sp>
-      <p:sp>
-        <p:nvSpPr>
-          <p:cNvPr id="12" name="Text 10"/>
-          <p:cNvSpPr/>
-          <p:nvPr/>
-        </p:nvSpPr>
-        <p:spPr>
-          <a:xfrm>
-            <a:off x="594360" y="2761488"/>
-            <a:ext cx="365760" cy="329184"/>
-          </a:xfrm>
-          <a:prstGeom prst="rect">
-            <a:avLst/>
-          </a:prstGeom>
-          <a:noFill/>
-          <a:ln/>
-        </p:spPr>
-        <p:txBody>
-          <a:bodyPr wrap="square" rtlCol="0" anchor="ctr"/>
-          <a:lstStyle/>
-          <a:p>
-            <a:pPr algn="ctr" indent="0" marL="0">
-              <a:buNone/>
-            </a:pPr>
-            <a:r>
-              <a:rPr lang="en-US" sz="1800" dirty="0">
-                <a:solidFill>
-                  <a:srgbClr val="48484F"/>
-                </a:solidFill>
-                <a:latin typeface="Malgun Gothic" pitchFamily="34" charset="0"/>
-                <a:ea typeface="Malgun Gothic" pitchFamily="34" charset="-122"/>
-                <a:cs typeface="Malgun Gothic" pitchFamily="34" charset="-120"/>
-              </a:rPr>
-              <a:t>↓</a:t>
-            </a:r>
-            <a:endParaRPr lang="en-US" sz="1800" dirty="0"/>
-          </a:p>
-        </p:txBody>
+              <a:t>서비스별로 분산된 별도 운영 시스템을 하나의 플랫폼으로 통합 관리 가능한 신규 시스템 구축. 신규 서비스도 최소 공수로 즉시 추가 가능한 확장 구조 설계.</a:t>
+            </a:r>
+            <a:endParaRPr lang="en-US" sz="1200" dirty="0"/>
+          </a:p>
+        </p:txBody>
+      </p:sp>
+      <p:sp>
+        <p:nvSpPr>
+          <p:cNvPr id="12" name="Shape 10"/>
+          <p:cNvSpPr/>
+          <p:nvPr/>
+        </p:nvSpPr>
+        <p:spPr>
+          <a:xfrm>
+            <a:off x="594360" y="2450592"/>
+            <a:ext cx="5943600" cy="10973"/>
+          </a:xfrm>
+          <a:prstGeom prst="rect">
+            <a:avLst/>
+          </a:prstGeom>
+          <a:solidFill>
+            <a:srgbClr val="18181F"/>
+          </a:solidFill>
+          <a:ln w="12700">
+            <a:solidFill>
+              <a:srgbClr val="18181F"/>
+            </a:solidFill>
+            <a:prstDash val="solid"/>
+          </a:ln>
+        </p:spPr>
       </p:sp>
       <p:sp>
         <p:nvSpPr>
@@ -11045,7 +11581,7 @@
         </p:nvSpPr>
         <p:spPr>
           <a:xfrm>
-            <a:off x="502920" y="3145536"/>
+            <a:off x="502920" y="2523744"/>
             <a:ext cx="6126480" cy="256032"/>
           </a:xfrm>
           <a:prstGeom prst="rect">
@@ -11070,7 +11606,7 @@
         </p:nvSpPr>
         <p:spPr>
           <a:xfrm>
-            <a:off x="594360" y="3163824"/>
+            <a:off x="594360" y="2542032"/>
             <a:ext cx="5943600" cy="219456"/>
           </a:xfrm>
           <a:prstGeom prst="rect">
@@ -11095,7 +11631,7 @@
                 <a:ea typeface="Malgun Gothic" pitchFamily="34" charset="-122"/>
                 <a:cs typeface="Malgun Gothic" pitchFamily="34" charset="-120"/>
               </a:rPr>
-              <a:t>💡  SOLUTION</a:t>
+              <a:t>🔨  주요 담당 업무</a:t>
             </a:r>
             <a:endParaRPr lang="en-US" sz="800" dirty="0"/>
           </a:p>
@@ -11109,8 +11645,8 @@
         </p:nvSpPr>
         <p:spPr>
           <a:xfrm>
-            <a:off x="594360" y="3493008"/>
-            <a:ext cx="5943600" cy="594360"/>
+            <a:off x="594360" y="2871216"/>
+            <a:ext cx="5943600" cy="658368"/>
           </a:xfrm>
           <a:prstGeom prst="rect">
             <a:avLst/>
@@ -11134,7 +11670,7 @@
                 <a:ea typeface="Malgun Gothic" pitchFamily="34" charset="-122"/>
                 <a:cs typeface="Malgun Gothic" pitchFamily="34" charset="-120"/>
               </a:rPr>
-              <a:t>•  하나의 플랫폼에서 모든 서비스를 통합 관리하는 구조 설계</a:t>
+              <a:t>•  멀티 서비스 지원 가능한 통합 관리자 아키텍처 설계 (015, 싸다오, 아레오 등 통합)</a:t>
             </a:r>
             <a:endParaRPr lang="en-US" sz="1200" dirty="0"/>
           </a:p>
@@ -11148,8 +11684,8 @@
         </p:nvSpPr>
         <p:spPr>
           <a:xfrm>
-            <a:off x="594360" y="4151376"/>
-            <a:ext cx="5943600" cy="594360"/>
+            <a:off x="594360" y="3602736"/>
+            <a:ext cx="5943600" cy="658368"/>
           </a:xfrm>
           <a:prstGeom prst="rect">
             <a:avLst/>
@@ -11173,7 +11709,7 @@
                 <a:ea typeface="Malgun Gothic" pitchFamily="34" charset="-122"/>
                 <a:cs typeface="Malgun Gothic" pitchFamily="34" charset="-120"/>
               </a:rPr>
-              <a:t>•  신규 서비스를 최소 개발로 즉시 추가 가능한 확장성 있는 아키텍처 수립</a:t>
+              <a:t>•  신규 서비스 추가 시 최소 개발 공수로 즉시 통합 가능한 공통 인터페이스 구현</a:t>
             </a:r>
             <a:endParaRPr lang="en-US" sz="1200" dirty="0"/>
           </a:p>
@@ -11181,71 +11717,46 @@
       </p:sp>
       <p:sp>
         <p:nvSpPr>
-          <p:cNvPr id="17" name="Shape 15"/>
-          <p:cNvSpPr/>
-          <p:nvPr/>
-        </p:nvSpPr>
-        <p:spPr>
-          <a:xfrm>
-            <a:off x="502920" y="6144768"/>
-            <a:ext cx="6126480" cy="384048"/>
-          </a:xfrm>
-          <a:prstGeom prst="rect">
-            <a:avLst/>
-          </a:prstGeom>
-          <a:solidFill>
-            <a:srgbClr val="111116"/>
-          </a:solidFill>
-          <a:ln w="12700">
-            <a:solidFill>
-              <a:srgbClr val="111116"/>
-            </a:solidFill>
-            <a:prstDash val="solid"/>
-          </a:ln>
-        </p:spPr>
-      </p:sp>
-      <p:sp>
-        <p:nvSpPr>
-          <p:cNvPr id="18" name="Text 16"/>
-          <p:cNvSpPr/>
-          <p:nvPr/>
-        </p:nvSpPr>
-        <p:spPr>
-          <a:xfrm>
-            <a:off x="640080" y="6163056"/>
-            <a:ext cx="5943600" cy="329184"/>
-          </a:xfrm>
-          <a:prstGeom prst="rect">
-            <a:avLst/>
-          </a:prstGeom>
-          <a:noFill/>
-          <a:ln/>
-        </p:spPr>
-        <p:txBody>
-          <a:bodyPr wrap="square" rtlCol="0" anchor="ctr"/>
-          <a:lstStyle/>
-          <a:p>
-            <a:pPr indent="0" marL="0">
-              <a:buNone/>
-            </a:pPr>
-            <a:r>
-              <a:rPr lang="en-US" sz="900" dirty="0">
-                <a:solidFill>
-                  <a:srgbClr val="48484F"/>
-                </a:solidFill>
-                <a:latin typeface="Malgun Gothic" pitchFamily="34" charset="0"/>
-                <a:ea typeface="Malgun Gothic" pitchFamily="34" charset="-122"/>
-                <a:cs typeface="Malgun Gothic" pitchFamily="34" charset="-120"/>
-              </a:rPr>
-              <a:t>주요업무  ·  통합 관리 설계  ·  운영 워크플로우  ·  통합 대시보드  ·  리포트 기능</a:t>
-            </a:r>
-            <a:endParaRPr lang="en-US" sz="900" dirty="0"/>
-          </a:p>
-        </p:txBody>
-      </p:sp>
-      <p:sp>
-        <p:nvSpPr>
-          <p:cNvPr id="19" name="Shape 17"/>
+          <p:cNvPr id="17" name="Text 15"/>
+          <p:cNvSpPr/>
+          <p:nvPr/>
+        </p:nvSpPr>
+        <p:spPr>
+          <a:xfrm>
+            <a:off x="594360" y="4334256"/>
+            <a:ext cx="5943600" cy="658368"/>
+          </a:xfrm>
+          <a:prstGeom prst="rect">
+            <a:avLst/>
+          </a:prstGeom>
+          <a:noFill/>
+          <a:ln/>
+        </p:spPr>
+        <p:txBody>
+          <a:bodyPr wrap="square" rtlCol="0" anchor="ctr"/>
+          <a:lstStyle/>
+          <a:p>
+            <a:pPr indent="0" marL="0">
+              <a:buNone/>
+            </a:pPr>
+            <a:r>
+              <a:rPr lang="en-US" sz="1200" dirty="0">
+                <a:solidFill>
+                  <a:srgbClr val="F5F5F7"/>
+                </a:solidFill>
+                <a:latin typeface="Malgun Gothic" pitchFamily="34" charset="0"/>
+                <a:ea typeface="Malgun Gothic" pitchFamily="34" charset="-122"/>
+                <a:cs typeface="Malgun Gothic" pitchFamily="34" charset="-120"/>
+              </a:rPr>
+              <a:t>•  서비스별 운영 워크플로우 통합 대시보드 + 리포트·통계 기능 개발</a:t>
+            </a:r>
+            <a:endParaRPr lang="en-US" sz="1200" dirty="0"/>
+          </a:p>
+        </p:txBody>
+      </p:sp>
+      <p:sp>
+        <p:nvSpPr>
+          <p:cNvPr id="18" name="Shape 16"/>
           <p:cNvSpPr/>
           <p:nvPr/>
         </p:nvSpPr>
@@ -11270,7 +11781,7 @@
       </p:sp>
       <p:sp>
         <p:nvSpPr>
-          <p:cNvPr id="20" name="Shape 18"/>
+          <p:cNvPr id="19" name="Shape 17"/>
           <p:cNvSpPr/>
           <p:nvPr/>
         </p:nvSpPr>
@@ -11295,7 +11806,7 @@
       </p:sp>
       <p:sp>
         <p:nvSpPr>
-          <p:cNvPr id="21" name="Text 19"/>
+          <p:cNvPr id="20" name="Text 18"/>
           <p:cNvSpPr/>
           <p:nvPr/>
         </p:nvSpPr>
@@ -11334,7 +11845,7 @@
       </p:sp>
       <p:sp>
         <p:nvSpPr>
-          <p:cNvPr id="22" name="Text 20"/>
+          <p:cNvPr id="21" name="Text 19"/>
           <p:cNvSpPr/>
           <p:nvPr/>
         </p:nvSpPr>
@@ -11365,7 +11876,7 @@
                 <a:ea typeface="Malgun Gothic" pitchFamily="34" charset="-122"/>
                 <a:cs typeface="Malgun Gothic" pitchFamily="34" charset="-120"/>
               </a:rPr>
-              <a:t>분산된 서비스 → 단일 운영 플랫폼</a:t>
+              <a:t>분산 서비스 → 단일 운영 플랫폼</a:t>
             </a:r>
             <a:endParaRPr lang="en-US" sz="1200" dirty="0"/>
           </a:p>
@@ -11373,7 +11884,7 @@
       </p:sp>
       <p:sp>
         <p:nvSpPr>
-          <p:cNvPr id="23" name="Shape 21"/>
+          <p:cNvPr id="22" name="Shape 20"/>
           <p:cNvSpPr/>
           <p:nvPr/>
         </p:nvSpPr>
@@ -11398,7 +11909,7 @@
       </p:sp>
       <p:sp>
         <p:nvSpPr>
-          <p:cNvPr id="24" name="Shape 22"/>
+          <p:cNvPr id="23" name="Shape 21"/>
           <p:cNvSpPr/>
           <p:nvPr/>
         </p:nvSpPr>
@@ -11423,7 +11934,7 @@
       </p:sp>
       <p:sp>
         <p:nvSpPr>
-          <p:cNvPr id="25" name="Text 23"/>
+          <p:cNvPr id="24" name="Text 22"/>
           <p:cNvSpPr/>
           <p:nvPr/>
         </p:nvSpPr>
@@ -11454,7 +11965,7 @@
                 <a:ea typeface="Malgun Gothic" pitchFamily="34" charset="-122"/>
                 <a:cs typeface="Malgun Gothic" pitchFamily="34" charset="-120"/>
               </a:rPr>
-              <a:t>신규 서비스 추가 시 최소 공수로 즉시 대응</a:t>
+              <a:t>신규 서비스 추가 시 최소 공수로 즉시 대응 가능</a:t>
             </a:r>
             <a:endParaRPr lang="en-US" sz="1150" dirty="0"/>
           </a:p>
@@ -11462,7 +11973,7 @@
       </p:sp>
       <p:sp>
         <p:nvSpPr>
-          <p:cNvPr id="26" name="Shape 24"/>
+          <p:cNvPr id="25" name="Shape 23"/>
           <p:cNvSpPr/>
           <p:nvPr/>
         </p:nvSpPr>
@@ -11487,7 +11998,7 @@
       </p:sp>
       <p:sp>
         <p:nvSpPr>
-          <p:cNvPr id="27" name="Shape 25"/>
+          <p:cNvPr id="26" name="Shape 24"/>
           <p:cNvSpPr/>
           <p:nvPr/>
         </p:nvSpPr>
@@ -11512,7 +12023,7 @@
       </p:sp>
       <p:sp>
         <p:nvSpPr>
-          <p:cNvPr id="28" name="Text 26"/>
+          <p:cNvPr id="27" name="Text 25"/>
           <p:cNvSpPr/>
           <p:nvPr/>
         </p:nvSpPr>
@@ -11543,7 +12054,7 @@
                 <a:ea typeface="Malgun Gothic" pitchFamily="34" charset="-122"/>
                 <a:cs typeface="Malgun Gothic" pitchFamily="34" charset="-120"/>
               </a:rPr>
-              <a:t>운영 리소스 낭비 해결 및 정확도 향상</a:t>
+              <a:t>운영 리소스 낭비 해결 및 통합 관리 정확도 향상</a:t>
             </a:r>
             <a:endParaRPr lang="en-US" sz="1150" dirty="0"/>
           </a:p>
@@ -11551,7 +12062,7 @@
       </p:sp>
       <p:sp>
         <p:nvSpPr>
-          <p:cNvPr id="29" name="Shape 27"/>
+          <p:cNvPr id="28" name="Shape 26"/>
           <p:cNvSpPr/>
           <p:nvPr/>
         </p:nvSpPr>
@@ -11576,7 +12087,7 @@
       </p:sp>
       <p:sp>
         <p:nvSpPr>
-          <p:cNvPr id="30" name="Text 28"/>
+          <p:cNvPr id="29" name="Text 27"/>
           <p:cNvSpPr/>
           <p:nvPr/>
         </p:nvSpPr>

--- a/apps/web/public/portfolio.pptx
+++ b/apps/web/public/portfolio.pptx
@@ -3553,63 +3553,144 @@
           </a:p>
         </p:txBody>
       </p:sp>
-      <p:pic>
-        <p:nvPicPr>
-          <p:cNvPr id="26" name="Image 0" descr="/Users/jinwon/Desktop/jinwon-portfolio/apps/web/public/images/projects/smart-order-1.png">    </p:cNvPr>
-          <p:cNvPicPr>
-            <a:picLocks noChangeAspect="1"/>
-          </p:cNvPicPr>
-          <p:nvPr/>
-        </p:nvPicPr>
-        <p:blipFill>
-          <a:blip r:embed="rId1"/>
-          <a:srcRect l="0" r="0" t="0" b="0"/>
-          <a:stretch/>
-        </p:blipFill>
+      <p:sp>
+        <p:nvSpPr>
+          <p:cNvPr id="26" name="Shape 24"/>
+          <p:cNvSpPr/>
+          <p:nvPr/>
+        </p:nvSpPr>
         <p:spPr>
           <a:xfrm>
             <a:off x="6675120" y="1298448"/>
-            <a:ext cx="5349240" cy="1261872"/>
-          </a:xfrm>
-          <a:prstGeom prst="rect">
-            <a:avLst/>
-          </a:prstGeom>
-        </p:spPr>
-      </p:pic>
-      <p:sp>
-        <p:nvSpPr>
-          <p:cNvPr id="27" name="Shape 24"/>
+            <a:ext cx="5349240" cy="2231136"/>
+          </a:xfrm>
+          <a:prstGeom prst="rect">
+            <a:avLst/>
+          </a:prstGeom>
+          <a:solidFill>
+            <a:srgbClr val="111116"/>
+          </a:solidFill>
+          <a:ln w="12700">
+            <a:solidFill>
+              <a:srgbClr val="111116"/>
+            </a:solidFill>
+            <a:prstDash val="solid"/>
+          </a:ln>
+        </p:spPr>
+      </p:sp>
+      <p:sp>
+        <p:nvSpPr>
+          <p:cNvPr id="27" name="Shape 25"/>
           <p:cNvSpPr/>
           <p:nvPr/>
         </p:nvSpPr>
         <p:spPr>
           <a:xfrm>
             <a:off x="6675120" y="1298448"/>
-            <a:ext cx="5349240" cy="1261872"/>
-          </a:xfrm>
-          <a:prstGeom prst="rect">
-            <a:avLst/>
-          </a:prstGeom>
-          <a:ln w="12700">
-            <a:solidFill>
-              <a:srgbClr val="818CF8">
-                <a:alpha val="50000"/>
-              </a:srgbClr>
-            </a:solidFill>
-            <a:prstDash val="solid"/>
-          </a:ln>
-        </p:spPr>
-      </p:sp>
-      <p:sp>
-        <p:nvSpPr>
-          <p:cNvPr id="28" name="Shape 25"/>
-          <p:cNvSpPr/>
-          <p:nvPr/>
-        </p:nvSpPr>
-        <p:spPr>
-          <a:xfrm>
-            <a:off x="6675120" y="2651760"/>
-            <a:ext cx="5349240" cy="1426464"/>
+            <a:ext cx="64008" cy="2231136"/>
+          </a:xfrm>
+          <a:prstGeom prst="rect">
+            <a:avLst/>
+          </a:prstGeom>
+          <a:solidFill>
+            <a:srgbClr val="818CF8"/>
+          </a:solidFill>
+          <a:ln w="12700">
+            <a:solidFill>
+              <a:srgbClr val="818CF8"/>
+            </a:solidFill>
+            <a:prstDash val="solid"/>
+          </a:ln>
+        </p:spPr>
+      </p:sp>
+      <p:sp>
+        <p:nvSpPr>
+          <p:cNvPr id="28" name="Text 26"/>
+          <p:cNvSpPr/>
+          <p:nvPr/>
+        </p:nvSpPr>
+        <p:spPr>
+          <a:xfrm>
+            <a:off x="6931152" y="1463040"/>
+            <a:ext cx="5001768" cy="1188720"/>
+          </a:xfrm>
+          <a:prstGeom prst="rect">
+            <a:avLst/>
+          </a:prstGeom>
+          <a:noFill/>
+          <a:ln/>
+        </p:spPr>
+        <p:txBody>
+          <a:bodyPr wrap="square" rtlCol="0" anchor="ctr"/>
+          <a:lstStyle/>
+          <a:p>
+            <a:pPr algn="ctr" indent="0" marL="0">
+              <a:buNone/>
+            </a:pPr>
+            <a:r>
+              <a:rPr lang="en-US" sz="4600" b="1" dirty="0">
+                <a:solidFill>
+                  <a:srgbClr val="818CF8"/>
+                </a:solidFill>
+                <a:latin typeface="Malgun Gothic" pitchFamily="34" charset="0"/>
+                <a:ea typeface="Malgun Gothic" pitchFamily="34" charset="-122"/>
+                <a:cs typeface="Malgun Gothic" pitchFamily="34" charset="-120"/>
+              </a:rPr>
+              <a:t>개선</a:t>
+            </a:r>
+            <a:endParaRPr lang="en-US" sz="4600" dirty="0"/>
+          </a:p>
+        </p:txBody>
+      </p:sp>
+      <p:sp>
+        <p:nvSpPr>
+          <p:cNvPr id="29" name="Text 27"/>
+          <p:cNvSpPr/>
+          <p:nvPr/>
+        </p:nvSpPr>
+        <p:spPr>
+          <a:xfrm>
+            <a:off x="6931152" y="2651760"/>
+            <a:ext cx="5001768" cy="329184"/>
+          </a:xfrm>
+          <a:prstGeom prst="rect">
+            <a:avLst/>
+          </a:prstGeom>
+          <a:noFill/>
+          <a:ln/>
+        </p:spPr>
+        <p:txBody>
+          <a:bodyPr wrap="square" rtlCol="0" anchor="ctr"/>
+          <a:lstStyle/>
+          <a:p>
+            <a:pPr algn="ctr" indent="0" marL="0">
+              <a:buNone/>
+            </a:pPr>
+            <a:r>
+              <a:rPr lang="en-US" sz="1100" dirty="0">
+                <a:solidFill>
+                  <a:srgbClr val="8E8E9A"/>
+                </a:solidFill>
+                <a:latin typeface="Malgun Gothic" pitchFamily="34" charset="0"/>
+                <a:ea typeface="Malgun Gothic" pitchFamily="34" charset="-122"/>
+                <a:cs typeface="Malgun Gothic" pitchFamily="34" charset="-120"/>
+              </a:rPr>
+              <a:t>매출 보고 UI 및 사용성 향상</a:t>
+            </a:r>
+            <a:endParaRPr lang="en-US" sz="1100" dirty="0"/>
+          </a:p>
+        </p:txBody>
+      </p:sp>
+      <p:sp>
+        <p:nvSpPr>
+          <p:cNvPr id="30" name="Shape 28"/>
+          <p:cNvSpPr/>
+          <p:nvPr/>
+        </p:nvSpPr>
+        <p:spPr>
+          <a:xfrm>
+            <a:off x="6675120" y="3712464"/>
+            <a:ext cx="5349240" cy="594360"/>
           </a:xfrm>
           <a:prstGeom prst="rect">
             <a:avLst/>
@@ -3627,117 +3708,78 @@
       </p:sp>
       <p:sp>
         <p:nvSpPr>
-          <p:cNvPr id="29" name="Shape 26"/>
-          <p:cNvSpPr/>
-          <p:nvPr/>
-        </p:nvSpPr>
-        <p:spPr>
-          <a:xfrm>
-            <a:off x="6675120" y="2651760"/>
-            <a:ext cx="64008" cy="1426464"/>
-          </a:xfrm>
-          <a:prstGeom prst="rect">
-            <a:avLst/>
-          </a:prstGeom>
-          <a:solidFill>
-            <a:srgbClr val="818CF8"/>
-          </a:solidFill>
-          <a:ln w="12700">
-            <a:solidFill>
-              <a:srgbClr val="818CF8"/>
-            </a:solidFill>
-            <a:prstDash val="solid"/>
-          </a:ln>
-        </p:spPr>
-      </p:sp>
-      <p:sp>
-        <p:nvSpPr>
-          <p:cNvPr id="30" name="Text 27"/>
-          <p:cNvSpPr/>
-          <p:nvPr/>
-        </p:nvSpPr>
-        <p:spPr>
-          <a:xfrm>
-            <a:off x="6931152" y="2743200"/>
-            <a:ext cx="5001768" cy="841248"/>
-          </a:xfrm>
-          <a:prstGeom prst="rect">
-            <a:avLst/>
-          </a:prstGeom>
-          <a:noFill/>
-          <a:ln/>
-        </p:spPr>
-        <p:txBody>
-          <a:bodyPr wrap="square" rtlCol="0" anchor="ctr"/>
-          <a:lstStyle/>
-          <a:p>
-            <a:pPr algn="ctr" indent="0" marL="0">
-              <a:buNone/>
-            </a:pPr>
-            <a:r>
-              <a:rPr lang="en-US" sz="4000" b="1" dirty="0">
-                <a:solidFill>
-                  <a:srgbClr val="818CF8"/>
-                </a:solidFill>
-                <a:latin typeface="Malgun Gothic" pitchFamily="34" charset="0"/>
-                <a:ea typeface="Malgun Gothic" pitchFamily="34" charset="-122"/>
-                <a:cs typeface="Malgun Gothic" pitchFamily="34" charset="-120"/>
-              </a:rPr>
-              <a:t>개선</a:t>
-            </a:r>
-            <a:endParaRPr lang="en-US" sz="4000" dirty="0"/>
-          </a:p>
-        </p:txBody>
-      </p:sp>
-      <p:sp>
-        <p:nvSpPr>
-          <p:cNvPr id="31" name="Text 28"/>
-          <p:cNvSpPr/>
-          <p:nvPr/>
-        </p:nvSpPr>
-        <p:spPr>
-          <a:xfrm>
-            <a:off x="6931152" y="3639312"/>
-            <a:ext cx="5001768" cy="310896"/>
-          </a:xfrm>
-          <a:prstGeom prst="rect">
-            <a:avLst/>
-          </a:prstGeom>
-          <a:noFill/>
-          <a:ln/>
-        </p:spPr>
-        <p:txBody>
-          <a:bodyPr wrap="square" rtlCol="0" anchor="ctr"/>
-          <a:lstStyle/>
-          <a:p>
-            <a:pPr algn="ctr" indent="0" marL="0">
-              <a:buNone/>
-            </a:pPr>
-            <a:r>
-              <a:rPr lang="en-US" sz="1050" dirty="0">
-                <a:solidFill>
-                  <a:srgbClr val="8E8E9A"/>
-                </a:solidFill>
-                <a:latin typeface="Malgun Gothic" pitchFamily="34" charset="0"/>
-                <a:ea typeface="Malgun Gothic" pitchFamily="34" charset="-122"/>
-                <a:cs typeface="Malgun Gothic" pitchFamily="34" charset="-120"/>
-              </a:rPr>
-              <a:t>매출 보고 UI 및 사용성 향상</a:t>
-            </a:r>
-            <a:endParaRPr lang="en-US" sz="1050" dirty="0"/>
-          </a:p>
-        </p:txBody>
-      </p:sp>
-      <p:sp>
-        <p:nvSpPr>
-          <p:cNvPr id="32" name="Shape 29"/>
-          <p:cNvSpPr/>
-          <p:nvPr/>
-        </p:nvSpPr>
-        <p:spPr>
-          <a:xfrm>
-            <a:off x="6675120" y="4187952"/>
-            <a:ext cx="5349240" cy="566928"/>
+          <p:cNvPr id="31" name="Shape 29"/>
+          <p:cNvSpPr/>
+          <p:nvPr/>
+        </p:nvSpPr>
+        <p:spPr>
+          <a:xfrm>
+            <a:off x="6675120" y="3712464"/>
+            <a:ext cx="64008" cy="594360"/>
+          </a:xfrm>
+          <a:prstGeom prst="rect">
+            <a:avLst/>
+          </a:prstGeom>
+          <a:solidFill>
+            <a:srgbClr val="34D399"/>
+          </a:solidFill>
+          <a:ln w="12700">
+            <a:solidFill>
+              <a:srgbClr val="34D399"/>
+            </a:solidFill>
+            <a:prstDash val="solid"/>
+          </a:ln>
+        </p:spPr>
+      </p:sp>
+      <p:sp>
+        <p:nvSpPr>
+          <p:cNvPr id="32" name="Text 30"/>
+          <p:cNvSpPr/>
+          <p:nvPr/>
+        </p:nvSpPr>
+        <p:spPr>
+          <a:xfrm>
+            <a:off x="6931152" y="3776472"/>
+            <a:ext cx="5001768" cy="475488"/>
+          </a:xfrm>
+          <a:prstGeom prst="rect">
+            <a:avLst/>
+          </a:prstGeom>
+          <a:noFill/>
+          <a:ln/>
+        </p:spPr>
+        <p:txBody>
+          <a:bodyPr wrap="square" rtlCol="0" anchor="ctr"/>
+          <a:lstStyle/>
+          <a:p>
+            <a:pPr indent="0" marL="0">
+              <a:buNone/>
+            </a:pPr>
+            <a:r>
+              <a:rPr lang="en-US" sz="1100" dirty="0">
+                <a:solidFill>
+                  <a:srgbClr val="F4F4F6"/>
+                </a:solidFill>
+                <a:latin typeface="Malgun Gothic" pitchFamily="34" charset="0"/>
+                <a:ea typeface="Malgun Gothic" pitchFamily="34" charset="-122"/>
+                <a:cs typeface="Malgun Gothic" pitchFamily="34" charset="-120"/>
+              </a:rPr>
+              <a:t>월별/주별 매출 보고 UI 개선</a:t>
+            </a:r>
+            <a:endParaRPr lang="en-US" sz="1100" dirty="0"/>
+          </a:p>
+        </p:txBody>
+      </p:sp>
+      <p:sp>
+        <p:nvSpPr>
+          <p:cNvPr id="33" name="Shape 31"/>
+          <p:cNvSpPr/>
+          <p:nvPr/>
+        </p:nvSpPr>
+        <p:spPr>
+          <a:xfrm>
+            <a:off x="6675120" y="4425696"/>
+            <a:ext cx="5349240" cy="594360"/>
           </a:xfrm>
           <a:prstGeom prst="rect">
             <a:avLst/>
@@ -3755,14 +3797,14 @@
       </p:sp>
       <p:sp>
         <p:nvSpPr>
-          <p:cNvPr id="33" name="Shape 30"/>
-          <p:cNvSpPr/>
-          <p:nvPr/>
-        </p:nvSpPr>
-        <p:spPr>
-          <a:xfrm>
-            <a:off x="6675120" y="4187952"/>
-            <a:ext cx="64008" cy="566928"/>
+          <p:cNvPr id="34" name="Shape 32"/>
+          <p:cNvSpPr/>
+          <p:nvPr/>
+        </p:nvSpPr>
+        <p:spPr>
+          <a:xfrm>
+            <a:off x="6675120" y="4425696"/>
+            <a:ext cx="64008" cy="594360"/>
           </a:xfrm>
           <a:prstGeom prst="rect">
             <a:avLst/>
@@ -3780,30 +3822,30 @@
       </p:sp>
       <p:sp>
         <p:nvSpPr>
-          <p:cNvPr id="34" name="Text 31"/>
-          <p:cNvSpPr/>
-          <p:nvPr/>
-        </p:nvSpPr>
-        <p:spPr>
-          <a:xfrm>
-            <a:off x="6931152" y="4242816"/>
-            <a:ext cx="5001768" cy="457200"/>
-          </a:xfrm>
-          <a:prstGeom prst="rect">
-            <a:avLst/>
-          </a:prstGeom>
-          <a:noFill/>
-          <a:ln/>
-        </p:spPr>
-        <p:txBody>
-          <a:bodyPr wrap="square" rtlCol="0" anchor="ctr"/>
-          <a:lstStyle/>
-          <a:p>
-            <a:pPr indent="0" marL="0">
-              <a:buNone/>
-            </a:pPr>
-            <a:r>
-              <a:rPr lang="en-US" sz="1050" dirty="0">
+          <p:cNvPr id="35" name="Text 33"/>
+          <p:cNvSpPr/>
+          <p:nvPr/>
+        </p:nvSpPr>
+        <p:spPr>
+          <a:xfrm>
+            <a:off x="6931152" y="4489704"/>
+            <a:ext cx="5001768" cy="475488"/>
+          </a:xfrm>
+          <a:prstGeom prst="rect">
+            <a:avLst/>
+          </a:prstGeom>
+          <a:noFill/>
+          <a:ln/>
+        </p:spPr>
+        <p:txBody>
+          <a:bodyPr wrap="square" rtlCol="0" anchor="ctr"/>
+          <a:lstStyle/>
+          <a:p>
+            <a:pPr indent="0" marL="0">
+              <a:buNone/>
+            </a:pPr>
+            <a:r>
+              <a:rPr lang="en-US" sz="1100" dirty="0">
                 <a:solidFill>
                   <a:srgbClr val="F4F4F6"/>
                 </a:solidFill>
@@ -3811,104 +3853,15 @@
                 <a:ea typeface="Malgun Gothic" pitchFamily="34" charset="-122"/>
                 <a:cs typeface="Malgun Gothic" pitchFamily="34" charset="-120"/>
               </a:rPr>
-              <a:t>월별/주별 매출 보고 UI 개선</a:t>
-            </a:r>
-            <a:endParaRPr lang="en-US" sz="1050" dirty="0"/>
-          </a:p>
-        </p:txBody>
-      </p:sp>
-      <p:sp>
-        <p:nvSpPr>
-          <p:cNvPr id="35" name="Shape 32"/>
-          <p:cNvSpPr/>
-          <p:nvPr/>
-        </p:nvSpPr>
-        <p:spPr>
-          <a:xfrm>
-            <a:off x="6675120" y="4864608"/>
-            <a:ext cx="5349240" cy="566928"/>
-          </a:xfrm>
-          <a:prstGeom prst="rect">
-            <a:avLst/>
-          </a:prstGeom>
-          <a:solidFill>
-            <a:srgbClr val="111116"/>
-          </a:solidFill>
-          <a:ln w="12700">
-            <a:solidFill>
-              <a:srgbClr val="111116"/>
-            </a:solidFill>
-            <a:prstDash val="solid"/>
-          </a:ln>
-        </p:spPr>
-      </p:sp>
-      <p:sp>
-        <p:nvSpPr>
-          <p:cNvPr id="36" name="Shape 33"/>
-          <p:cNvSpPr/>
-          <p:nvPr/>
-        </p:nvSpPr>
-        <p:spPr>
-          <a:xfrm>
-            <a:off x="6675120" y="4864608"/>
-            <a:ext cx="64008" cy="566928"/>
-          </a:xfrm>
-          <a:prstGeom prst="rect">
-            <a:avLst/>
-          </a:prstGeom>
-          <a:solidFill>
-            <a:srgbClr val="34D399"/>
-          </a:solidFill>
-          <a:ln w="12700">
-            <a:solidFill>
-              <a:srgbClr val="34D399"/>
-            </a:solidFill>
-            <a:prstDash val="solid"/>
-          </a:ln>
-        </p:spPr>
-      </p:sp>
-      <p:sp>
-        <p:nvSpPr>
-          <p:cNvPr id="37" name="Text 34"/>
-          <p:cNvSpPr/>
-          <p:nvPr/>
-        </p:nvSpPr>
-        <p:spPr>
-          <a:xfrm>
-            <a:off x="6931152" y="4919472"/>
-            <a:ext cx="5001768" cy="457200"/>
-          </a:xfrm>
-          <a:prstGeom prst="rect">
-            <a:avLst/>
-          </a:prstGeom>
-          <a:noFill/>
-          <a:ln/>
-        </p:spPr>
-        <p:txBody>
-          <a:bodyPr wrap="square" rtlCol="0" anchor="ctr"/>
-          <a:lstStyle/>
-          <a:p>
-            <a:pPr indent="0" marL="0">
-              <a:buNone/>
-            </a:pPr>
-            <a:r>
-              <a:rPr lang="en-US" sz="1050" dirty="0">
-                <a:solidFill>
-                  <a:srgbClr val="F4F4F6"/>
-                </a:solidFill>
-                <a:latin typeface="Malgun Gothic" pitchFamily="34" charset="0"/>
-                <a:ea typeface="Malgun Gothic" pitchFamily="34" charset="-122"/>
-                <a:cs typeface="Malgun Gothic" pitchFamily="34" charset="-120"/>
-              </a:rPr>
               <a:t>주문 및 결제 기반 서비스 운영 환경 경험</a:t>
             </a:r>
-            <a:endParaRPr lang="en-US" sz="1050" dirty="0"/>
-          </a:p>
-        </p:txBody>
-      </p:sp>
-      <p:sp>
-        <p:nvSpPr>
-          <p:cNvPr id="38" name="Shape 35"/>
+            <a:endParaRPr lang="en-US" sz="1100" dirty="0"/>
+          </a:p>
+        </p:txBody>
+      </p:sp>
+      <p:sp>
+        <p:nvSpPr>
+          <p:cNvPr id="36" name="Shape 34"/>
           <p:cNvSpPr/>
           <p:nvPr/>
         </p:nvSpPr>
@@ -3933,7 +3886,7 @@
       </p:sp>
       <p:sp>
         <p:nvSpPr>
-          <p:cNvPr id="39" name="Text 36"/>
+          <p:cNvPr id="37" name="Text 35"/>
           <p:cNvSpPr/>
           <p:nvPr/>
         </p:nvSpPr>
@@ -6765,7 +6718,7 @@
                 <a:ea typeface="Malgun Gothic" pitchFamily="34" charset="-122"/>
                 <a:cs typeface="Malgun Gothic" pitchFamily="34" charset="-120"/>
               </a:rPr>
-              <a:t>40%</a:t>
+              <a:t>FE 2인</a:t>
             </a:r>
             <a:endParaRPr lang="en-US" sz="6400" dirty="0"/>
           </a:p>
@@ -6827,7 +6780,7 @@
                 <a:ea typeface="Malgun Gothic" pitchFamily="34" charset="-122"/>
                 <a:cs typeface="Malgun Gothic" pitchFamily="34" charset="-120"/>
               </a:rPr>
-              <a:t>유지보수 공수 절감</a:t>
+              <a:t>설계→배포 전 과정 주도</a:t>
             </a:r>
             <a:endParaRPr lang="en-US" sz="1300" dirty="0"/>
           </a:p>
@@ -6866,7 +6819,7 @@
                 <a:ea typeface="Malgun Gothic" pitchFamily="34" charset="-122"/>
                 <a:cs typeface="Malgun Gothic" pitchFamily="34" charset="-120"/>
               </a:rPr>
-              <a:t>015 웹 React Query + 컨벤션</a:t>
+              <a:t>차세대 커스터머 0→1 신규 구축</a:t>
             </a:r>
             <a:endParaRPr lang="en-US" sz="950" dirty="0"/>
           </a:p>
@@ -8588,7 +8541,7 @@
                 <a:ea typeface="Malgun Gothic" pitchFamily="34" charset="-122"/>
                 <a:cs typeface="Malgun Gothic" pitchFamily="34" charset="-120"/>
               </a:rPr>
-              <a:t>기존 서비스 없이 처음부터 설계·구축. React Native 기반 하이브리드 메시징 앱을 앱스토어·플레이스토어 동시 출시 목표로 개발.</a:t>
+              <a:t>Flutter · Expo · 순수 RN 세 가지 검토. Expo는 FCM·인앱결제에서 ejection이 불가피했고, Flutter는 Dart 언어 학습 비용 이슈. 기존 React 경험을 활용하면서 Native 완전 제어권을 확보할 수 있는 순수 RN 0.81 선택.</a:t>
             </a:r>
             <a:endParaRPr lang="en-US" sz="1150" dirty="0"/>
           </a:p>
@@ -8714,7 +8667,7 @@
                 <a:ea typeface="Malgun Gothic" pitchFamily="34" charset="-122"/>
                 <a:cs typeface="Malgun Gothic" pitchFamily="34" charset="-120"/>
               </a:rPr>
-              <a:t>•  앱 전반 아키텍처 설계 및 기술 스택 선정 — Expo 배제, 순수 RN 0.81 채택 (Native 모듈 확장성 확보)</a:t>
+              <a:t>•  앱 전반 아키텍처 설계 및 기술 스택 선정 — 순수 RN 0.81 채택 (Expo ejection 리스크 회피, JS 생태계 유지 + Native 완전 제어)</a:t>
             </a:r>
             <a:endParaRPr lang="en-US" sz="1150" dirty="0"/>
           </a:p>
@@ -8837,63 +8790,144 @@
           </a:p>
         </p:txBody>
       </p:sp>
-      <p:pic>
-        <p:nvPicPr>
-          <p:cNvPr id="21" name="Image 0" descr="/Users/jinwon/Desktop/jinwon-portfolio/apps/web/public/images/projects/bbi-1.png">    </p:cNvPr>
-          <p:cNvPicPr>
-            <a:picLocks noChangeAspect="1"/>
-          </p:cNvPicPr>
-          <p:nvPr/>
-        </p:nvPicPr>
-        <p:blipFill>
-          <a:blip r:embed="rId1"/>
-          <a:srcRect l="0" r="0" t="0" b="0"/>
-          <a:stretch/>
-        </p:blipFill>
+      <p:sp>
+        <p:nvSpPr>
+          <p:cNvPr id="21" name="Shape 19"/>
+          <p:cNvSpPr/>
+          <p:nvPr/>
+        </p:nvSpPr>
         <p:spPr>
           <a:xfrm>
             <a:off x="6675120" y="1298448"/>
-            <a:ext cx="5349240" cy="1261872"/>
-          </a:xfrm>
-          <a:prstGeom prst="rect">
-            <a:avLst/>
-          </a:prstGeom>
-        </p:spPr>
-      </p:pic>
-      <p:sp>
-        <p:nvSpPr>
-          <p:cNvPr id="22" name="Shape 19"/>
+            <a:ext cx="5349240" cy="2231136"/>
+          </a:xfrm>
+          <a:prstGeom prst="rect">
+            <a:avLst/>
+          </a:prstGeom>
+          <a:solidFill>
+            <a:srgbClr val="111116"/>
+          </a:solidFill>
+          <a:ln w="12700">
+            <a:solidFill>
+              <a:srgbClr val="111116"/>
+            </a:solidFill>
+            <a:prstDash val="solid"/>
+          </a:ln>
+        </p:spPr>
+      </p:sp>
+      <p:sp>
+        <p:nvSpPr>
+          <p:cNvPr id="22" name="Shape 20"/>
           <p:cNvSpPr/>
           <p:nvPr/>
         </p:nvSpPr>
         <p:spPr>
           <a:xfrm>
             <a:off x="6675120" y="1298448"/>
-            <a:ext cx="5349240" cy="1261872"/>
-          </a:xfrm>
-          <a:prstGeom prst="rect">
-            <a:avLst/>
-          </a:prstGeom>
-          <a:ln w="12700">
-            <a:solidFill>
-              <a:srgbClr val="818CF8">
-                <a:alpha val="50000"/>
-              </a:srgbClr>
-            </a:solidFill>
-            <a:prstDash val="solid"/>
-          </a:ln>
-        </p:spPr>
-      </p:sp>
-      <p:sp>
-        <p:nvSpPr>
-          <p:cNvPr id="23" name="Shape 20"/>
-          <p:cNvSpPr/>
-          <p:nvPr/>
-        </p:nvSpPr>
-        <p:spPr>
-          <a:xfrm>
-            <a:off x="6675120" y="2651760"/>
-            <a:ext cx="5349240" cy="1426464"/>
+            <a:ext cx="64008" cy="2231136"/>
+          </a:xfrm>
+          <a:prstGeom prst="rect">
+            <a:avLst/>
+          </a:prstGeom>
+          <a:solidFill>
+            <a:srgbClr val="818CF8"/>
+          </a:solidFill>
+          <a:ln w="12700">
+            <a:solidFill>
+              <a:srgbClr val="818CF8"/>
+            </a:solidFill>
+            <a:prstDash val="solid"/>
+          </a:ln>
+        </p:spPr>
+      </p:sp>
+      <p:sp>
+        <p:nvSpPr>
+          <p:cNvPr id="23" name="Text 21"/>
+          <p:cNvSpPr/>
+          <p:nvPr/>
+        </p:nvSpPr>
+        <p:spPr>
+          <a:xfrm>
+            <a:off x="6931152" y="1463040"/>
+            <a:ext cx="5001768" cy="1188720"/>
+          </a:xfrm>
+          <a:prstGeom prst="rect">
+            <a:avLst/>
+          </a:prstGeom>
+          <a:noFill/>
+          <a:ln/>
+        </p:spPr>
+        <p:txBody>
+          <a:bodyPr wrap="square" rtlCol="0" anchor="ctr"/>
+          <a:lstStyle/>
+          <a:p>
+            <a:pPr algn="ctr" indent="0" marL="0">
+              <a:buNone/>
+            </a:pPr>
+            <a:r>
+              <a:rPr lang="en-US" sz="4600" b="1" dirty="0">
+                <a:solidFill>
+                  <a:srgbClr val="818CF8"/>
+                </a:solidFill>
+                <a:latin typeface="Malgun Gothic" pitchFamily="34" charset="0"/>
+                <a:ea typeface="Malgun Gothic" pitchFamily="34" charset="-122"/>
+                <a:cs typeface="Malgun Gothic" pitchFamily="34" charset="-120"/>
+              </a:rPr>
+              <a:t>정식 출시</a:t>
+            </a:r>
+            <a:endParaRPr lang="en-US" sz="4600" dirty="0"/>
+          </a:p>
+        </p:txBody>
+      </p:sp>
+      <p:sp>
+        <p:nvSpPr>
+          <p:cNvPr id="24" name="Text 22"/>
+          <p:cNvSpPr/>
+          <p:nvPr/>
+        </p:nvSpPr>
+        <p:spPr>
+          <a:xfrm>
+            <a:off x="6931152" y="2651760"/>
+            <a:ext cx="5001768" cy="329184"/>
+          </a:xfrm>
+          <a:prstGeom prst="rect">
+            <a:avLst/>
+          </a:prstGeom>
+          <a:noFill/>
+          <a:ln/>
+        </p:spPr>
+        <p:txBody>
+          <a:bodyPr wrap="square" rtlCol="0" anchor="ctr"/>
+          <a:lstStyle/>
+          <a:p>
+            <a:pPr algn="ctr" indent="0" marL="0">
+              <a:buNone/>
+            </a:pPr>
+            <a:r>
+              <a:rPr lang="en-US" sz="1100" dirty="0">
+                <a:solidFill>
+                  <a:srgbClr val="8E8E9A"/>
+                </a:solidFill>
+                <a:latin typeface="Malgun Gothic" pitchFamily="34" charset="0"/>
+                <a:ea typeface="Malgun Gothic" pitchFamily="34" charset="-122"/>
+                <a:cs typeface="Malgun Gothic" pitchFamily="34" charset="-120"/>
+              </a:rPr>
+              <a:t>앱스토어 · 플레이스토어 동시 론칭</a:t>
+            </a:r>
+            <a:endParaRPr lang="en-US" sz="1100" dirty="0"/>
+          </a:p>
+        </p:txBody>
+      </p:sp>
+      <p:sp>
+        <p:nvSpPr>
+          <p:cNvPr id="25" name="Shape 23"/>
+          <p:cNvSpPr/>
+          <p:nvPr/>
+        </p:nvSpPr>
+        <p:spPr>
+          <a:xfrm>
+            <a:off x="6675120" y="3712464"/>
+            <a:ext cx="5349240" cy="594360"/>
           </a:xfrm>
           <a:prstGeom prst="rect">
             <a:avLst/>
@@ -8911,117 +8945,78 @@
       </p:sp>
       <p:sp>
         <p:nvSpPr>
-          <p:cNvPr id="24" name="Shape 21"/>
-          <p:cNvSpPr/>
-          <p:nvPr/>
-        </p:nvSpPr>
-        <p:spPr>
-          <a:xfrm>
-            <a:off x="6675120" y="2651760"/>
-            <a:ext cx="64008" cy="1426464"/>
-          </a:xfrm>
-          <a:prstGeom prst="rect">
-            <a:avLst/>
-          </a:prstGeom>
-          <a:solidFill>
-            <a:srgbClr val="818CF8"/>
-          </a:solidFill>
-          <a:ln w="12700">
-            <a:solidFill>
-              <a:srgbClr val="818CF8"/>
-            </a:solidFill>
-            <a:prstDash val="solid"/>
-          </a:ln>
-        </p:spPr>
-      </p:sp>
-      <p:sp>
-        <p:nvSpPr>
-          <p:cNvPr id="25" name="Text 22"/>
-          <p:cNvSpPr/>
-          <p:nvPr/>
-        </p:nvSpPr>
-        <p:spPr>
-          <a:xfrm>
-            <a:off x="6931152" y="2743200"/>
-            <a:ext cx="5001768" cy="841248"/>
-          </a:xfrm>
-          <a:prstGeom prst="rect">
-            <a:avLst/>
-          </a:prstGeom>
-          <a:noFill/>
-          <a:ln/>
-        </p:spPr>
-        <p:txBody>
-          <a:bodyPr wrap="square" rtlCol="0" anchor="ctr"/>
-          <a:lstStyle/>
-          <a:p>
-            <a:pPr algn="ctr" indent="0" marL="0">
-              <a:buNone/>
-            </a:pPr>
-            <a:r>
-              <a:rPr lang="en-US" sz="4000" b="1" dirty="0">
-                <a:solidFill>
-                  <a:srgbClr val="818CF8"/>
-                </a:solidFill>
-                <a:latin typeface="Malgun Gothic" pitchFamily="34" charset="0"/>
-                <a:ea typeface="Malgun Gothic" pitchFamily="34" charset="-122"/>
-                <a:cs typeface="Malgun Gothic" pitchFamily="34" charset="-120"/>
-              </a:rPr>
-              <a:t>정식 출시</a:t>
-            </a:r>
-            <a:endParaRPr lang="en-US" sz="4000" dirty="0"/>
-          </a:p>
-        </p:txBody>
-      </p:sp>
-      <p:sp>
-        <p:nvSpPr>
-          <p:cNvPr id="26" name="Text 23"/>
-          <p:cNvSpPr/>
-          <p:nvPr/>
-        </p:nvSpPr>
-        <p:spPr>
-          <a:xfrm>
-            <a:off x="6931152" y="3639312"/>
-            <a:ext cx="5001768" cy="310896"/>
-          </a:xfrm>
-          <a:prstGeom prst="rect">
-            <a:avLst/>
-          </a:prstGeom>
-          <a:noFill/>
-          <a:ln/>
-        </p:spPr>
-        <p:txBody>
-          <a:bodyPr wrap="square" rtlCol="0" anchor="ctr"/>
-          <a:lstStyle/>
-          <a:p>
-            <a:pPr algn="ctr" indent="0" marL="0">
-              <a:buNone/>
-            </a:pPr>
-            <a:r>
-              <a:rPr lang="en-US" sz="1050" dirty="0">
-                <a:solidFill>
-                  <a:srgbClr val="8E8E9A"/>
-                </a:solidFill>
-                <a:latin typeface="Malgun Gothic" pitchFamily="34" charset="0"/>
-                <a:ea typeface="Malgun Gothic" pitchFamily="34" charset="-122"/>
-                <a:cs typeface="Malgun Gothic" pitchFamily="34" charset="-120"/>
-              </a:rPr>
-              <a:t>앱스토어 · 플레이스토어 동시 론칭</a:t>
-            </a:r>
-            <a:endParaRPr lang="en-US" sz="1050" dirty="0"/>
-          </a:p>
-        </p:txBody>
-      </p:sp>
-      <p:sp>
-        <p:nvSpPr>
-          <p:cNvPr id="27" name="Shape 24"/>
-          <p:cNvSpPr/>
-          <p:nvPr/>
-        </p:nvSpPr>
-        <p:spPr>
-          <a:xfrm>
-            <a:off x="6675120" y="4187952"/>
-            <a:ext cx="5349240" cy="566928"/>
+          <p:cNvPr id="26" name="Shape 24"/>
+          <p:cNvSpPr/>
+          <p:nvPr/>
+        </p:nvSpPr>
+        <p:spPr>
+          <a:xfrm>
+            <a:off x="6675120" y="3712464"/>
+            <a:ext cx="64008" cy="594360"/>
+          </a:xfrm>
+          <a:prstGeom prst="rect">
+            <a:avLst/>
+          </a:prstGeom>
+          <a:solidFill>
+            <a:srgbClr val="34D399"/>
+          </a:solidFill>
+          <a:ln w="12700">
+            <a:solidFill>
+              <a:srgbClr val="34D399"/>
+            </a:solidFill>
+            <a:prstDash val="solid"/>
+          </a:ln>
+        </p:spPr>
+      </p:sp>
+      <p:sp>
+        <p:nvSpPr>
+          <p:cNvPr id="27" name="Text 25"/>
+          <p:cNvSpPr/>
+          <p:nvPr/>
+        </p:nvSpPr>
+        <p:spPr>
+          <a:xfrm>
+            <a:off x="6931152" y="3776472"/>
+            <a:ext cx="5001768" cy="475488"/>
+          </a:xfrm>
+          <a:prstGeom prst="rect">
+            <a:avLst/>
+          </a:prstGeom>
+          <a:noFill/>
+          <a:ln/>
+        </p:spPr>
+        <p:txBody>
+          <a:bodyPr wrap="square" rtlCol="0" anchor="ctr"/>
+          <a:lstStyle/>
+          <a:p>
+            <a:pPr indent="0" marL="0">
+              <a:buNone/>
+            </a:pPr>
+            <a:r>
+              <a:rPr lang="en-US" sz="1100" dirty="0">
+                <a:solidFill>
+                  <a:srgbClr val="F4F4F6"/>
+                </a:solidFill>
+                <a:latin typeface="Malgun Gothic" pitchFamily="34" charset="0"/>
+                <a:ea typeface="Malgun Gothic" pitchFamily="34" charset="-122"/>
+                <a:cs typeface="Malgun Gothic" pitchFamily="34" charset="-120"/>
+              </a:rPr>
+              <a:t>하이브리드 구조로 콘텐츠 업데이트 시 앱 재배포 없이 즉시 반영</a:t>
+            </a:r>
+            <a:endParaRPr lang="en-US" sz="1100" dirty="0"/>
+          </a:p>
+        </p:txBody>
+      </p:sp>
+      <p:sp>
+        <p:nvSpPr>
+          <p:cNvPr id="28" name="Shape 26"/>
+          <p:cNvSpPr/>
+          <p:nvPr/>
+        </p:nvSpPr>
+        <p:spPr>
+          <a:xfrm>
+            <a:off x="6675120" y="4425696"/>
+            <a:ext cx="5349240" cy="594360"/>
           </a:xfrm>
           <a:prstGeom prst="rect">
             <a:avLst/>
@@ -9039,14 +9034,14 @@
       </p:sp>
       <p:sp>
         <p:nvSpPr>
-          <p:cNvPr id="28" name="Shape 25"/>
-          <p:cNvSpPr/>
-          <p:nvPr/>
-        </p:nvSpPr>
-        <p:spPr>
-          <a:xfrm>
-            <a:off x="6675120" y="4187952"/>
-            <a:ext cx="64008" cy="566928"/>
+          <p:cNvPr id="29" name="Shape 27"/>
+          <p:cNvSpPr/>
+          <p:nvPr/>
+        </p:nvSpPr>
+        <p:spPr>
+          <a:xfrm>
+            <a:off x="6675120" y="4425696"/>
+            <a:ext cx="64008" cy="594360"/>
           </a:xfrm>
           <a:prstGeom prst="rect">
             <a:avLst/>
@@ -9064,30 +9059,30 @@
       </p:sp>
       <p:sp>
         <p:nvSpPr>
-          <p:cNvPr id="29" name="Text 26"/>
-          <p:cNvSpPr/>
-          <p:nvPr/>
-        </p:nvSpPr>
-        <p:spPr>
-          <a:xfrm>
-            <a:off x="6931152" y="4242816"/>
-            <a:ext cx="5001768" cy="457200"/>
-          </a:xfrm>
-          <a:prstGeom prst="rect">
-            <a:avLst/>
-          </a:prstGeom>
-          <a:noFill/>
-          <a:ln/>
-        </p:spPr>
-        <p:txBody>
-          <a:bodyPr wrap="square" rtlCol="0" anchor="ctr"/>
-          <a:lstStyle/>
-          <a:p>
-            <a:pPr indent="0" marL="0">
-              <a:buNone/>
-            </a:pPr>
-            <a:r>
-              <a:rPr lang="en-US" sz="1050" dirty="0">
+          <p:cNvPr id="30" name="Text 28"/>
+          <p:cNvSpPr/>
+          <p:nvPr/>
+        </p:nvSpPr>
+        <p:spPr>
+          <a:xfrm>
+            <a:off x="6931152" y="4489704"/>
+            <a:ext cx="5001768" cy="475488"/>
+          </a:xfrm>
+          <a:prstGeom prst="rect">
+            <a:avLst/>
+          </a:prstGeom>
+          <a:noFill/>
+          <a:ln/>
+        </p:spPr>
+        <p:txBody>
+          <a:bodyPr wrap="square" rtlCol="0" anchor="ctr"/>
+          <a:lstStyle/>
+          <a:p>
+            <a:pPr indent="0" marL="0">
+              <a:buNone/>
+            </a:pPr>
+            <a:r>
+              <a:rPr lang="en-US" sz="1100" dirty="0">
                 <a:solidFill>
                   <a:srgbClr val="F4F4F6"/>
                 </a:solidFill>
@@ -9095,104 +9090,15 @@
                 <a:ea typeface="Malgun Gothic" pitchFamily="34" charset="-122"/>
                 <a:cs typeface="Malgun Gothic" pitchFamily="34" charset="-120"/>
               </a:rPr>
-              <a:t>개발·운영 공수 50% 절감 (하이브리드 구조)</a:t>
-            </a:r>
-            <a:endParaRPr lang="en-US" sz="1050" dirty="0"/>
-          </a:p>
-        </p:txBody>
-      </p:sp>
-      <p:sp>
-        <p:nvSpPr>
-          <p:cNvPr id="30" name="Shape 27"/>
-          <p:cNvSpPr/>
-          <p:nvPr/>
-        </p:nvSpPr>
-        <p:spPr>
-          <a:xfrm>
-            <a:off x="6675120" y="4864608"/>
-            <a:ext cx="5349240" cy="566928"/>
-          </a:xfrm>
-          <a:prstGeom prst="rect">
-            <a:avLst/>
-          </a:prstGeom>
-          <a:solidFill>
-            <a:srgbClr val="111116"/>
-          </a:solidFill>
-          <a:ln w="12700">
-            <a:solidFill>
-              <a:srgbClr val="111116"/>
-            </a:solidFill>
-            <a:prstDash val="solid"/>
-          </a:ln>
-        </p:spPr>
-      </p:sp>
-      <p:sp>
-        <p:nvSpPr>
-          <p:cNvPr id="31" name="Shape 28"/>
-          <p:cNvSpPr/>
-          <p:nvPr/>
-        </p:nvSpPr>
-        <p:spPr>
-          <a:xfrm>
-            <a:off x="6675120" y="4864608"/>
-            <a:ext cx="64008" cy="566928"/>
-          </a:xfrm>
-          <a:prstGeom prst="rect">
-            <a:avLst/>
-          </a:prstGeom>
-          <a:solidFill>
-            <a:srgbClr val="34D399"/>
-          </a:solidFill>
-          <a:ln w="12700">
-            <a:solidFill>
-              <a:srgbClr val="34D399"/>
-            </a:solidFill>
-            <a:prstDash val="solid"/>
-          </a:ln>
-        </p:spPr>
-      </p:sp>
-      <p:sp>
-        <p:nvSpPr>
-          <p:cNvPr id="32" name="Text 29"/>
-          <p:cNvSpPr/>
-          <p:nvPr/>
-        </p:nvSpPr>
-        <p:spPr>
-          <a:xfrm>
-            <a:off x="6931152" y="4919472"/>
-            <a:ext cx="5001768" cy="457200"/>
-          </a:xfrm>
-          <a:prstGeom prst="rect">
-            <a:avLst/>
-          </a:prstGeom>
-          <a:noFill/>
-          <a:ln/>
-        </p:spPr>
-        <p:txBody>
-          <a:bodyPr wrap="square" rtlCol="0" anchor="ctr"/>
-          <a:lstStyle/>
-          <a:p>
-            <a:pPr indent="0" marL="0">
-              <a:buNone/>
-            </a:pPr>
-            <a:r>
-              <a:rPr lang="en-US" sz="1050" dirty="0">
-                <a:solidFill>
-                  <a:srgbClr val="F4F4F6"/>
-                </a:solidFill>
-                <a:latin typeface="Malgun Gothic" pitchFamily="34" charset="0"/>
-                <a:ea typeface="Malgun Gothic" pitchFamily="34" charset="-122"/>
-                <a:cs typeface="Malgun Gothic" pitchFamily="34" charset="-120"/>
-              </a:rPr>
-              <a:t>콜드스타트·푸시 응답속도 개선</a:t>
-            </a:r>
-            <a:endParaRPr lang="en-US" sz="1050" dirty="0"/>
-          </a:p>
-        </p:txBody>
-      </p:sp>
-      <p:sp>
-        <p:nvSpPr>
-          <p:cNvPr id="33" name="Shape 30"/>
+              <a:t>앱스토어·플레이스토어 동시 정식 출시 달성</a:t>
+            </a:r>
+            <a:endParaRPr lang="en-US" sz="1100" dirty="0"/>
+          </a:p>
+        </p:txBody>
+      </p:sp>
+      <p:sp>
+        <p:nvSpPr>
+          <p:cNvPr id="31" name="Shape 29"/>
           <p:cNvSpPr/>
           <p:nvPr/>
         </p:nvSpPr>
@@ -9217,7 +9123,7 @@
       </p:sp>
       <p:sp>
         <p:nvSpPr>
-          <p:cNvPr id="34" name="Text 31"/>
+          <p:cNvPr id="32" name="Text 30"/>
           <p:cNvSpPr/>
           <p:nvPr/>
         </p:nvSpPr>
@@ -10092,63 +9998,161 @@
           </a:p>
         </p:txBody>
       </p:sp>
-      <p:pic>
-        <p:nvPicPr>
-          <p:cNvPr id="26" name="Image 0" descr="/Users/jinwon/Desktop/jinwon-portfolio/apps/web/public/images/projects/web015-3.png">    </p:cNvPr>
-          <p:cNvPicPr>
-            <a:picLocks noChangeAspect="1"/>
-          </p:cNvPicPr>
-          <p:nvPr/>
-        </p:nvPicPr>
-        <p:blipFill>
-          <a:blip r:embed="rId1"/>
-          <a:srcRect l="0" r="0" t="0" b="0"/>
-          <a:stretch/>
-        </p:blipFill>
+      <p:sp>
+        <p:nvSpPr>
+          <p:cNvPr id="26" name="Shape 24"/>
+          <p:cNvSpPr/>
+          <p:nvPr/>
+        </p:nvSpPr>
         <p:spPr>
           <a:xfrm>
             <a:off x="6675120" y="1298448"/>
-            <a:ext cx="5349240" cy="1261872"/>
-          </a:xfrm>
-          <a:prstGeom prst="rect">
-            <a:avLst/>
-          </a:prstGeom>
-        </p:spPr>
-      </p:pic>
-      <p:sp>
-        <p:nvSpPr>
-          <p:cNvPr id="27" name="Shape 24"/>
+            <a:ext cx="5349240" cy="2231136"/>
+          </a:xfrm>
+          <a:prstGeom prst="rect">
+            <a:avLst/>
+          </a:prstGeom>
+          <a:solidFill>
+            <a:srgbClr val="111116"/>
+          </a:solidFill>
+          <a:ln w="12700">
+            <a:solidFill>
+              <a:srgbClr val="111116"/>
+            </a:solidFill>
+            <a:prstDash val="solid"/>
+          </a:ln>
+        </p:spPr>
+      </p:sp>
+      <p:sp>
+        <p:nvSpPr>
+          <p:cNvPr id="27" name="Shape 25"/>
           <p:cNvSpPr/>
           <p:nvPr/>
         </p:nvSpPr>
         <p:spPr>
           <a:xfrm>
             <a:off x="6675120" y="1298448"/>
-            <a:ext cx="5349240" cy="1261872"/>
-          </a:xfrm>
-          <a:prstGeom prst="rect">
-            <a:avLst/>
-          </a:prstGeom>
-          <a:ln w="12700">
-            <a:solidFill>
-              <a:srgbClr val="818CF8">
-                <a:alpha val="50000"/>
-              </a:srgbClr>
-            </a:solidFill>
-            <a:prstDash val="solid"/>
-          </a:ln>
-        </p:spPr>
-      </p:sp>
-      <p:sp>
-        <p:nvSpPr>
-          <p:cNvPr id="28" name="Shape 25"/>
-          <p:cNvSpPr/>
-          <p:nvPr/>
-        </p:nvSpPr>
-        <p:spPr>
-          <a:xfrm>
-            <a:off x="6675120" y="2651760"/>
-            <a:ext cx="5349240" cy="1426464"/>
+            <a:ext cx="64008" cy="2231136"/>
+          </a:xfrm>
+          <a:prstGeom prst="rect">
+            <a:avLst/>
+          </a:prstGeom>
+          <a:solidFill>
+            <a:srgbClr val="818CF8"/>
+          </a:solidFill>
+          <a:ln w="12700">
+            <a:solidFill>
+              <a:srgbClr val="818CF8"/>
+            </a:solidFill>
+            <a:prstDash val="solid"/>
+          </a:ln>
+        </p:spPr>
+      </p:sp>
+      <p:sp>
+        <p:nvSpPr>
+          <p:cNvPr id="28" name="Text 26"/>
+          <p:cNvSpPr/>
+          <p:nvPr/>
+        </p:nvSpPr>
+        <p:spPr>
+          <a:xfrm>
+            <a:off x="6931152" y="1463040"/>
+            <a:ext cx="5001768" cy="1188720"/>
+          </a:xfrm>
+          <a:prstGeom prst="rect">
+            <a:avLst/>
+          </a:prstGeom>
+          <a:noFill/>
+          <a:ln/>
+        </p:spPr>
+        <p:txBody>
+          <a:bodyPr wrap="square" rtlCol="0" anchor="ctr"/>
+          <a:lstStyle/>
+          <a:p>
+            <a:pPr algn="ctr" indent="0" marL="0">
+              <a:buNone/>
+            </a:pPr>
+            <a:r>
+              <a:rPr lang="en-US" sz="4600" b="1" dirty="0">
+                <a:solidFill>
+                  <a:srgbClr val="818CF8"/>
+                </a:solidFill>
+                <a:latin typeface="Malgun Gothic" pitchFamily="34" charset="0"/>
+                <a:ea typeface="Malgun Gothic" pitchFamily="34" charset="-122"/>
+                <a:cs typeface="Malgun Gothic" pitchFamily="34" charset="-120"/>
+              </a:rPr>
+              <a:t>exports</a:t>
+            </a:r>
+            <a:endParaRPr lang="en-US" sz="4600" dirty="0"/>
+          </a:p>
+          <a:p>
+            <a:pPr algn="ctr" indent="0" marL="0">
+              <a:buNone/>
+            </a:pPr>
+            <a:r>
+              <a:rPr lang="en-US" sz="4600" b="1" dirty="0">
+                <a:solidFill>
+                  <a:srgbClr val="818CF8"/>
+                </a:solidFill>
+                <a:latin typeface="Malgun Gothic" pitchFamily="34" charset="0"/>
+                <a:ea typeface="Malgun Gothic" pitchFamily="34" charset="-122"/>
+                <a:cs typeface="Malgun Gothic" pitchFamily="34" charset="-120"/>
+              </a:rPr>
+              <a:t>182→0</a:t>
+            </a:r>
+            <a:endParaRPr lang="en-US" sz="4600" dirty="0"/>
+          </a:p>
+        </p:txBody>
+      </p:sp>
+      <p:sp>
+        <p:nvSpPr>
+          <p:cNvPr id="29" name="Text 27"/>
+          <p:cNvSpPr/>
+          <p:nvPr/>
+        </p:nvSpPr>
+        <p:spPr>
+          <a:xfrm>
+            <a:off x="6931152" y="2651760"/>
+            <a:ext cx="5001768" cy="329184"/>
+          </a:xfrm>
+          <a:prstGeom prst="rect">
+            <a:avLst/>
+          </a:prstGeom>
+          <a:noFill/>
+          <a:ln/>
+        </p:spPr>
+        <p:txBody>
+          <a:bodyPr wrap="square" rtlCol="0" anchor="ctr"/>
+          <a:lstStyle/>
+          <a:p>
+            <a:pPr algn="ctr" indent="0" marL="0">
+              <a:buNone/>
+            </a:pPr>
+            <a:r>
+              <a:rPr lang="en-US" sz="1100" dirty="0">
+                <a:solidFill>
+                  <a:srgbClr val="8E8E9A"/>
+                </a:solidFill>
+                <a:latin typeface="Malgun Gothic" pitchFamily="34" charset="0"/>
+                <a:ea typeface="Malgun Gothic" pitchFamily="34" charset="-122"/>
+                <a:cs typeface="Malgun Gothic" pitchFamily="34" charset="-120"/>
+              </a:rPr>
+              <a:t>Knip 정적 분석 / 불필요한 exports 전수 제거</a:t>
+            </a:r>
+            <a:endParaRPr lang="en-US" sz="1100" dirty="0"/>
+          </a:p>
+        </p:txBody>
+      </p:sp>
+      <p:sp>
+        <p:nvSpPr>
+          <p:cNvPr id="30" name="Shape 28"/>
+          <p:cNvSpPr/>
+          <p:nvPr/>
+        </p:nvSpPr>
+        <p:spPr>
+          <a:xfrm>
+            <a:off x="6675120" y="3712464"/>
+            <a:ext cx="5349240" cy="594360"/>
           </a:xfrm>
           <a:prstGeom prst="rect">
             <a:avLst/>
@@ -10166,117 +10170,78 @@
       </p:sp>
       <p:sp>
         <p:nvSpPr>
-          <p:cNvPr id="29" name="Shape 26"/>
-          <p:cNvSpPr/>
-          <p:nvPr/>
-        </p:nvSpPr>
-        <p:spPr>
-          <a:xfrm>
-            <a:off x="6675120" y="2651760"/>
-            <a:ext cx="64008" cy="1426464"/>
-          </a:xfrm>
-          <a:prstGeom prst="rect">
-            <a:avLst/>
-          </a:prstGeom>
-          <a:solidFill>
-            <a:srgbClr val="818CF8"/>
-          </a:solidFill>
-          <a:ln w="12700">
-            <a:solidFill>
-              <a:srgbClr val="818CF8"/>
-            </a:solidFill>
-            <a:prstDash val="solid"/>
-          </a:ln>
-        </p:spPr>
-      </p:sp>
-      <p:sp>
-        <p:nvSpPr>
-          <p:cNvPr id="30" name="Text 27"/>
-          <p:cNvSpPr/>
-          <p:nvPr/>
-        </p:nvSpPr>
-        <p:spPr>
-          <a:xfrm>
-            <a:off x="6931152" y="2743200"/>
-            <a:ext cx="5001768" cy="841248"/>
-          </a:xfrm>
-          <a:prstGeom prst="rect">
-            <a:avLst/>
-          </a:prstGeom>
-          <a:noFill/>
-          <a:ln/>
-        </p:spPr>
-        <p:txBody>
-          <a:bodyPr wrap="square" rtlCol="0" anchor="ctr"/>
-          <a:lstStyle/>
-          <a:p>
-            <a:pPr algn="ctr" indent="0" marL="0">
-              <a:buNone/>
-            </a:pPr>
-            <a:r>
-              <a:rPr lang="en-US" sz="4000" b="1" dirty="0">
-                <a:solidFill>
-                  <a:srgbClr val="818CF8"/>
-                </a:solidFill>
-                <a:latin typeface="Malgun Gothic" pitchFamily="34" charset="0"/>
-                <a:ea typeface="Malgun Gothic" pitchFamily="34" charset="-122"/>
-                <a:cs typeface="Malgun Gothic" pitchFamily="34" charset="-120"/>
-              </a:rPr>
-              <a:t>40%</a:t>
-            </a:r>
-            <a:endParaRPr lang="en-US" sz="4000" dirty="0"/>
-          </a:p>
-        </p:txBody>
-      </p:sp>
-      <p:sp>
-        <p:nvSpPr>
-          <p:cNvPr id="31" name="Text 28"/>
-          <p:cNvSpPr/>
-          <p:nvPr/>
-        </p:nvSpPr>
-        <p:spPr>
-          <a:xfrm>
-            <a:off x="6931152" y="3639312"/>
-            <a:ext cx="5001768" cy="310896"/>
-          </a:xfrm>
-          <a:prstGeom prst="rect">
-            <a:avLst/>
-          </a:prstGeom>
-          <a:noFill/>
-          <a:ln/>
-        </p:spPr>
-        <p:txBody>
-          <a:bodyPr wrap="square" rtlCol="0" anchor="ctr"/>
-          <a:lstStyle/>
-          <a:p>
-            <a:pPr algn="ctr" indent="0" marL="0">
-              <a:buNone/>
-            </a:pPr>
-            <a:r>
-              <a:rPr lang="en-US" sz="1050" dirty="0">
-                <a:solidFill>
-                  <a:srgbClr val="8E8E9A"/>
-                </a:solidFill>
-                <a:latin typeface="Malgun Gothic" pitchFamily="34" charset="0"/>
-                <a:ea typeface="Malgun Gothic" pitchFamily="34" charset="-122"/>
-                <a:cs typeface="Malgun Gothic" pitchFamily="34" charset="-120"/>
-              </a:rPr>
-              <a:t>유지보수 공수 절감</a:t>
-            </a:r>
-            <a:endParaRPr lang="en-US" sz="1050" dirty="0"/>
-          </a:p>
-        </p:txBody>
-      </p:sp>
-      <p:sp>
-        <p:nvSpPr>
-          <p:cNvPr id="32" name="Shape 29"/>
-          <p:cNvSpPr/>
-          <p:nvPr/>
-        </p:nvSpPr>
-        <p:spPr>
-          <a:xfrm>
-            <a:off x="6675120" y="4187952"/>
-            <a:ext cx="5349240" cy="566928"/>
+          <p:cNvPr id="31" name="Shape 29"/>
+          <p:cNvSpPr/>
+          <p:nvPr/>
+        </p:nvSpPr>
+        <p:spPr>
+          <a:xfrm>
+            <a:off x="6675120" y="3712464"/>
+            <a:ext cx="64008" cy="594360"/>
+          </a:xfrm>
+          <a:prstGeom prst="rect">
+            <a:avLst/>
+          </a:prstGeom>
+          <a:solidFill>
+            <a:srgbClr val="34D399"/>
+          </a:solidFill>
+          <a:ln w="12700">
+            <a:solidFill>
+              <a:srgbClr val="34D399"/>
+            </a:solidFill>
+            <a:prstDash val="solid"/>
+          </a:ln>
+        </p:spPr>
+      </p:sp>
+      <p:sp>
+        <p:nvSpPr>
+          <p:cNvPr id="32" name="Text 30"/>
+          <p:cNvSpPr/>
+          <p:nvPr/>
+        </p:nvSpPr>
+        <p:spPr>
+          <a:xfrm>
+            <a:off x="6931152" y="3776472"/>
+            <a:ext cx="5001768" cy="475488"/>
+          </a:xfrm>
+          <a:prstGeom prst="rect">
+            <a:avLst/>
+          </a:prstGeom>
+          <a:noFill/>
+          <a:ln/>
+        </p:spPr>
+        <p:txBody>
+          <a:bodyPr wrap="square" rtlCol="0" anchor="ctr"/>
+          <a:lstStyle/>
+          <a:p>
+            <a:pPr indent="0" marL="0">
+              <a:buNone/>
+            </a:pPr>
+            <a:r>
+              <a:rPr lang="en-US" sz="1100" dirty="0">
+                <a:solidFill>
+                  <a:srgbClr val="F4F4F6"/>
+                </a:solidFill>
+                <a:latin typeface="Malgun Gothic" pitchFamily="34" charset="0"/>
+                <a:ea typeface="Malgun Gothic" pitchFamily="34" charset="-122"/>
+                <a:cs typeface="Malgun Gothic" pitchFamily="34" charset="-120"/>
+              </a:rPr>
+              <a:t>고객 문의 감소 및 업로드 UX 개선</a:t>
+            </a:r>
+            <a:endParaRPr lang="en-US" sz="1100" dirty="0"/>
+          </a:p>
+        </p:txBody>
+      </p:sp>
+      <p:sp>
+        <p:nvSpPr>
+          <p:cNvPr id="33" name="Shape 31"/>
+          <p:cNvSpPr/>
+          <p:nvPr/>
+        </p:nvSpPr>
+        <p:spPr>
+          <a:xfrm>
+            <a:off x="6675120" y="4425696"/>
+            <a:ext cx="5349240" cy="594360"/>
           </a:xfrm>
           <a:prstGeom prst="rect">
             <a:avLst/>
@@ -10294,14 +10259,14 @@
       </p:sp>
       <p:sp>
         <p:nvSpPr>
-          <p:cNvPr id="33" name="Shape 30"/>
-          <p:cNvSpPr/>
-          <p:nvPr/>
-        </p:nvSpPr>
-        <p:spPr>
-          <a:xfrm>
-            <a:off x="6675120" y="4187952"/>
-            <a:ext cx="64008" cy="566928"/>
+          <p:cNvPr id="34" name="Shape 32"/>
+          <p:cNvSpPr/>
+          <p:nvPr/>
+        </p:nvSpPr>
+        <p:spPr>
+          <a:xfrm>
+            <a:off x="6675120" y="4425696"/>
+            <a:ext cx="64008" cy="594360"/>
           </a:xfrm>
           <a:prstGeom prst="rect">
             <a:avLst/>
@@ -10319,30 +10284,30 @@
       </p:sp>
       <p:sp>
         <p:nvSpPr>
-          <p:cNvPr id="34" name="Text 31"/>
-          <p:cNvSpPr/>
-          <p:nvPr/>
-        </p:nvSpPr>
-        <p:spPr>
-          <a:xfrm>
-            <a:off x="6931152" y="4242816"/>
-            <a:ext cx="5001768" cy="457200"/>
-          </a:xfrm>
-          <a:prstGeom prst="rect">
-            <a:avLst/>
-          </a:prstGeom>
-          <a:noFill/>
-          <a:ln/>
-        </p:spPr>
-        <p:txBody>
-          <a:bodyPr wrap="square" rtlCol="0" anchor="ctr"/>
-          <a:lstStyle/>
-          <a:p>
-            <a:pPr indent="0" marL="0">
-              <a:buNone/>
-            </a:pPr>
-            <a:r>
-              <a:rPr lang="en-US" sz="1050" dirty="0">
+          <p:cNvPr id="35" name="Text 33"/>
+          <p:cNvSpPr/>
+          <p:nvPr/>
+        </p:nvSpPr>
+        <p:spPr>
+          <a:xfrm>
+            <a:off x="6931152" y="4489704"/>
+            <a:ext cx="5001768" cy="475488"/>
+          </a:xfrm>
+          <a:prstGeom prst="rect">
+            <a:avLst/>
+          </a:prstGeom>
+          <a:noFill/>
+          <a:ln/>
+        </p:spPr>
+        <p:txBody>
+          <a:bodyPr wrap="square" rtlCol="0" anchor="ctr"/>
+          <a:lstStyle/>
+          <a:p>
+            <a:pPr indent="0" marL="0">
+              <a:buNone/>
+            </a:pPr>
+            <a:r>
+              <a:rPr lang="en-US" sz="1100" dirty="0">
                 <a:solidFill>
                   <a:srgbClr val="F4F4F6"/>
                 </a:solidFill>
@@ -10350,104 +10315,15 @@
                 <a:ea typeface="Malgun Gothic" pitchFamily="34" charset="-122"/>
                 <a:cs typeface="Malgun Gothic" pitchFamily="34" charset="-120"/>
               </a:rPr>
-              <a:t>고객 문의 감소 및 업로드 UX 개선</a:t>
-            </a:r>
-            <a:endParaRPr lang="en-US" sz="1050" dirty="0"/>
-          </a:p>
-        </p:txBody>
-      </p:sp>
-      <p:sp>
-        <p:nvSpPr>
-          <p:cNvPr id="35" name="Shape 32"/>
-          <p:cNvSpPr/>
-          <p:nvPr/>
-        </p:nvSpPr>
-        <p:spPr>
-          <a:xfrm>
-            <a:off x="6675120" y="4864608"/>
-            <a:ext cx="5349240" cy="566928"/>
-          </a:xfrm>
-          <a:prstGeom prst="rect">
-            <a:avLst/>
-          </a:prstGeom>
-          <a:solidFill>
-            <a:srgbClr val="111116"/>
-          </a:solidFill>
-          <a:ln w="12700">
-            <a:solidFill>
-              <a:srgbClr val="111116"/>
-            </a:solidFill>
-            <a:prstDash val="solid"/>
-          </a:ln>
-        </p:spPr>
-      </p:sp>
-      <p:sp>
-        <p:nvSpPr>
-          <p:cNvPr id="36" name="Shape 33"/>
-          <p:cNvSpPr/>
-          <p:nvPr/>
-        </p:nvSpPr>
-        <p:spPr>
-          <a:xfrm>
-            <a:off x="6675120" y="4864608"/>
-            <a:ext cx="64008" cy="566928"/>
-          </a:xfrm>
-          <a:prstGeom prst="rect">
-            <a:avLst/>
-          </a:prstGeom>
-          <a:solidFill>
-            <a:srgbClr val="34D399"/>
-          </a:solidFill>
-          <a:ln w="12700">
-            <a:solidFill>
-              <a:srgbClr val="34D399"/>
-            </a:solidFill>
-            <a:prstDash val="solid"/>
-          </a:ln>
-        </p:spPr>
-      </p:sp>
-      <p:sp>
-        <p:nvSpPr>
-          <p:cNvPr id="37" name="Text 34"/>
-          <p:cNvSpPr/>
-          <p:nvPr/>
-        </p:nvSpPr>
-        <p:spPr>
-          <a:xfrm>
-            <a:off x="6931152" y="4919472"/>
-            <a:ext cx="5001768" cy="457200"/>
-          </a:xfrm>
-          <a:prstGeom prst="rect">
-            <a:avLst/>
-          </a:prstGeom>
-          <a:noFill/>
-          <a:ln/>
-        </p:spPr>
-        <p:txBody>
-          <a:bodyPr wrap="square" rtlCol="0" anchor="ctr"/>
-          <a:lstStyle/>
-          <a:p>
-            <a:pPr indent="0" marL="0">
-              <a:buNone/>
-            </a:pPr>
-            <a:r>
-              <a:rPr lang="en-US" sz="1050" dirty="0">
-                <a:solidFill>
-                  <a:srgbClr val="F4F4F6"/>
-                </a:solidFill>
-                <a:latin typeface="Malgun Gothic" pitchFamily="34" charset="0"/>
-                <a:ea typeface="Malgun Gothic" pitchFamily="34" charset="-122"/>
-                <a:cs typeface="Malgun Gothic" pitchFamily="34" charset="-120"/>
-              </a:rPr>
               <a:t>팀원 온보딩·협업 효율성 강화</a:t>
             </a:r>
-            <a:endParaRPr lang="en-US" sz="1050" dirty="0"/>
-          </a:p>
-        </p:txBody>
-      </p:sp>
-      <p:sp>
-        <p:nvSpPr>
-          <p:cNvPr id="38" name="Shape 35"/>
+            <a:endParaRPr lang="en-US" sz="1100" dirty="0"/>
+          </a:p>
+        </p:txBody>
+      </p:sp>
+      <p:sp>
+        <p:nvSpPr>
+          <p:cNvPr id="36" name="Shape 34"/>
           <p:cNvSpPr/>
           <p:nvPr/>
         </p:nvSpPr>
@@ -10472,7 +10348,7 @@
       </p:sp>
       <p:sp>
         <p:nvSpPr>
-          <p:cNvPr id="39" name="Text 36"/>
+          <p:cNvPr id="37" name="Text 35"/>
           <p:cNvSpPr/>
           <p:nvPr/>
         </p:nvSpPr>
@@ -11166,63 +11042,144 @@
           </a:p>
         </p:txBody>
       </p:sp>
-      <p:pic>
-        <p:nvPicPr>
-          <p:cNvPr id="21" name="Image 0" descr="/Users/jinwon/Desktop/jinwon-portfolio/apps/web/public/images/projects/customer-1.png">    </p:cNvPr>
-          <p:cNvPicPr>
-            <a:picLocks noChangeAspect="1"/>
-          </p:cNvPicPr>
-          <p:nvPr/>
-        </p:nvPicPr>
-        <p:blipFill>
-          <a:blip r:embed="rId1"/>
-          <a:srcRect l="0" r="0" t="0" b="0"/>
-          <a:stretch/>
-        </p:blipFill>
+      <p:sp>
+        <p:nvSpPr>
+          <p:cNvPr id="21" name="Shape 19"/>
+          <p:cNvSpPr/>
+          <p:nvPr/>
+        </p:nvSpPr>
         <p:spPr>
           <a:xfrm>
             <a:off x="6675120" y="1298448"/>
-            <a:ext cx="5349240" cy="1261872"/>
-          </a:xfrm>
-          <a:prstGeom prst="rect">
-            <a:avLst/>
-          </a:prstGeom>
-        </p:spPr>
-      </p:pic>
-      <p:sp>
-        <p:nvSpPr>
-          <p:cNvPr id="22" name="Shape 19"/>
+            <a:ext cx="5349240" cy="2231136"/>
+          </a:xfrm>
+          <a:prstGeom prst="rect">
+            <a:avLst/>
+          </a:prstGeom>
+          <a:solidFill>
+            <a:srgbClr val="111116"/>
+          </a:solidFill>
+          <a:ln w="12700">
+            <a:solidFill>
+              <a:srgbClr val="111116"/>
+            </a:solidFill>
+            <a:prstDash val="solid"/>
+          </a:ln>
+        </p:spPr>
+      </p:sp>
+      <p:sp>
+        <p:nvSpPr>
+          <p:cNvPr id="22" name="Shape 20"/>
           <p:cNvSpPr/>
           <p:nvPr/>
         </p:nvSpPr>
         <p:spPr>
           <a:xfrm>
             <a:off x="6675120" y="1298448"/>
-            <a:ext cx="5349240" cy="1261872"/>
-          </a:xfrm>
-          <a:prstGeom prst="rect">
-            <a:avLst/>
-          </a:prstGeom>
-          <a:ln w="12700">
-            <a:solidFill>
-              <a:srgbClr val="818CF8">
-                <a:alpha val="50000"/>
-              </a:srgbClr>
-            </a:solidFill>
-            <a:prstDash val="solid"/>
-          </a:ln>
-        </p:spPr>
-      </p:sp>
-      <p:sp>
-        <p:nvSpPr>
-          <p:cNvPr id="23" name="Shape 20"/>
-          <p:cNvSpPr/>
-          <p:nvPr/>
-        </p:nvSpPr>
-        <p:spPr>
-          <a:xfrm>
-            <a:off x="6675120" y="2651760"/>
-            <a:ext cx="5349240" cy="1426464"/>
+            <a:ext cx="64008" cy="2231136"/>
+          </a:xfrm>
+          <a:prstGeom prst="rect">
+            <a:avLst/>
+          </a:prstGeom>
+          <a:solidFill>
+            <a:srgbClr val="818CF8"/>
+          </a:solidFill>
+          <a:ln w="12700">
+            <a:solidFill>
+              <a:srgbClr val="818CF8"/>
+            </a:solidFill>
+            <a:prstDash val="solid"/>
+          </a:ln>
+        </p:spPr>
+      </p:sp>
+      <p:sp>
+        <p:nvSpPr>
+          <p:cNvPr id="23" name="Text 21"/>
+          <p:cNvSpPr/>
+          <p:nvPr/>
+        </p:nvSpPr>
+        <p:spPr>
+          <a:xfrm>
+            <a:off x="6931152" y="1463040"/>
+            <a:ext cx="5001768" cy="1188720"/>
+          </a:xfrm>
+          <a:prstGeom prst="rect">
+            <a:avLst/>
+          </a:prstGeom>
+          <a:noFill/>
+          <a:ln/>
+        </p:spPr>
+        <p:txBody>
+          <a:bodyPr wrap="square" rtlCol="0" anchor="ctr"/>
+          <a:lstStyle/>
+          <a:p>
+            <a:pPr algn="ctr" indent="0" marL="0">
+              <a:buNone/>
+            </a:pPr>
+            <a:r>
+              <a:rPr lang="en-US" sz="4600" b="1" dirty="0">
+                <a:solidFill>
+                  <a:srgbClr val="818CF8"/>
+                </a:solidFill>
+                <a:latin typeface="Malgun Gothic" pitchFamily="34" charset="0"/>
+                <a:ea typeface="Malgun Gothic" pitchFamily="34" charset="-122"/>
+                <a:cs typeface="Malgun Gothic" pitchFamily="34" charset="-120"/>
+              </a:rPr>
+              <a:t>FE 2인</a:t>
+            </a:r>
+            <a:endParaRPr lang="en-US" sz="4600" dirty="0"/>
+          </a:p>
+        </p:txBody>
+      </p:sp>
+      <p:sp>
+        <p:nvSpPr>
+          <p:cNvPr id="24" name="Text 22"/>
+          <p:cNvSpPr/>
+          <p:nvPr/>
+        </p:nvSpPr>
+        <p:spPr>
+          <a:xfrm>
+            <a:off x="6931152" y="2651760"/>
+            <a:ext cx="5001768" cy="329184"/>
+          </a:xfrm>
+          <a:prstGeom prst="rect">
+            <a:avLst/>
+          </a:prstGeom>
+          <a:noFill/>
+          <a:ln/>
+        </p:spPr>
+        <p:txBody>
+          <a:bodyPr wrap="square" rtlCol="0" anchor="ctr"/>
+          <a:lstStyle/>
+          <a:p>
+            <a:pPr algn="ctr" indent="0" marL="0">
+              <a:buNone/>
+            </a:pPr>
+            <a:r>
+              <a:rPr lang="en-US" sz="1100" dirty="0">
+                <a:solidFill>
+                  <a:srgbClr val="8E8E9A"/>
+                </a:solidFill>
+                <a:latin typeface="Malgun Gothic" pitchFamily="34" charset="0"/>
+                <a:ea typeface="Malgun Gothic" pitchFamily="34" charset="-122"/>
+                <a:cs typeface="Malgun Gothic" pitchFamily="34" charset="-120"/>
+              </a:rPr>
+              <a:t>설계 → 배포 전 과정 주도</a:t>
+            </a:r>
+            <a:endParaRPr lang="en-US" sz="1100" dirty="0"/>
+          </a:p>
+        </p:txBody>
+      </p:sp>
+      <p:sp>
+        <p:nvSpPr>
+          <p:cNvPr id="25" name="Shape 23"/>
+          <p:cNvSpPr/>
+          <p:nvPr/>
+        </p:nvSpPr>
+        <p:spPr>
+          <a:xfrm>
+            <a:off x="6675120" y="3712464"/>
+            <a:ext cx="5349240" cy="594360"/>
           </a:xfrm>
           <a:prstGeom prst="rect">
             <a:avLst/>
@@ -11240,117 +11197,78 @@
       </p:sp>
       <p:sp>
         <p:nvSpPr>
-          <p:cNvPr id="24" name="Shape 21"/>
-          <p:cNvSpPr/>
-          <p:nvPr/>
-        </p:nvSpPr>
-        <p:spPr>
-          <a:xfrm>
-            <a:off x="6675120" y="2651760"/>
-            <a:ext cx="64008" cy="1426464"/>
-          </a:xfrm>
-          <a:prstGeom prst="rect">
-            <a:avLst/>
-          </a:prstGeom>
-          <a:solidFill>
-            <a:srgbClr val="818CF8"/>
-          </a:solidFill>
-          <a:ln w="12700">
-            <a:solidFill>
-              <a:srgbClr val="818CF8"/>
-            </a:solidFill>
-            <a:prstDash val="solid"/>
-          </a:ln>
-        </p:spPr>
-      </p:sp>
-      <p:sp>
-        <p:nvSpPr>
-          <p:cNvPr id="25" name="Text 22"/>
-          <p:cNvSpPr/>
-          <p:nvPr/>
-        </p:nvSpPr>
-        <p:spPr>
-          <a:xfrm>
-            <a:off x="6931152" y="2743200"/>
-            <a:ext cx="5001768" cy="841248"/>
-          </a:xfrm>
-          <a:prstGeom prst="rect">
-            <a:avLst/>
-          </a:prstGeom>
-          <a:noFill/>
-          <a:ln/>
-        </p:spPr>
-        <p:txBody>
-          <a:bodyPr wrap="square" rtlCol="0" anchor="ctr"/>
-          <a:lstStyle/>
-          <a:p>
-            <a:pPr algn="ctr" indent="0" marL="0">
-              <a:buNone/>
-            </a:pPr>
-            <a:r>
-              <a:rPr lang="en-US" sz="4000" b="1" dirty="0">
-                <a:solidFill>
-                  <a:srgbClr val="818CF8"/>
-                </a:solidFill>
-                <a:latin typeface="Malgun Gothic" pitchFamily="34" charset="0"/>
-                <a:ea typeface="Malgun Gothic" pitchFamily="34" charset="-122"/>
-                <a:cs typeface="Malgun Gothic" pitchFamily="34" charset="-120"/>
-              </a:rPr>
-              <a:t>FE 2인</a:t>
-            </a:r>
-            <a:endParaRPr lang="en-US" sz="4000" dirty="0"/>
-          </a:p>
-        </p:txBody>
-      </p:sp>
-      <p:sp>
-        <p:nvSpPr>
-          <p:cNvPr id="26" name="Text 23"/>
-          <p:cNvSpPr/>
-          <p:nvPr/>
-        </p:nvSpPr>
-        <p:spPr>
-          <a:xfrm>
-            <a:off x="6931152" y="3639312"/>
-            <a:ext cx="5001768" cy="310896"/>
-          </a:xfrm>
-          <a:prstGeom prst="rect">
-            <a:avLst/>
-          </a:prstGeom>
-          <a:noFill/>
-          <a:ln/>
-        </p:spPr>
-        <p:txBody>
-          <a:bodyPr wrap="square" rtlCol="0" anchor="ctr"/>
-          <a:lstStyle/>
-          <a:p>
-            <a:pPr algn="ctr" indent="0" marL="0">
-              <a:buNone/>
-            </a:pPr>
-            <a:r>
-              <a:rPr lang="en-US" sz="1050" dirty="0">
-                <a:solidFill>
-                  <a:srgbClr val="8E8E9A"/>
-                </a:solidFill>
-                <a:latin typeface="Malgun Gothic" pitchFamily="34" charset="0"/>
-                <a:ea typeface="Malgun Gothic" pitchFamily="34" charset="-122"/>
-                <a:cs typeface="Malgun Gothic" pitchFamily="34" charset="-120"/>
-              </a:rPr>
-              <a:t>설계 → 배포 전 과정 주도</a:t>
-            </a:r>
-            <a:endParaRPr lang="en-US" sz="1050" dirty="0"/>
-          </a:p>
-        </p:txBody>
-      </p:sp>
-      <p:sp>
-        <p:nvSpPr>
-          <p:cNvPr id="27" name="Shape 24"/>
-          <p:cNvSpPr/>
-          <p:nvPr/>
-        </p:nvSpPr>
-        <p:spPr>
-          <a:xfrm>
-            <a:off x="6675120" y="4187952"/>
-            <a:ext cx="5349240" cy="566928"/>
+          <p:cNvPr id="26" name="Shape 24"/>
+          <p:cNvSpPr/>
+          <p:nvPr/>
+        </p:nvSpPr>
+        <p:spPr>
+          <a:xfrm>
+            <a:off x="6675120" y="3712464"/>
+            <a:ext cx="64008" cy="594360"/>
+          </a:xfrm>
+          <a:prstGeom prst="rect">
+            <a:avLst/>
+          </a:prstGeom>
+          <a:solidFill>
+            <a:srgbClr val="34D399"/>
+          </a:solidFill>
+          <a:ln w="12700">
+            <a:solidFill>
+              <a:srgbClr val="34D399"/>
+            </a:solidFill>
+            <a:prstDash val="solid"/>
+          </a:ln>
+        </p:spPr>
+      </p:sp>
+      <p:sp>
+        <p:nvSpPr>
+          <p:cNvPr id="27" name="Text 25"/>
+          <p:cNvSpPr/>
+          <p:nvPr/>
+        </p:nvSpPr>
+        <p:spPr>
+          <a:xfrm>
+            <a:off x="6931152" y="3776472"/>
+            <a:ext cx="5001768" cy="475488"/>
+          </a:xfrm>
+          <a:prstGeom prst="rect">
+            <a:avLst/>
+          </a:prstGeom>
+          <a:noFill/>
+          <a:ln/>
+        </p:spPr>
+        <p:txBody>
+          <a:bodyPr wrap="square" rtlCol="0" anchor="ctr"/>
+          <a:lstStyle/>
+          <a:p>
+            <a:pPr indent="0" marL="0">
+              <a:buNone/>
+            </a:pPr>
+            <a:r>
+              <a:rPr lang="en-US" sz="1100" dirty="0">
+                <a:solidFill>
+                  <a:srgbClr val="F4F4F6"/>
+                </a:solidFill>
+                <a:latin typeface="Malgun Gothic" pitchFamily="34" charset="0"/>
+                <a:ea typeface="Malgun Gothic" pitchFamily="34" charset="-122"/>
+                <a:cs typeface="Malgun Gothic" pitchFamily="34" charset="-120"/>
+              </a:rPr>
+              <a:t>대규모 관리 시스템 0→1 구축 전 과정 경험</a:t>
+            </a:r>
+            <a:endParaRPr lang="en-US" sz="1100" dirty="0"/>
+          </a:p>
+        </p:txBody>
+      </p:sp>
+      <p:sp>
+        <p:nvSpPr>
+          <p:cNvPr id="28" name="Shape 26"/>
+          <p:cNvSpPr/>
+          <p:nvPr/>
+        </p:nvSpPr>
+        <p:spPr>
+          <a:xfrm>
+            <a:off x="6675120" y="4425696"/>
+            <a:ext cx="5349240" cy="594360"/>
           </a:xfrm>
           <a:prstGeom prst="rect">
             <a:avLst/>
@@ -11368,14 +11286,14 @@
       </p:sp>
       <p:sp>
         <p:nvSpPr>
-          <p:cNvPr id="28" name="Shape 25"/>
-          <p:cNvSpPr/>
-          <p:nvPr/>
-        </p:nvSpPr>
-        <p:spPr>
-          <a:xfrm>
-            <a:off x="6675120" y="4187952"/>
-            <a:ext cx="64008" cy="566928"/>
+          <p:cNvPr id="29" name="Shape 27"/>
+          <p:cNvSpPr/>
+          <p:nvPr/>
+        </p:nvSpPr>
+        <p:spPr>
+          <a:xfrm>
+            <a:off x="6675120" y="4425696"/>
+            <a:ext cx="64008" cy="594360"/>
           </a:xfrm>
           <a:prstGeom prst="rect">
             <a:avLst/>
@@ -11393,30 +11311,30 @@
       </p:sp>
       <p:sp>
         <p:nvSpPr>
-          <p:cNvPr id="29" name="Text 26"/>
-          <p:cNvSpPr/>
-          <p:nvPr/>
-        </p:nvSpPr>
-        <p:spPr>
-          <a:xfrm>
-            <a:off x="6931152" y="4242816"/>
-            <a:ext cx="5001768" cy="457200"/>
-          </a:xfrm>
-          <a:prstGeom prst="rect">
-            <a:avLst/>
-          </a:prstGeom>
-          <a:noFill/>
-          <a:ln/>
-        </p:spPr>
-        <p:txBody>
-          <a:bodyPr wrap="square" rtlCol="0" anchor="ctr"/>
-          <a:lstStyle/>
-          <a:p>
-            <a:pPr indent="0" marL="0">
-              <a:buNone/>
-            </a:pPr>
-            <a:r>
-              <a:rPr lang="en-US" sz="1050" dirty="0">
+          <p:cNvPr id="30" name="Text 28"/>
+          <p:cNvSpPr/>
+          <p:nvPr/>
+        </p:nvSpPr>
+        <p:spPr>
+          <a:xfrm>
+            <a:off x="6931152" y="4489704"/>
+            <a:ext cx="5001768" cy="475488"/>
+          </a:xfrm>
+          <a:prstGeom prst="rect">
+            <a:avLst/>
+          </a:prstGeom>
+          <a:noFill/>
+          <a:ln/>
+        </p:spPr>
+        <p:txBody>
+          <a:bodyPr wrap="square" rtlCol="0" anchor="ctr"/>
+          <a:lstStyle/>
+          <a:p>
+            <a:pPr indent="0" marL="0">
+              <a:buNone/>
+            </a:pPr>
+            <a:r>
+              <a:rPr lang="en-US" sz="1100" dirty="0">
                 <a:solidFill>
                   <a:srgbClr val="F4F4F6"/>
                 </a:solidFill>
@@ -11424,104 +11342,15 @@
                 <a:ea typeface="Malgun Gothic" pitchFamily="34" charset="-122"/>
                 <a:cs typeface="Malgun Gothic" pitchFamily="34" charset="-120"/>
               </a:rPr>
-              <a:t>대규모 관리 시스템 0→1 구축 전 과정 경험</a:t>
-            </a:r>
-            <a:endParaRPr lang="en-US" sz="1050" dirty="0"/>
-          </a:p>
-        </p:txBody>
-      </p:sp>
-      <p:sp>
-        <p:nvSpPr>
-          <p:cNvPr id="30" name="Shape 27"/>
-          <p:cNvSpPr/>
-          <p:nvPr/>
-        </p:nvSpPr>
-        <p:spPr>
-          <a:xfrm>
-            <a:off x="6675120" y="4864608"/>
-            <a:ext cx="5349240" cy="566928"/>
-          </a:xfrm>
-          <a:prstGeom prst="rect">
-            <a:avLst/>
-          </a:prstGeom>
-          <a:solidFill>
-            <a:srgbClr val="111116"/>
-          </a:solidFill>
-          <a:ln w="12700">
-            <a:solidFill>
-              <a:srgbClr val="111116"/>
-            </a:solidFill>
-            <a:prstDash val="solid"/>
-          </a:ln>
-        </p:spPr>
-      </p:sp>
-      <p:sp>
-        <p:nvSpPr>
-          <p:cNvPr id="31" name="Shape 28"/>
-          <p:cNvSpPr/>
-          <p:nvPr/>
-        </p:nvSpPr>
-        <p:spPr>
-          <a:xfrm>
-            <a:off x="6675120" y="4864608"/>
-            <a:ext cx="64008" cy="566928"/>
-          </a:xfrm>
-          <a:prstGeom prst="rect">
-            <a:avLst/>
-          </a:prstGeom>
-          <a:solidFill>
-            <a:srgbClr val="34D399"/>
-          </a:solidFill>
-          <a:ln w="12700">
-            <a:solidFill>
-              <a:srgbClr val="34D399"/>
-            </a:solidFill>
-            <a:prstDash val="solid"/>
-          </a:ln>
-        </p:spPr>
-      </p:sp>
-      <p:sp>
-        <p:nvSpPr>
-          <p:cNvPr id="32" name="Text 29"/>
-          <p:cNvSpPr/>
-          <p:nvPr/>
-        </p:nvSpPr>
-        <p:spPr>
-          <a:xfrm>
-            <a:off x="6931152" y="4919472"/>
-            <a:ext cx="5001768" cy="457200"/>
-          </a:xfrm>
-          <a:prstGeom prst="rect">
-            <a:avLst/>
-          </a:prstGeom>
-          <a:noFill/>
-          <a:ln/>
-        </p:spPr>
-        <p:txBody>
-          <a:bodyPr wrap="square" rtlCol="0" anchor="ctr"/>
-          <a:lstStyle/>
-          <a:p>
-            <a:pPr indent="0" marL="0">
-              <a:buNone/>
-            </a:pPr>
-            <a:r>
-              <a:rPr lang="en-US" sz="1050" dirty="0">
-                <a:solidFill>
-                  <a:srgbClr val="F4F4F6"/>
-                </a:solidFill>
-                <a:latin typeface="Malgun Gothic" pitchFamily="34" charset="0"/>
-                <a:ea typeface="Malgun Gothic" pitchFamily="34" charset="-122"/>
-                <a:cs typeface="Malgun Gothic" pitchFamily="34" charset="-120"/>
-              </a:rPr>
               <a:t>운영자 피드백 기반 직관적 환경 완성</a:t>
             </a:r>
-            <a:endParaRPr lang="en-US" sz="1050" dirty="0"/>
-          </a:p>
-        </p:txBody>
-      </p:sp>
-      <p:sp>
-        <p:nvSpPr>
-          <p:cNvPr id="33" name="Shape 30"/>
+            <a:endParaRPr lang="en-US" sz="1100" dirty="0"/>
+          </a:p>
+        </p:txBody>
+      </p:sp>
+      <p:sp>
+        <p:nvSpPr>
+          <p:cNvPr id="31" name="Shape 29"/>
           <p:cNvSpPr/>
           <p:nvPr/>
         </p:nvSpPr>
@@ -11546,7 +11375,7 @@
       </p:sp>
       <p:sp>
         <p:nvSpPr>
-          <p:cNvPr id="34" name="Text 31"/>
+          <p:cNvPr id="32" name="Text 30"/>
           <p:cNvSpPr/>
           <p:nvPr/>
         </p:nvSpPr>
@@ -12315,7 +12144,7 @@
               <a:buNone/>
             </a:pPr>
             <a:r>
-              <a:rPr lang="en-US" sz="5200" b="1" dirty="0">
+              <a:rPr lang="en-US" sz="4600" b="1" dirty="0">
                 <a:solidFill>
                   <a:srgbClr val="818CF8"/>
                 </a:solidFill>
@@ -12325,7 +12154,7 @@
               </a:rPr>
               <a:t>30→1</a:t>
             </a:r>
-            <a:endParaRPr lang="en-US" sz="5200" dirty="0"/>
+            <a:endParaRPr lang="en-US" sz="4600" dirty="0"/>
           </a:p>
         </p:txBody>
       </p:sp>
@@ -13303,7 +13132,7 @@
               <a:buNone/>
             </a:pPr>
             <a:r>
-              <a:rPr lang="en-US" sz="5200" b="1" dirty="0">
+              <a:rPr lang="en-US" sz="4600" b="1" dirty="0">
                 <a:solidFill>
                   <a:srgbClr val="818CF8"/>
                 </a:solidFill>
@@ -13313,7 +13142,7 @@
               </a:rPr>
               <a:t>통합</a:t>
             </a:r>
-            <a:endParaRPr lang="en-US" sz="5200" dirty="0"/>
+            <a:endParaRPr lang="en-US" sz="4600" dirty="0"/>
           </a:p>
         </p:txBody>
       </p:sp>

--- a/apps/web/public/portfolio.pptx
+++ b/apps/web/public/portfolio.pptx
@@ -2053,7 +2053,7 @@
                 <a:ea typeface="Malgun Gothic" pitchFamily="34" charset="-122"/>
                 <a:cs typeface="Malgun Gothic" pitchFamily="34" charset="-120"/>
               </a:rPr>
-              <a:t>Frontend Developer  ·  5년차</a:t>
+              <a:t>Frontend Developer  ·  FE 3년차</a:t>
             </a:r>
             <a:endParaRPr lang="en-US" sz="1300" dirty="0"/>
           </a:p>
@@ -3553,16 +3553,62 @@
           </a:p>
         </p:txBody>
       </p:sp>
-      <p:sp>
-        <p:nvSpPr>
-          <p:cNvPr id="26" name="Shape 24"/>
-          <p:cNvSpPr/>
-          <p:nvPr/>
-        </p:nvSpPr>
-        <p:spPr>
-          <a:xfrm>
-            <a:off x="6675120" y="1298448"/>
-            <a:ext cx="5349240" cy="2231136"/>
+      <p:pic>
+        <p:nvPicPr>
+          <p:cNvPr id="26" name="Image 0" descr="/Users/jinwon/Desktop/jinwon-portfolio/apps/web/public/images/projects/smart-order-2.png">    </p:cNvPr>
+          <p:cNvPicPr>
+            <a:picLocks noChangeAspect="1"/>
+          </p:cNvPicPr>
+          <p:nvPr/>
+        </p:nvPicPr>
+        <p:blipFill>
+          <a:blip r:embed="rId1"/>
+          <a:stretch>
+            <a:fillRect/>
+          </a:stretch>
+        </p:blipFill>
+        <p:spPr>
+          <a:xfrm>
+            <a:off x="7712964" y="1298448"/>
+            <a:ext cx="3273552" cy="1828800"/>
+          </a:xfrm>
+          <a:prstGeom prst="rect">
+            <a:avLst/>
+          </a:prstGeom>
+        </p:spPr>
+      </p:pic>
+      <p:sp>
+        <p:nvSpPr>
+          <p:cNvPr id="27" name="Shape 24"/>
+          <p:cNvSpPr/>
+          <p:nvPr/>
+        </p:nvSpPr>
+        <p:spPr>
+          <a:xfrm>
+            <a:off x="7712964" y="1298448"/>
+            <a:ext cx="3273552" cy="1828800"/>
+          </a:xfrm>
+          <a:prstGeom prst="rect">
+            <a:avLst/>
+          </a:prstGeom>
+          <a:ln w="12700">
+            <a:solidFill>
+              <a:srgbClr val="1C1C27"/>
+            </a:solidFill>
+            <a:prstDash val="solid"/>
+          </a:ln>
+        </p:spPr>
+      </p:sp>
+      <p:sp>
+        <p:nvSpPr>
+          <p:cNvPr id="28" name="Shape 25"/>
+          <p:cNvSpPr/>
+          <p:nvPr/>
+        </p:nvSpPr>
+        <p:spPr>
+          <a:xfrm>
+            <a:off x="6675120" y="3236976"/>
+            <a:ext cx="5349240" cy="1078992"/>
           </a:xfrm>
           <a:prstGeom prst="rect">
             <a:avLst/>
@@ -3580,14 +3626,14 @@
       </p:sp>
       <p:sp>
         <p:nvSpPr>
-          <p:cNvPr id="27" name="Shape 25"/>
-          <p:cNvSpPr/>
-          <p:nvPr/>
-        </p:nvSpPr>
-        <p:spPr>
-          <a:xfrm>
-            <a:off x="6675120" y="1298448"/>
-            <a:ext cx="64008" cy="2231136"/>
+          <p:cNvPr id="29" name="Shape 26"/>
+          <p:cNvSpPr/>
+          <p:nvPr/>
+        </p:nvSpPr>
+        <p:spPr>
+          <a:xfrm>
+            <a:off x="6675120" y="3236976"/>
+            <a:ext cx="64008" cy="1078992"/>
           </a:xfrm>
           <a:prstGeom prst="rect">
             <a:avLst/>
@@ -3605,14 +3651,14 @@
       </p:sp>
       <p:sp>
         <p:nvSpPr>
-          <p:cNvPr id="28" name="Text 26"/>
-          <p:cNvSpPr/>
-          <p:nvPr/>
-        </p:nvSpPr>
-        <p:spPr>
-          <a:xfrm>
-            <a:off x="6931152" y="1463040"/>
-            <a:ext cx="5001768" cy="1188720"/>
+          <p:cNvPr id="30" name="Text 27"/>
+          <p:cNvSpPr/>
+          <p:nvPr/>
+        </p:nvSpPr>
+        <p:spPr>
+          <a:xfrm>
+            <a:off x="6931152" y="3310128"/>
+            <a:ext cx="5001768" cy="658368"/>
           </a:xfrm>
           <a:prstGeom prst="rect">
             <a:avLst/>
@@ -3628,7 +3674,7 @@
               <a:buNone/>
             </a:pPr>
             <a:r>
-              <a:rPr lang="en-US" sz="4600" b="1" dirty="0">
+              <a:rPr lang="en-US" sz="3800" b="1" dirty="0">
                 <a:solidFill>
                   <a:srgbClr val="818CF8"/>
                 </a:solidFill>
@@ -3638,20 +3684,20 @@
               </a:rPr>
               <a:t>개선</a:t>
             </a:r>
-            <a:endParaRPr lang="en-US" sz="4600" dirty="0"/>
-          </a:p>
-        </p:txBody>
-      </p:sp>
-      <p:sp>
-        <p:nvSpPr>
-          <p:cNvPr id="29" name="Text 27"/>
-          <p:cNvSpPr/>
-          <p:nvPr/>
-        </p:nvSpPr>
-        <p:spPr>
-          <a:xfrm>
-            <a:off x="6931152" y="2651760"/>
-            <a:ext cx="5001768" cy="329184"/>
+            <a:endParaRPr lang="en-US" sz="3800" dirty="0"/>
+          </a:p>
+        </p:txBody>
+      </p:sp>
+      <p:sp>
+        <p:nvSpPr>
+          <p:cNvPr id="31" name="Text 28"/>
+          <p:cNvSpPr/>
+          <p:nvPr/>
+        </p:nvSpPr>
+        <p:spPr>
+          <a:xfrm>
+            <a:off x="6931152" y="4059936"/>
+            <a:ext cx="5001768" cy="219456"/>
           </a:xfrm>
           <a:prstGeom prst="rect">
             <a:avLst/>
@@ -3667,7 +3713,7 @@
               <a:buNone/>
             </a:pPr>
             <a:r>
-              <a:rPr lang="en-US" sz="1100" dirty="0">
+              <a:rPr lang="en-US" sz="1000" dirty="0">
                 <a:solidFill>
                   <a:srgbClr val="8E8E9A"/>
                 </a:solidFill>
@@ -3677,20 +3723,20 @@
               </a:rPr>
               <a:t>매출 보고 UI 및 사용성 향상</a:t>
             </a:r>
-            <a:endParaRPr lang="en-US" sz="1100" dirty="0"/>
-          </a:p>
-        </p:txBody>
-      </p:sp>
-      <p:sp>
-        <p:nvSpPr>
-          <p:cNvPr id="30" name="Shape 28"/>
-          <p:cNvSpPr/>
-          <p:nvPr/>
-        </p:nvSpPr>
-        <p:spPr>
-          <a:xfrm>
-            <a:off x="6675120" y="3712464"/>
-            <a:ext cx="5349240" cy="594360"/>
+            <a:endParaRPr lang="en-US" sz="1000" dirty="0"/>
+          </a:p>
+        </p:txBody>
+      </p:sp>
+      <p:sp>
+        <p:nvSpPr>
+          <p:cNvPr id="32" name="Shape 29"/>
+          <p:cNvSpPr/>
+          <p:nvPr/>
+        </p:nvSpPr>
+        <p:spPr>
+          <a:xfrm>
+            <a:off x="6675120" y="4407408"/>
+            <a:ext cx="5349240" cy="566928"/>
           </a:xfrm>
           <a:prstGeom prst="rect">
             <a:avLst/>
@@ -3708,14 +3754,14 @@
       </p:sp>
       <p:sp>
         <p:nvSpPr>
-          <p:cNvPr id="31" name="Shape 29"/>
-          <p:cNvSpPr/>
-          <p:nvPr/>
-        </p:nvSpPr>
-        <p:spPr>
-          <a:xfrm>
-            <a:off x="6675120" y="3712464"/>
-            <a:ext cx="64008" cy="594360"/>
+          <p:cNvPr id="33" name="Shape 30"/>
+          <p:cNvSpPr/>
+          <p:nvPr/>
+        </p:nvSpPr>
+        <p:spPr>
+          <a:xfrm>
+            <a:off x="6675120" y="4407408"/>
+            <a:ext cx="64008" cy="566928"/>
           </a:xfrm>
           <a:prstGeom prst="rect">
             <a:avLst/>
@@ -3733,30 +3779,30 @@
       </p:sp>
       <p:sp>
         <p:nvSpPr>
-          <p:cNvPr id="32" name="Text 30"/>
-          <p:cNvSpPr/>
-          <p:nvPr/>
-        </p:nvSpPr>
-        <p:spPr>
-          <a:xfrm>
-            <a:off x="6931152" y="3776472"/>
-            <a:ext cx="5001768" cy="475488"/>
-          </a:xfrm>
-          <a:prstGeom prst="rect">
-            <a:avLst/>
-          </a:prstGeom>
-          <a:noFill/>
-          <a:ln/>
-        </p:spPr>
-        <p:txBody>
-          <a:bodyPr wrap="square" rtlCol="0" anchor="ctr"/>
-          <a:lstStyle/>
-          <a:p>
-            <a:pPr indent="0" marL="0">
-              <a:buNone/>
-            </a:pPr>
-            <a:r>
-              <a:rPr lang="en-US" sz="1100" dirty="0">
+          <p:cNvPr id="34" name="Text 31"/>
+          <p:cNvSpPr/>
+          <p:nvPr/>
+        </p:nvSpPr>
+        <p:spPr>
+          <a:xfrm>
+            <a:off x="6931152" y="4462272"/>
+            <a:ext cx="5001768" cy="457200"/>
+          </a:xfrm>
+          <a:prstGeom prst="rect">
+            <a:avLst/>
+          </a:prstGeom>
+          <a:noFill/>
+          <a:ln/>
+        </p:spPr>
+        <p:txBody>
+          <a:bodyPr wrap="square" rtlCol="0" anchor="ctr"/>
+          <a:lstStyle/>
+          <a:p>
+            <a:pPr indent="0" marL="0">
+              <a:buNone/>
+            </a:pPr>
+            <a:r>
+              <a:rPr lang="en-US" sz="1050" dirty="0">
                 <a:solidFill>
                   <a:srgbClr val="F4F4F6"/>
                 </a:solidFill>
@@ -3766,20 +3812,20 @@
               </a:rPr>
               <a:t>월별/주별 매출 보고 UI 개선</a:t>
             </a:r>
-            <a:endParaRPr lang="en-US" sz="1100" dirty="0"/>
-          </a:p>
-        </p:txBody>
-      </p:sp>
-      <p:sp>
-        <p:nvSpPr>
-          <p:cNvPr id="33" name="Shape 31"/>
-          <p:cNvSpPr/>
-          <p:nvPr/>
-        </p:nvSpPr>
-        <p:spPr>
-          <a:xfrm>
-            <a:off x="6675120" y="4425696"/>
-            <a:ext cx="5349240" cy="594360"/>
+            <a:endParaRPr lang="en-US" sz="1050" dirty="0"/>
+          </a:p>
+        </p:txBody>
+      </p:sp>
+      <p:sp>
+        <p:nvSpPr>
+          <p:cNvPr id="35" name="Shape 32"/>
+          <p:cNvSpPr/>
+          <p:nvPr/>
+        </p:nvSpPr>
+        <p:spPr>
+          <a:xfrm>
+            <a:off x="6675120" y="5065776"/>
+            <a:ext cx="5349240" cy="566928"/>
           </a:xfrm>
           <a:prstGeom prst="rect">
             <a:avLst/>
@@ -3797,14 +3843,14 @@
       </p:sp>
       <p:sp>
         <p:nvSpPr>
-          <p:cNvPr id="34" name="Shape 32"/>
-          <p:cNvSpPr/>
-          <p:nvPr/>
-        </p:nvSpPr>
-        <p:spPr>
-          <a:xfrm>
-            <a:off x="6675120" y="4425696"/>
-            <a:ext cx="64008" cy="594360"/>
+          <p:cNvPr id="36" name="Shape 33"/>
+          <p:cNvSpPr/>
+          <p:nvPr/>
+        </p:nvSpPr>
+        <p:spPr>
+          <a:xfrm>
+            <a:off x="6675120" y="5065776"/>
+            <a:ext cx="64008" cy="566928"/>
           </a:xfrm>
           <a:prstGeom prst="rect">
             <a:avLst/>
@@ -3822,30 +3868,30 @@
       </p:sp>
       <p:sp>
         <p:nvSpPr>
-          <p:cNvPr id="35" name="Text 33"/>
-          <p:cNvSpPr/>
-          <p:nvPr/>
-        </p:nvSpPr>
-        <p:spPr>
-          <a:xfrm>
-            <a:off x="6931152" y="4489704"/>
-            <a:ext cx="5001768" cy="475488"/>
-          </a:xfrm>
-          <a:prstGeom prst="rect">
-            <a:avLst/>
-          </a:prstGeom>
-          <a:noFill/>
-          <a:ln/>
-        </p:spPr>
-        <p:txBody>
-          <a:bodyPr wrap="square" rtlCol="0" anchor="ctr"/>
-          <a:lstStyle/>
-          <a:p>
-            <a:pPr indent="0" marL="0">
-              <a:buNone/>
-            </a:pPr>
-            <a:r>
-              <a:rPr lang="en-US" sz="1100" dirty="0">
+          <p:cNvPr id="37" name="Text 34"/>
+          <p:cNvSpPr/>
+          <p:nvPr/>
+        </p:nvSpPr>
+        <p:spPr>
+          <a:xfrm>
+            <a:off x="6931152" y="5120640"/>
+            <a:ext cx="5001768" cy="457200"/>
+          </a:xfrm>
+          <a:prstGeom prst="rect">
+            <a:avLst/>
+          </a:prstGeom>
+          <a:noFill/>
+          <a:ln/>
+        </p:spPr>
+        <p:txBody>
+          <a:bodyPr wrap="square" rtlCol="0" anchor="ctr"/>
+          <a:lstStyle/>
+          <a:p>
+            <a:pPr indent="0" marL="0">
+              <a:buNone/>
+            </a:pPr>
+            <a:r>
+              <a:rPr lang="en-US" sz="1050" dirty="0">
                 <a:solidFill>
                   <a:srgbClr val="F4F4F6"/>
                 </a:solidFill>
@@ -3855,13 +3901,13 @@
               </a:rPr>
               <a:t>주문 및 결제 기반 서비스 운영 환경 경험</a:t>
             </a:r>
-            <a:endParaRPr lang="en-US" sz="1100" dirty="0"/>
-          </a:p>
-        </p:txBody>
-      </p:sp>
-      <p:sp>
-        <p:nvSpPr>
-          <p:cNvPr id="36" name="Shape 34"/>
+            <a:endParaRPr lang="en-US" sz="1050" dirty="0"/>
+          </a:p>
+        </p:txBody>
+      </p:sp>
+      <p:sp>
+        <p:nvSpPr>
+          <p:cNvPr id="38" name="Shape 35"/>
           <p:cNvSpPr/>
           <p:nvPr/>
         </p:nvSpPr>
@@ -3886,7 +3932,7 @@
       </p:sp>
       <p:sp>
         <p:nvSpPr>
-          <p:cNvPr id="37" name="Text 35"/>
+          <p:cNvPr id="39" name="Text 36"/>
           <p:cNvSpPr/>
           <p:nvPr/>
         </p:nvSpPr>
@@ -5157,7 +5203,7 @@
                 <a:ea typeface="Malgun Gothic" pitchFamily="34" charset="-122"/>
                 <a:cs typeface="Malgun Gothic" pitchFamily="34" charset="-120"/>
               </a:rPr>
-              <a:t>Frontend Developer  ·  5년차</a:t>
+              <a:t>Frontend Developer  ·  FE 3년차</a:t>
             </a:r>
             <a:endParaRPr lang="en-US" sz="1300" dirty="0"/>
           </a:p>
@@ -8790,16 +8836,62 @@
           </a:p>
         </p:txBody>
       </p:sp>
-      <p:sp>
-        <p:nvSpPr>
-          <p:cNvPr id="21" name="Shape 19"/>
-          <p:cNvSpPr/>
-          <p:nvPr/>
-        </p:nvSpPr>
-        <p:spPr>
-          <a:xfrm>
-            <a:off x="6675120" y="1298448"/>
-            <a:ext cx="5349240" cy="2231136"/>
+      <p:pic>
+        <p:nvPicPr>
+          <p:cNvPr id="21" name="Image 0" descr="/Users/jinwon/Desktop/jinwon-portfolio/apps/web/public/images/projects/bbi-1.png">    </p:cNvPr>
+          <p:cNvPicPr>
+            <a:picLocks noChangeAspect="1"/>
+          </p:cNvPicPr>
+          <p:nvPr/>
+        </p:nvPicPr>
+        <p:blipFill>
+          <a:blip r:embed="rId1"/>
+          <a:stretch>
+            <a:fillRect/>
+          </a:stretch>
+        </p:blipFill>
+        <p:spPr>
+          <a:xfrm>
+            <a:off x="8781898" y="1298448"/>
+            <a:ext cx="1135685" cy="2468880"/>
+          </a:xfrm>
+          <a:prstGeom prst="rect">
+            <a:avLst/>
+          </a:prstGeom>
+        </p:spPr>
+      </p:pic>
+      <p:sp>
+        <p:nvSpPr>
+          <p:cNvPr id="22" name="Shape 19"/>
+          <p:cNvSpPr/>
+          <p:nvPr/>
+        </p:nvSpPr>
+        <p:spPr>
+          <a:xfrm>
+            <a:off x="8781898" y="1298448"/>
+            <a:ext cx="1135685" cy="2468880"/>
+          </a:xfrm>
+          <a:prstGeom prst="rect">
+            <a:avLst/>
+          </a:prstGeom>
+          <a:ln w="12700">
+            <a:solidFill>
+              <a:srgbClr val="1C1C27"/>
+            </a:solidFill>
+            <a:prstDash val="solid"/>
+          </a:ln>
+        </p:spPr>
+      </p:sp>
+      <p:sp>
+        <p:nvSpPr>
+          <p:cNvPr id="23" name="Shape 20"/>
+          <p:cNvSpPr/>
+          <p:nvPr/>
+        </p:nvSpPr>
+        <p:spPr>
+          <a:xfrm>
+            <a:off x="6675120" y="3877056"/>
+            <a:ext cx="5349240" cy="1078992"/>
           </a:xfrm>
           <a:prstGeom prst="rect">
             <a:avLst/>
@@ -8817,14 +8909,14 @@
       </p:sp>
       <p:sp>
         <p:nvSpPr>
-          <p:cNvPr id="22" name="Shape 20"/>
-          <p:cNvSpPr/>
-          <p:nvPr/>
-        </p:nvSpPr>
-        <p:spPr>
-          <a:xfrm>
-            <a:off x="6675120" y="1298448"/>
-            <a:ext cx="64008" cy="2231136"/>
+          <p:cNvPr id="24" name="Shape 21"/>
+          <p:cNvSpPr/>
+          <p:nvPr/>
+        </p:nvSpPr>
+        <p:spPr>
+          <a:xfrm>
+            <a:off x="6675120" y="3877056"/>
+            <a:ext cx="64008" cy="1078992"/>
           </a:xfrm>
           <a:prstGeom prst="rect">
             <a:avLst/>
@@ -8842,14 +8934,14 @@
       </p:sp>
       <p:sp>
         <p:nvSpPr>
-          <p:cNvPr id="23" name="Text 21"/>
-          <p:cNvSpPr/>
-          <p:nvPr/>
-        </p:nvSpPr>
-        <p:spPr>
-          <a:xfrm>
-            <a:off x="6931152" y="1463040"/>
-            <a:ext cx="5001768" cy="1188720"/>
+          <p:cNvPr id="25" name="Text 22"/>
+          <p:cNvSpPr/>
+          <p:nvPr/>
+        </p:nvSpPr>
+        <p:spPr>
+          <a:xfrm>
+            <a:off x="6931152" y="3950208"/>
+            <a:ext cx="5001768" cy="658368"/>
           </a:xfrm>
           <a:prstGeom prst="rect">
             <a:avLst/>
@@ -8865,7 +8957,7 @@
               <a:buNone/>
             </a:pPr>
             <a:r>
-              <a:rPr lang="en-US" sz="4600" b="1" dirty="0">
+              <a:rPr lang="en-US" sz="3800" b="1" dirty="0">
                 <a:solidFill>
                   <a:srgbClr val="818CF8"/>
                 </a:solidFill>
@@ -8875,20 +8967,20 @@
               </a:rPr>
               <a:t>정식 출시</a:t>
             </a:r>
-            <a:endParaRPr lang="en-US" sz="4600" dirty="0"/>
-          </a:p>
-        </p:txBody>
-      </p:sp>
-      <p:sp>
-        <p:nvSpPr>
-          <p:cNvPr id="24" name="Text 22"/>
-          <p:cNvSpPr/>
-          <p:nvPr/>
-        </p:nvSpPr>
-        <p:spPr>
-          <a:xfrm>
-            <a:off x="6931152" y="2651760"/>
-            <a:ext cx="5001768" cy="329184"/>
+            <a:endParaRPr lang="en-US" sz="3800" dirty="0"/>
+          </a:p>
+        </p:txBody>
+      </p:sp>
+      <p:sp>
+        <p:nvSpPr>
+          <p:cNvPr id="26" name="Text 23"/>
+          <p:cNvSpPr/>
+          <p:nvPr/>
+        </p:nvSpPr>
+        <p:spPr>
+          <a:xfrm>
+            <a:off x="6931152" y="4700016"/>
+            <a:ext cx="5001768" cy="219456"/>
           </a:xfrm>
           <a:prstGeom prst="rect">
             <a:avLst/>
@@ -8904,7 +8996,7 @@
               <a:buNone/>
             </a:pPr>
             <a:r>
-              <a:rPr lang="en-US" sz="1100" dirty="0">
+              <a:rPr lang="en-US" sz="1000" dirty="0">
                 <a:solidFill>
                   <a:srgbClr val="8E8E9A"/>
                 </a:solidFill>
@@ -8914,20 +9006,20 @@
               </a:rPr>
               <a:t>앱스토어 · 플레이스토어 동시 론칭</a:t>
             </a:r>
-            <a:endParaRPr lang="en-US" sz="1100" dirty="0"/>
-          </a:p>
-        </p:txBody>
-      </p:sp>
-      <p:sp>
-        <p:nvSpPr>
-          <p:cNvPr id="25" name="Shape 23"/>
-          <p:cNvSpPr/>
-          <p:nvPr/>
-        </p:nvSpPr>
-        <p:spPr>
-          <a:xfrm>
-            <a:off x="6675120" y="3712464"/>
-            <a:ext cx="5349240" cy="594360"/>
+            <a:endParaRPr lang="en-US" sz="1000" dirty="0"/>
+          </a:p>
+        </p:txBody>
+      </p:sp>
+      <p:sp>
+        <p:nvSpPr>
+          <p:cNvPr id="27" name="Shape 24"/>
+          <p:cNvSpPr/>
+          <p:nvPr/>
+        </p:nvSpPr>
+        <p:spPr>
+          <a:xfrm>
+            <a:off x="6675120" y="5047488"/>
+            <a:ext cx="5349240" cy="566928"/>
           </a:xfrm>
           <a:prstGeom prst="rect">
             <a:avLst/>
@@ -8945,14 +9037,14 @@
       </p:sp>
       <p:sp>
         <p:nvSpPr>
-          <p:cNvPr id="26" name="Shape 24"/>
-          <p:cNvSpPr/>
-          <p:nvPr/>
-        </p:nvSpPr>
-        <p:spPr>
-          <a:xfrm>
-            <a:off x="6675120" y="3712464"/>
-            <a:ext cx="64008" cy="594360"/>
+          <p:cNvPr id="28" name="Shape 25"/>
+          <p:cNvSpPr/>
+          <p:nvPr/>
+        </p:nvSpPr>
+        <p:spPr>
+          <a:xfrm>
+            <a:off x="6675120" y="5047488"/>
+            <a:ext cx="64008" cy="566928"/>
           </a:xfrm>
           <a:prstGeom prst="rect">
             <a:avLst/>
@@ -8970,30 +9062,30 @@
       </p:sp>
       <p:sp>
         <p:nvSpPr>
-          <p:cNvPr id="27" name="Text 25"/>
-          <p:cNvSpPr/>
-          <p:nvPr/>
-        </p:nvSpPr>
-        <p:spPr>
-          <a:xfrm>
-            <a:off x="6931152" y="3776472"/>
-            <a:ext cx="5001768" cy="475488"/>
-          </a:xfrm>
-          <a:prstGeom prst="rect">
-            <a:avLst/>
-          </a:prstGeom>
-          <a:noFill/>
-          <a:ln/>
-        </p:spPr>
-        <p:txBody>
-          <a:bodyPr wrap="square" rtlCol="0" anchor="ctr"/>
-          <a:lstStyle/>
-          <a:p>
-            <a:pPr indent="0" marL="0">
-              <a:buNone/>
-            </a:pPr>
-            <a:r>
-              <a:rPr lang="en-US" sz="1100" dirty="0">
+          <p:cNvPr id="29" name="Text 26"/>
+          <p:cNvSpPr/>
+          <p:nvPr/>
+        </p:nvSpPr>
+        <p:spPr>
+          <a:xfrm>
+            <a:off x="6931152" y="5102352"/>
+            <a:ext cx="5001768" cy="457200"/>
+          </a:xfrm>
+          <a:prstGeom prst="rect">
+            <a:avLst/>
+          </a:prstGeom>
+          <a:noFill/>
+          <a:ln/>
+        </p:spPr>
+        <p:txBody>
+          <a:bodyPr wrap="square" rtlCol="0" anchor="ctr"/>
+          <a:lstStyle/>
+          <a:p>
+            <a:pPr indent="0" marL="0">
+              <a:buNone/>
+            </a:pPr>
+            <a:r>
+              <a:rPr lang="en-US" sz="1050" dirty="0">
                 <a:solidFill>
                   <a:srgbClr val="F4F4F6"/>
                 </a:solidFill>
@@ -9003,20 +9095,20 @@
               </a:rPr>
               <a:t>하이브리드 구조로 콘텐츠 업데이트 시 앱 재배포 없이 즉시 반영</a:t>
             </a:r>
-            <a:endParaRPr lang="en-US" sz="1100" dirty="0"/>
-          </a:p>
-        </p:txBody>
-      </p:sp>
-      <p:sp>
-        <p:nvSpPr>
-          <p:cNvPr id="28" name="Shape 26"/>
-          <p:cNvSpPr/>
-          <p:nvPr/>
-        </p:nvSpPr>
-        <p:spPr>
-          <a:xfrm>
-            <a:off x="6675120" y="4425696"/>
-            <a:ext cx="5349240" cy="594360"/>
+            <a:endParaRPr lang="en-US" sz="1050" dirty="0"/>
+          </a:p>
+        </p:txBody>
+      </p:sp>
+      <p:sp>
+        <p:nvSpPr>
+          <p:cNvPr id="30" name="Shape 27"/>
+          <p:cNvSpPr/>
+          <p:nvPr/>
+        </p:nvSpPr>
+        <p:spPr>
+          <a:xfrm>
+            <a:off x="6675120" y="5705856"/>
+            <a:ext cx="5349240" cy="566928"/>
           </a:xfrm>
           <a:prstGeom prst="rect">
             <a:avLst/>
@@ -9034,14 +9126,14 @@
       </p:sp>
       <p:sp>
         <p:nvSpPr>
-          <p:cNvPr id="29" name="Shape 27"/>
-          <p:cNvSpPr/>
-          <p:nvPr/>
-        </p:nvSpPr>
-        <p:spPr>
-          <a:xfrm>
-            <a:off x="6675120" y="4425696"/>
-            <a:ext cx="64008" cy="594360"/>
+          <p:cNvPr id="31" name="Shape 28"/>
+          <p:cNvSpPr/>
+          <p:nvPr/>
+        </p:nvSpPr>
+        <p:spPr>
+          <a:xfrm>
+            <a:off x="6675120" y="5705856"/>
+            <a:ext cx="64008" cy="566928"/>
           </a:xfrm>
           <a:prstGeom prst="rect">
             <a:avLst/>
@@ -9059,30 +9151,30 @@
       </p:sp>
       <p:sp>
         <p:nvSpPr>
-          <p:cNvPr id="30" name="Text 28"/>
-          <p:cNvSpPr/>
-          <p:nvPr/>
-        </p:nvSpPr>
-        <p:spPr>
-          <a:xfrm>
-            <a:off x="6931152" y="4489704"/>
-            <a:ext cx="5001768" cy="475488"/>
-          </a:xfrm>
-          <a:prstGeom prst="rect">
-            <a:avLst/>
-          </a:prstGeom>
-          <a:noFill/>
-          <a:ln/>
-        </p:spPr>
-        <p:txBody>
-          <a:bodyPr wrap="square" rtlCol="0" anchor="ctr"/>
-          <a:lstStyle/>
-          <a:p>
-            <a:pPr indent="0" marL="0">
-              <a:buNone/>
-            </a:pPr>
-            <a:r>
-              <a:rPr lang="en-US" sz="1100" dirty="0">
+          <p:cNvPr id="32" name="Text 29"/>
+          <p:cNvSpPr/>
+          <p:nvPr/>
+        </p:nvSpPr>
+        <p:spPr>
+          <a:xfrm>
+            <a:off x="6931152" y="5760720"/>
+            <a:ext cx="5001768" cy="457200"/>
+          </a:xfrm>
+          <a:prstGeom prst="rect">
+            <a:avLst/>
+          </a:prstGeom>
+          <a:noFill/>
+          <a:ln/>
+        </p:spPr>
+        <p:txBody>
+          <a:bodyPr wrap="square" rtlCol="0" anchor="ctr"/>
+          <a:lstStyle/>
+          <a:p>
+            <a:pPr indent="0" marL="0">
+              <a:buNone/>
+            </a:pPr>
+            <a:r>
+              <a:rPr lang="en-US" sz="1050" dirty="0">
                 <a:solidFill>
                   <a:srgbClr val="F4F4F6"/>
                 </a:solidFill>
@@ -9092,13 +9184,13 @@
               </a:rPr>
               <a:t>앱스토어·플레이스토어 동시 정식 출시 달성</a:t>
             </a:r>
-            <a:endParaRPr lang="en-US" sz="1100" dirty="0"/>
-          </a:p>
-        </p:txBody>
-      </p:sp>
-      <p:sp>
-        <p:nvSpPr>
-          <p:cNvPr id="31" name="Shape 29"/>
+            <a:endParaRPr lang="en-US" sz="1050" dirty="0"/>
+          </a:p>
+        </p:txBody>
+      </p:sp>
+      <p:sp>
+        <p:nvSpPr>
+          <p:cNvPr id="33" name="Shape 30"/>
           <p:cNvSpPr/>
           <p:nvPr/>
         </p:nvSpPr>
@@ -9123,7 +9215,7 @@
       </p:sp>
       <p:sp>
         <p:nvSpPr>
-          <p:cNvPr id="32" name="Text 30"/>
+          <p:cNvPr id="34" name="Text 31"/>
           <p:cNvSpPr/>
           <p:nvPr/>
         </p:nvSpPr>
@@ -9998,16 +10090,62 @@
           </a:p>
         </p:txBody>
       </p:sp>
-      <p:sp>
-        <p:nvSpPr>
-          <p:cNvPr id="26" name="Shape 24"/>
-          <p:cNvSpPr/>
-          <p:nvPr/>
-        </p:nvSpPr>
-        <p:spPr>
-          <a:xfrm>
-            <a:off x="6675120" y="1298448"/>
-            <a:ext cx="5349240" cy="2231136"/>
+      <p:pic>
+        <p:nvPicPr>
+          <p:cNvPr id="26" name="Image 0" descr="/Users/jinwon/Desktop/jinwon-portfolio/apps/web/public/images/projects/web015-3.png">    </p:cNvPr>
+          <p:cNvPicPr>
+            <a:picLocks noChangeAspect="1"/>
+          </p:cNvPicPr>
+          <p:nvPr/>
+        </p:nvPicPr>
+        <p:blipFill>
+          <a:blip r:embed="rId1"/>
+          <a:stretch>
+            <a:fillRect/>
+          </a:stretch>
+        </p:blipFill>
+        <p:spPr>
+          <a:xfrm>
+            <a:off x="7712964" y="1298448"/>
+            <a:ext cx="3273552" cy="1828800"/>
+          </a:xfrm>
+          <a:prstGeom prst="rect">
+            <a:avLst/>
+          </a:prstGeom>
+        </p:spPr>
+      </p:pic>
+      <p:sp>
+        <p:nvSpPr>
+          <p:cNvPr id="27" name="Shape 24"/>
+          <p:cNvSpPr/>
+          <p:nvPr/>
+        </p:nvSpPr>
+        <p:spPr>
+          <a:xfrm>
+            <a:off x="7712964" y="1298448"/>
+            <a:ext cx="3273552" cy="1828800"/>
+          </a:xfrm>
+          <a:prstGeom prst="rect">
+            <a:avLst/>
+          </a:prstGeom>
+          <a:ln w="12700">
+            <a:solidFill>
+              <a:srgbClr val="1C1C27"/>
+            </a:solidFill>
+            <a:prstDash val="solid"/>
+          </a:ln>
+        </p:spPr>
+      </p:sp>
+      <p:sp>
+        <p:nvSpPr>
+          <p:cNvPr id="28" name="Shape 25"/>
+          <p:cNvSpPr/>
+          <p:nvPr/>
+        </p:nvSpPr>
+        <p:spPr>
+          <a:xfrm>
+            <a:off x="6675120" y="3236976"/>
+            <a:ext cx="5349240" cy="1078992"/>
           </a:xfrm>
           <a:prstGeom prst="rect">
             <a:avLst/>
@@ -10025,14 +10163,14 @@
       </p:sp>
       <p:sp>
         <p:nvSpPr>
-          <p:cNvPr id="27" name="Shape 25"/>
-          <p:cNvSpPr/>
-          <p:nvPr/>
-        </p:nvSpPr>
-        <p:spPr>
-          <a:xfrm>
-            <a:off x="6675120" y="1298448"/>
-            <a:ext cx="64008" cy="2231136"/>
+          <p:cNvPr id="29" name="Shape 26"/>
+          <p:cNvSpPr/>
+          <p:nvPr/>
+        </p:nvSpPr>
+        <p:spPr>
+          <a:xfrm>
+            <a:off x="6675120" y="3236976"/>
+            <a:ext cx="64008" cy="1078992"/>
           </a:xfrm>
           <a:prstGeom prst="rect">
             <a:avLst/>
@@ -10050,14 +10188,14 @@
       </p:sp>
       <p:sp>
         <p:nvSpPr>
-          <p:cNvPr id="28" name="Text 26"/>
-          <p:cNvSpPr/>
-          <p:nvPr/>
-        </p:nvSpPr>
-        <p:spPr>
-          <a:xfrm>
-            <a:off x="6931152" y="1463040"/>
-            <a:ext cx="5001768" cy="1188720"/>
+          <p:cNvPr id="30" name="Text 27"/>
+          <p:cNvSpPr/>
+          <p:nvPr/>
+        </p:nvSpPr>
+        <p:spPr>
+          <a:xfrm>
+            <a:off x="6931152" y="3310128"/>
+            <a:ext cx="5001768" cy="658368"/>
           </a:xfrm>
           <a:prstGeom prst="rect">
             <a:avLst/>
@@ -10073,7 +10211,7 @@
               <a:buNone/>
             </a:pPr>
             <a:r>
-              <a:rPr lang="en-US" sz="4600" b="1" dirty="0">
+              <a:rPr lang="en-US" sz="3800" b="1" dirty="0">
                 <a:solidFill>
                   <a:srgbClr val="818CF8"/>
                 </a:solidFill>
@@ -10081,55 +10219,38 @@
                 <a:ea typeface="Malgun Gothic" pitchFamily="34" charset="-122"/>
                 <a:cs typeface="Malgun Gothic" pitchFamily="34" charset="-120"/>
               </a:rPr>
-              <a:t>exports</a:t>
-            </a:r>
-            <a:endParaRPr lang="en-US" sz="4600" dirty="0"/>
-          </a:p>
+              <a:t>297개</a:t>
+            </a:r>
+            <a:endParaRPr lang="en-US" sz="3800" dirty="0"/>
+          </a:p>
+        </p:txBody>
+      </p:sp>
+      <p:sp>
+        <p:nvSpPr>
+          <p:cNvPr id="31" name="Text 28"/>
+          <p:cNvSpPr/>
+          <p:nvPr/>
+        </p:nvSpPr>
+        <p:spPr>
+          <a:xfrm>
+            <a:off x="6931152" y="4059936"/>
+            <a:ext cx="5001768" cy="219456"/>
+          </a:xfrm>
+          <a:prstGeom prst="rect">
+            <a:avLst/>
+          </a:prstGeom>
+          <a:noFill/>
+          <a:ln/>
+        </p:spPr>
+        <p:txBody>
+          <a:bodyPr wrap="square" rtlCol="0" anchor="ctr"/>
+          <a:lstStyle/>
           <a:p>
             <a:pPr algn="ctr" indent="0" marL="0">
               <a:buNone/>
             </a:pPr>
             <a:r>
-              <a:rPr lang="en-US" sz="4600" b="1" dirty="0">
-                <a:solidFill>
-                  <a:srgbClr val="818CF8"/>
-                </a:solidFill>
-                <a:latin typeface="Malgun Gothic" pitchFamily="34" charset="0"/>
-                <a:ea typeface="Malgun Gothic" pitchFamily="34" charset="-122"/>
-                <a:cs typeface="Malgun Gothic" pitchFamily="34" charset="-120"/>
-              </a:rPr>
-              <a:t>182→0</a:t>
-            </a:r>
-            <a:endParaRPr lang="en-US" sz="4600" dirty="0"/>
-          </a:p>
-        </p:txBody>
-      </p:sp>
-      <p:sp>
-        <p:nvSpPr>
-          <p:cNvPr id="29" name="Text 27"/>
-          <p:cNvSpPr/>
-          <p:nvPr/>
-        </p:nvSpPr>
-        <p:spPr>
-          <a:xfrm>
-            <a:off x="6931152" y="2651760"/>
-            <a:ext cx="5001768" cy="329184"/>
-          </a:xfrm>
-          <a:prstGeom prst="rect">
-            <a:avLst/>
-          </a:prstGeom>
-          <a:noFill/>
-          <a:ln/>
-        </p:spPr>
-        <p:txBody>
-          <a:bodyPr wrap="square" rtlCol="0" anchor="ctr"/>
-          <a:lstStyle/>
-          <a:p>
-            <a:pPr algn="ctr" indent="0" marL="0">
-              <a:buNone/>
-            </a:pPr>
-            <a:r>
-              <a:rPr lang="en-US" sz="1100" dirty="0">
+              <a:rPr lang="en-US" sz="1000" dirty="0">
                 <a:solidFill>
                   <a:srgbClr val="8E8E9A"/>
                 </a:solidFill>
@@ -10137,22 +10258,22 @@
                 <a:ea typeface="Malgun Gothic" pitchFamily="34" charset="-122"/>
                 <a:cs typeface="Malgun Gothic" pitchFamily="34" charset="-120"/>
               </a:rPr>
-              <a:t>Knip 정적 분석 / 불필요한 exports 전수 제거</a:t>
-            </a:r>
-            <a:endParaRPr lang="en-US" sz="1100" dirty="0"/>
-          </a:p>
-        </p:txBody>
-      </p:sp>
-      <p:sp>
-        <p:nvSpPr>
-          <p:cNvPr id="30" name="Shape 28"/>
-          <p:cNvSpPr/>
-          <p:nvPr/>
-        </p:nvSpPr>
-        <p:spPr>
-          <a:xfrm>
-            <a:off x="6675120" y="3712464"/>
-            <a:ext cx="5349240" cy="594360"/>
+              <a:t>Knip 정적 분석 / 미사용 파일 전수 제거</a:t>
+            </a:r>
+            <a:endParaRPr lang="en-US" sz="1000" dirty="0"/>
+          </a:p>
+        </p:txBody>
+      </p:sp>
+      <p:sp>
+        <p:nvSpPr>
+          <p:cNvPr id="32" name="Shape 29"/>
+          <p:cNvSpPr/>
+          <p:nvPr/>
+        </p:nvSpPr>
+        <p:spPr>
+          <a:xfrm>
+            <a:off x="6675120" y="4407408"/>
+            <a:ext cx="5349240" cy="566928"/>
           </a:xfrm>
           <a:prstGeom prst="rect">
             <a:avLst/>
@@ -10170,14 +10291,14 @@
       </p:sp>
       <p:sp>
         <p:nvSpPr>
-          <p:cNvPr id="31" name="Shape 29"/>
-          <p:cNvSpPr/>
-          <p:nvPr/>
-        </p:nvSpPr>
-        <p:spPr>
-          <a:xfrm>
-            <a:off x="6675120" y="3712464"/>
-            <a:ext cx="64008" cy="594360"/>
+          <p:cNvPr id="33" name="Shape 30"/>
+          <p:cNvSpPr/>
+          <p:nvPr/>
+        </p:nvSpPr>
+        <p:spPr>
+          <a:xfrm>
+            <a:off x="6675120" y="4407408"/>
+            <a:ext cx="64008" cy="566928"/>
           </a:xfrm>
           <a:prstGeom prst="rect">
             <a:avLst/>
@@ -10195,30 +10316,30 @@
       </p:sp>
       <p:sp>
         <p:nvSpPr>
-          <p:cNvPr id="32" name="Text 30"/>
-          <p:cNvSpPr/>
-          <p:nvPr/>
-        </p:nvSpPr>
-        <p:spPr>
-          <a:xfrm>
-            <a:off x="6931152" y="3776472"/>
-            <a:ext cx="5001768" cy="475488"/>
-          </a:xfrm>
-          <a:prstGeom prst="rect">
-            <a:avLst/>
-          </a:prstGeom>
-          <a:noFill/>
-          <a:ln/>
-        </p:spPr>
-        <p:txBody>
-          <a:bodyPr wrap="square" rtlCol="0" anchor="ctr"/>
-          <a:lstStyle/>
-          <a:p>
-            <a:pPr indent="0" marL="0">
-              <a:buNone/>
-            </a:pPr>
-            <a:r>
-              <a:rPr lang="en-US" sz="1100" dirty="0">
+          <p:cNvPr id="34" name="Text 31"/>
+          <p:cNvSpPr/>
+          <p:nvPr/>
+        </p:nvSpPr>
+        <p:spPr>
+          <a:xfrm>
+            <a:off x="6931152" y="4462272"/>
+            <a:ext cx="5001768" cy="457200"/>
+          </a:xfrm>
+          <a:prstGeom prst="rect">
+            <a:avLst/>
+          </a:prstGeom>
+          <a:noFill/>
+          <a:ln/>
+        </p:spPr>
+        <p:txBody>
+          <a:bodyPr wrap="square" rtlCol="0" anchor="ctr"/>
+          <a:lstStyle/>
+          <a:p>
+            <a:pPr indent="0" marL="0">
+              <a:buNone/>
+            </a:pPr>
+            <a:r>
+              <a:rPr lang="en-US" sz="1050" dirty="0">
                 <a:solidFill>
                   <a:srgbClr val="F4F4F6"/>
                 </a:solidFill>
@@ -10228,20 +10349,20 @@
               </a:rPr>
               <a:t>고객 문의 감소 및 업로드 UX 개선</a:t>
             </a:r>
-            <a:endParaRPr lang="en-US" sz="1100" dirty="0"/>
-          </a:p>
-        </p:txBody>
-      </p:sp>
-      <p:sp>
-        <p:nvSpPr>
-          <p:cNvPr id="33" name="Shape 31"/>
-          <p:cNvSpPr/>
-          <p:nvPr/>
-        </p:nvSpPr>
-        <p:spPr>
-          <a:xfrm>
-            <a:off x="6675120" y="4425696"/>
-            <a:ext cx="5349240" cy="594360"/>
+            <a:endParaRPr lang="en-US" sz="1050" dirty="0"/>
+          </a:p>
+        </p:txBody>
+      </p:sp>
+      <p:sp>
+        <p:nvSpPr>
+          <p:cNvPr id="35" name="Shape 32"/>
+          <p:cNvSpPr/>
+          <p:nvPr/>
+        </p:nvSpPr>
+        <p:spPr>
+          <a:xfrm>
+            <a:off x="6675120" y="5065776"/>
+            <a:ext cx="5349240" cy="566928"/>
           </a:xfrm>
           <a:prstGeom prst="rect">
             <a:avLst/>
@@ -10259,14 +10380,14 @@
       </p:sp>
       <p:sp>
         <p:nvSpPr>
-          <p:cNvPr id="34" name="Shape 32"/>
-          <p:cNvSpPr/>
-          <p:nvPr/>
-        </p:nvSpPr>
-        <p:spPr>
-          <a:xfrm>
-            <a:off x="6675120" y="4425696"/>
-            <a:ext cx="64008" cy="594360"/>
+          <p:cNvPr id="36" name="Shape 33"/>
+          <p:cNvSpPr/>
+          <p:nvPr/>
+        </p:nvSpPr>
+        <p:spPr>
+          <a:xfrm>
+            <a:off x="6675120" y="5065776"/>
+            <a:ext cx="64008" cy="566928"/>
           </a:xfrm>
           <a:prstGeom prst="rect">
             <a:avLst/>
@@ -10284,30 +10405,30 @@
       </p:sp>
       <p:sp>
         <p:nvSpPr>
-          <p:cNvPr id="35" name="Text 33"/>
-          <p:cNvSpPr/>
-          <p:nvPr/>
-        </p:nvSpPr>
-        <p:spPr>
-          <a:xfrm>
-            <a:off x="6931152" y="4489704"/>
-            <a:ext cx="5001768" cy="475488"/>
-          </a:xfrm>
-          <a:prstGeom prst="rect">
-            <a:avLst/>
-          </a:prstGeom>
-          <a:noFill/>
-          <a:ln/>
-        </p:spPr>
-        <p:txBody>
-          <a:bodyPr wrap="square" rtlCol="0" anchor="ctr"/>
-          <a:lstStyle/>
-          <a:p>
-            <a:pPr indent="0" marL="0">
-              <a:buNone/>
-            </a:pPr>
-            <a:r>
-              <a:rPr lang="en-US" sz="1100" dirty="0">
+          <p:cNvPr id="37" name="Text 34"/>
+          <p:cNvSpPr/>
+          <p:nvPr/>
+        </p:nvSpPr>
+        <p:spPr>
+          <a:xfrm>
+            <a:off x="6931152" y="5120640"/>
+            <a:ext cx="5001768" cy="457200"/>
+          </a:xfrm>
+          <a:prstGeom prst="rect">
+            <a:avLst/>
+          </a:prstGeom>
+          <a:noFill/>
+          <a:ln/>
+        </p:spPr>
+        <p:txBody>
+          <a:bodyPr wrap="square" rtlCol="0" anchor="ctr"/>
+          <a:lstStyle/>
+          <a:p>
+            <a:pPr indent="0" marL="0">
+              <a:buNone/>
+            </a:pPr>
+            <a:r>
+              <a:rPr lang="en-US" sz="1050" dirty="0">
                 <a:solidFill>
                   <a:srgbClr val="F4F4F6"/>
                 </a:solidFill>
@@ -10317,13 +10438,13 @@
               </a:rPr>
               <a:t>팀원 온보딩·협업 효율성 강화</a:t>
             </a:r>
-            <a:endParaRPr lang="en-US" sz="1100" dirty="0"/>
-          </a:p>
-        </p:txBody>
-      </p:sp>
-      <p:sp>
-        <p:nvSpPr>
-          <p:cNvPr id="36" name="Shape 34"/>
+            <a:endParaRPr lang="en-US" sz="1050" dirty="0"/>
+          </a:p>
+        </p:txBody>
+      </p:sp>
+      <p:sp>
+        <p:nvSpPr>
+          <p:cNvPr id="38" name="Shape 35"/>
           <p:cNvSpPr/>
           <p:nvPr/>
         </p:nvSpPr>
@@ -10348,7 +10469,7 @@
       </p:sp>
       <p:sp>
         <p:nvSpPr>
-          <p:cNvPr id="37" name="Text 35"/>
+          <p:cNvPr id="39" name="Text 36"/>
           <p:cNvSpPr/>
           <p:nvPr/>
         </p:nvSpPr>
@@ -11042,16 +11163,62 @@
           </a:p>
         </p:txBody>
       </p:sp>
-      <p:sp>
-        <p:nvSpPr>
-          <p:cNvPr id="21" name="Shape 19"/>
-          <p:cNvSpPr/>
-          <p:nvPr/>
-        </p:nvSpPr>
-        <p:spPr>
-          <a:xfrm>
-            <a:off x="6675120" y="1298448"/>
-            <a:ext cx="5349240" cy="2231136"/>
+      <p:pic>
+        <p:nvPicPr>
+          <p:cNvPr id="21" name="Image 0" descr="/Users/jinwon/Desktop/jinwon-portfolio/apps/web/public/images/projects/customer-1.png">    </p:cNvPr>
+          <p:cNvPicPr>
+            <a:picLocks noChangeAspect="1"/>
+          </p:cNvPicPr>
+          <p:nvPr/>
+        </p:nvPicPr>
+        <p:blipFill>
+          <a:blip r:embed="rId1"/>
+          <a:stretch>
+            <a:fillRect/>
+          </a:stretch>
+        </p:blipFill>
+        <p:spPr>
+          <a:xfrm>
+            <a:off x="7722108" y="1298448"/>
+            <a:ext cx="3255264" cy="1828800"/>
+          </a:xfrm>
+          <a:prstGeom prst="rect">
+            <a:avLst/>
+          </a:prstGeom>
+        </p:spPr>
+      </p:pic>
+      <p:sp>
+        <p:nvSpPr>
+          <p:cNvPr id="22" name="Shape 19"/>
+          <p:cNvSpPr/>
+          <p:nvPr/>
+        </p:nvSpPr>
+        <p:spPr>
+          <a:xfrm>
+            <a:off x="7722108" y="1298448"/>
+            <a:ext cx="3255264" cy="1828800"/>
+          </a:xfrm>
+          <a:prstGeom prst="rect">
+            <a:avLst/>
+          </a:prstGeom>
+          <a:ln w="12700">
+            <a:solidFill>
+              <a:srgbClr val="1C1C27"/>
+            </a:solidFill>
+            <a:prstDash val="solid"/>
+          </a:ln>
+        </p:spPr>
+      </p:sp>
+      <p:sp>
+        <p:nvSpPr>
+          <p:cNvPr id="23" name="Shape 20"/>
+          <p:cNvSpPr/>
+          <p:nvPr/>
+        </p:nvSpPr>
+        <p:spPr>
+          <a:xfrm>
+            <a:off x="6675120" y="3236976"/>
+            <a:ext cx="5349240" cy="1078992"/>
           </a:xfrm>
           <a:prstGeom prst="rect">
             <a:avLst/>
@@ -11069,14 +11236,14 @@
       </p:sp>
       <p:sp>
         <p:nvSpPr>
-          <p:cNvPr id="22" name="Shape 20"/>
-          <p:cNvSpPr/>
-          <p:nvPr/>
-        </p:nvSpPr>
-        <p:spPr>
-          <a:xfrm>
-            <a:off x="6675120" y="1298448"/>
-            <a:ext cx="64008" cy="2231136"/>
+          <p:cNvPr id="24" name="Shape 21"/>
+          <p:cNvSpPr/>
+          <p:nvPr/>
+        </p:nvSpPr>
+        <p:spPr>
+          <a:xfrm>
+            <a:off x="6675120" y="3236976"/>
+            <a:ext cx="64008" cy="1078992"/>
           </a:xfrm>
           <a:prstGeom prst="rect">
             <a:avLst/>
@@ -11094,14 +11261,14 @@
       </p:sp>
       <p:sp>
         <p:nvSpPr>
-          <p:cNvPr id="23" name="Text 21"/>
-          <p:cNvSpPr/>
-          <p:nvPr/>
-        </p:nvSpPr>
-        <p:spPr>
-          <a:xfrm>
-            <a:off x="6931152" y="1463040"/>
-            <a:ext cx="5001768" cy="1188720"/>
+          <p:cNvPr id="25" name="Text 22"/>
+          <p:cNvSpPr/>
+          <p:nvPr/>
+        </p:nvSpPr>
+        <p:spPr>
+          <a:xfrm>
+            <a:off x="6931152" y="3310128"/>
+            <a:ext cx="5001768" cy="658368"/>
           </a:xfrm>
           <a:prstGeom prst="rect">
             <a:avLst/>
@@ -11117,7 +11284,7 @@
               <a:buNone/>
             </a:pPr>
             <a:r>
-              <a:rPr lang="en-US" sz="4600" b="1" dirty="0">
+              <a:rPr lang="en-US" sz="3800" b="1" dirty="0">
                 <a:solidFill>
                   <a:srgbClr val="818CF8"/>
                 </a:solidFill>
@@ -11127,20 +11294,20 @@
               </a:rPr>
               <a:t>FE 2인</a:t>
             </a:r>
-            <a:endParaRPr lang="en-US" sz="4600" dirty="0"/>
-          </a:p>
-        </p:txBody>
-      </p:sp>
-      <p:sp>
-        <p:nvSpPr>
-          <p:cNvPr id="24" name="Text 22"/>
-          <p:cNvSpPr/>
-          <p:nvPr/>
-        </p:nvSpPr>
-        <p:spPr>
-          <a:xfrm>
-            <a:off x="6931152" y="2651760"/>
-            <a:ext cx="5001768" cy="329184"/>
+            <a:endParaRPr lang="en-US" sz="3800" dirty="0"/>
+          </a:p>
+        </p:txBody>
+      </p:sp>
+      <p:sp>
+        <p:nvSpPr>
+          <p:cNvPr id="26" name="Text 23"/>
+          <p:cNvSpPr/>
+          <p:nvPr/>
+        </p:nvSpPr>
+        <p:spPr>
+          <a:xfrm>
+            <a:off x="6931152" y="4059936"/>
+            <a:ext cx="5001768" cy="219456"/>
           </a:xfrm>
           <a:prstGeom prst="rect">
             <a:avLst/>
@@ -11156,7 +11323,7 @@
               <a:buNone/>
             </a:pPr>
             <a:r>
-              <a:rPr lang="en-US" sz="1100" dirty="0">
+              <a:rPr lang="en-US" sz="1000" dirty="0">
                 <a:solidFill>
                   <a:srgbClr val="8E8E9A"/>
                 </a:solidFill>
@@ -11166,20 +11333,20 @@
               </a:rPr>
               <a:t>설계 → 배포 전 과정 주도</a:t>
             </a:r>
-            <a:endParaRPr lang="en-US" sz="1100" dirty="0"/>
-          </a:p>
-        </p:txBody>
-      </p:sp>
-      <p:sp>
-        <p:nvSpPr>
-          <p:cNvPr id="25" name="Shape 23"/>
-          <p:cNvSpPr/>
-          <p:nvPr/>
-        </p:nvSpPr>
-        <p:spPr>
-          <a:xfrm>
-            <a:off x="6675120" y="3712464"/>
-            <a:ext cx="5349240" cy="594360"/>
+            <a:endParaRPr lang="en-US" sz="1000" dirty="0"/>
+          </a:p>
+        </p:txBody>
+      </p:sp>
+      <p:sp>
+        <p:nvSpPr>
+          <p:cNvPr id="27" name="Shape 24"/>
+          <p:cNvSpPr/>
+          <p:nvPr/>
+        </p:nvSpPr>
+        <p:spPr>
+          <a:xfrm>
+            <a:off x="6675120" y="4407408"/>
+            <a:ext cx="5349240" cy="566928"/>
           </a:xfrm>
           <a:prstGeom prst="rect">
             <a:avLst/>
@@ -11197,14 +11364,14 @@
       </p:sp>
       <p:sp>
         <p:nvSpPr>
-          <p:cNvPr id="26" name="Shape 24"/>
-          <p:cNvSpPr/>
-          <p:nvPr/>
-        </p:nvSpPr>
-        <p:spPr>
-          <a:xfrm>
-            <a:off x="6675120" y="3712464"/>
-            <a:ext cx="64008" cy="594360"/>
+          <p:cNvPr id="28" name="Shape 25"/>
+          <p:cNvSpPr/>
+          <p:nvPr/>
+        </p:nvSpPr>
+        <p:spPr>
+          <a:xfrm>
+            <a:off x="6675120" y="4407408"/>
+            <a:ext cx="64008" cy="566928"/>
           </a:xfrm>
           <a:prstGeom prst="rect">
             <a:avLst/>
@@ -11222,30 +11389,30 @@
       </p:sp>
       <p:sp>
         <p:nvSpPr>
-          <p:cNvPr id="27" name="Text 25"/>
-          <p:cNvSpPr/>
-          <p:nvPr/>
-        </p:nvSpPr>
-        <p:spPr>
-          <a:xfrm>
-            <a:off x="6931152" y="3776472"/>
-            <a:ext cx="5001768" cy="475488"/>
-          </a:xfrm>
-          <a:prstGeom prst="rect">
-            <a:avLst/>
-          </a:prstGeom>
-          <a:noFill/>
-          <a:ln/>
-        </p:spPr>
-        <p:txBody>
-          <a:bodyPr wrap="square" rtlCol="0" anchor="ctr"/>
-          <a:lstStyle/>
-          <a:p>
-            <a:pPr indent="0" marL="0">
-              <a:buNone/>
-            </a:pPr>
-            <a:r>
-              <a:rPr lang="en-US" sz="1100" dirty="0">
+          <p:cNvPr id="29" name="Text 26"/>
+          <p:cNvSpPr/>
+          <p:nvPr/>
+        </p:nvSpPr>
+        <p:spPr>
+          <a:xfrm>
+            <a:off x="6931152" y="4462272"/>
+            <a:ext cx="5001768" cy="457200"/>
+          </a:xfrm>
+          <a:prstGeom prst="rect">
+            <a:avLst/>
+          </a:prstGeom>
+          <a:noFill/>
+          <a:ln/>
+        </p:spPr>
+        <p:txBody>
+          <a:bodyPr wrap="square" rtlCol="0" anchor="ctr"/>
+          <a:lstStyle/>
+          <a:p>
+            <a:pPr indent="0" marL="0">
+              <a:buNone/>
+            </a:pPr>
+            <a:r>
+              <a:rPr lang="en-US" sz="1050" dirty="0">
                 <a:solidFill>
                   <a:srgbClr val="F4F4F6"/>
                 </a:solidFill>
@@ -11255,20 +11422,20 @@
               </a:rPr>
               <a:t>대규모 관리 시스템 0→1 구축 전 과정 경험</a:t>
             </a:r>
-            <a:endParaRPr lang="en-US" sz="1100" dirty="0"/>
-          </a:p>
-        </p:txBody>
-      </p:sp>
-      <p:sp>
-        <p:nvSpPr>
-          <p:cNvPr id="28" name="Shape 26"/>
-          <p:cNvSpPr/>
-          <p:nvPr/>
-        </p:nvSpPr>
-        <p:spPr>
-          <a:xfrm>
-            <a:off x="6675120" y="4425696"/>
-            <a:ext cx="5349240" cy="594360"/>
+            <a:endParaRPr lang="en-US" sz="1050" dirty="0"/>
+          </a:p>
+        </p:txBody>
+      </p:sp>
+      <p:sp>
+        <p:nvSpPr>
+          <p:cNvPr id="30" name="Shape 27"/>
+          <p:cNvSpPr/>
+          <p:nvPr/>
+        </p:nvSpPr>
+        <p:spPr>
+          <a:xfrm>
+            <a:off x="6675120" y="5065776"/>
+            <a:ext cx="5349240" cy="566928"/>
           </a:xfrm>
           <a:prstGeom prst="rect">
             <a:avLst/>
@@ -11286,14 +11453,14 @@
       </p:sp>
       <p:sp>
         <p:nvSpPr>
-          <p:cNvPr id="29" name="Shape 27"/>
-          <p:cNvSpPr/>
-          <p:nvPr/>
-        </p:nvSpPr>
-        <p:spPr>
-          <a:xfrm>
-            <a:off x="6675120" y="4425696"/>
-            <a:ext cx="64008" cy="594360"/>
+          <p:cNvPr id="31" name="Shape 28"/>
+          <p:cNvSpPr/>
+          <p:nvPr/>
+        </p:nvSpPr>
+        <p:spPr>
+          <a:xfrm>
+            <a:off x="6675120" y="5065776"/>
+            <a:ext cx="64008" cy="566928"/>
           </a:xfrm>
           <a:prstGeom prst="rect">
             <a:avLst/>
@@ -11311,30 +11478,30 @@
       </p:sp>
       <p:sp>
         <p:nvSpPr>
-          <p:cNvPr id="30" name="Text 28"/>
-          <p:cNvSpPr/>
-          <p:nvPr/>
-        </p:nvSpPr>
-        <p:spPr>
-          <a:xfrm>
-            <a:off x="6931152" y="4489704"/>
-            <a:ext cx="5001768" cy="475488"/>
-          </a:xfrm>
-          <a:prstGeom prst="rect">
-            <a:avLst/>
-          </a:prstGeom>
-          <a:noFill/>
-          <a:ln/>
-        </p:spPr>
-        <p:txBody>
-          <a:bodyPr wrap="square" rtlCol="0" anchor="ctr"/>
-          <a:lstStyle/>
-          <a:p>
-            <a:pPr indent="0" marL="0">
-              <a:buNone/>
-            </a:pPr>
-            <a:r>
-              <a:rPr lang="en-US" sz="1100" dirty="0">
+          <p:cNvPr id="32" name="Text 29"/>
+          <p:cNvSpPr/>
+          <p:nvPr/>
+        </p:nvSpPr>
+        <p:spPr>
+          <a:xfrm>
+            <a:off x="6931152" y="5120640"/>
+            <a:ext cx="5001768" cy="457200"/>
+          </a:xfrm>
+          <a:prstGeom prst="rect">
+            <a:avLst/>
+          </a:prstGeom>
+          <a:noFill/>
+          <a:ln/>
+        </p:spPr>
+        <p:txBody>
+          <a:bodyPr wrap="square" rtlCol="0" anchor="ctr"/>
+          <a:lstStyle/>
+          <a:p>
+            <a:pPr indent="0" marL="0">
+              <a:buNone/>
+            </a:pPr>
+            <a:r>
+              <a:rPr lang="en-US" sz="1050" dirty="0">
                 <a:solidFill>
                   <a:srgbClr val="F4F4F6"/>
                 </a:solidFill>
@@ -11344,13 +11511,13 @@
               </a:rPr>
               <a:t>운영자 피드백 기반 직관적 환경 완성</a:t>
             </a:r>
-            <a:endParaRPr lang="en-US" sz="1100" dirty="0"/>
-          </a:p>
-        </p:txBody>
-      </p:sp>
-      <p:sp>
-        <p:nvSpPr>
-          <p:cNvPr id="31" name="Shape 29"/>
+            <a:endParaRPr lang="en-US" sz="1050" dirty="0"/>
+          </a:p>
+        </p:txBody>
+      </p:sp>
+      <p:sp>
+        <p:nvSpPr>
+          <p:cNvPr id="33" name="Shape 30"/>
           <p:cNvSpPr/>
           <p:nvPr/>
         </p:nvSpPr>
@@ -11375,7 +11542,7 @@
       </p:sp>
       <p:sp>
         <p:nvSpPr>
-          <p:cNvPr id="32" name="Text 30"/>
+          <p:cNvPr id="34" name="Text 31"/>
           <p:cNvSpPr/>
           <p:nvPr/>
         </p:nvSpPr>

--- a/apps/web/public/portfolio.pptx
+++ b/apps/web/public/portfolio.pptx
@@ -6574,7 +6574,24 @@
                 <a:ea typeface="Malgun Gothic" pitchFamily="34" charset="-122"/>
                 <a:cs typeface="Malgun Gothic" pitchFamily="34" charset="-120"/>
               </a:rPr>
-              <a:t>50%</a:t>
+              <a:t>WebView</a:t>
+            </a:r>
+            <a:endParaRPr lang="en-US" sz="6400" dirty="0"/>
+          </a:p>
+          <a:p>
+            <a:pPr algn="ctr" indent="0" marL="0">
+              <a:buNone/>
+            </a:pPr>
+            <a:r>
+              <a:rPr lang="en-US" sz="6400" b="1" dirty="0">
+                <a:solidFill>
+                  <a:srgbClr val="818CF8"/>
+                </a:solidFill>
+                <a:latin typeface="Malgun Gothic" pitchFamily="34" charset="0"/>
+                <a:ea typeface="Malgun Gothic" pitchFamily="34" charset="-122"/>
+                <a:cs typeface="Malgun Gothic" pitchFamily="34" charset="-120"/>
+              </a:rPr>
+              <a:t>+Native</a:t>
             </a:r>
             <a:endParaRPr lang="en-US" sz="6400" dirty="0"/>
           </a:p>
@@ -6636,7 +6653,7 @@
                 <a:ea typeface="Malgun Gothic" pitchFamily="34" charset="-122"/>
                 <a:cs typeface="Malgun Gothic" pitchFamily="34" charset="-120"/>
               </a:rPr>
-              <a:t>개발·운영 공수 절감</a:t>
+              <a:t>역할 명확히 분리, 유지보수 기반 확립</a:t>
             </a:r>
             <a:endParaRPr lang="en-US" sz="1300" dirty="0"/>
           </a:p>
@@ -6675,7 +6692,7 @@
                 <a:ea typeface="Malgun Gothic" pitchFamily="34" charset="-122"/>
                 <a:cs typeface="Malgun Gothic" pitchFamily="34" charset="-120"/>
               </a:rPr>
-              <a:t>015 삐삐 앱 하이브리드 구조</a:t>
+              <a:t>015 삐삐 앱 — 전 기능 WebView → 구조 설계</a:t>
             </a:r>
             <a:endParaRPr lang="en-US" sz="950" dirty="0"/>
           </a:p>
@@ -8587,7 +8604,7 @@
                 <a:ea typeface="Malgun Gothic" pitchFamily="34" charset="-122"/>
                 <a:cs typeface="Malgun Gothic" pitchFamily="34" charset="-120"/>
               </a:rPr>
-              <a:t>Flutter · Expo · 순수 RN 세 가지 검토. Expo는 FCM·인앱결제에서 ejection이 불가피했고, Flutter는 Dart 언어 학습 비용 이슈. 기존 React 경험을 활용하면서 Native 완전 제어권을 확보할 수 있는 순수 RN 0.81 선택.</a:t>
+              <a:t>Flutter · Expo · 순수 RN 세 가지 검토 후 순수 RN 선택. 기존 서비스는 전 기능을 WebView로만 구성해 Native 제어가 불가했음 — 콘텐츠는 WebView로 운영하되, FCM·인앱결제·딥링크 등 핵심 기능은 Native로 명확히 분리해 유지보수 기반 확립 및 향후 Native 기능 심화 가능.</a:t>
             </a:r>
             <a:endParaRPr lang="en-US" sz="1150" dirty="0"/>
           </a:p>
@@ -9093,7 +9110,7 @@
                 <a:ea typeface="Malgun Gothic" pitchFamily="34" charset="-122"/>
                 <a:cs typeface="Malgun Gothic" pitchFamily="34" charset="-120"/>
               </a:rPr>
-              <a:t>하이브리드 구조로 콘텐츠 업데이트 시 앱 재배포 없이 즉시 반영</a:t>
+              <a:t>WebView/Native 역할 분리로 유지보수 구조 확립, Native 기능 확장 용이</a:t>
             </a:r>
             <a:endParaRPr lang="en-US" sz="1050" dirty="0"/>
           </a:p>
@@ -10699,7 +10716,7 @@
                 <a:ea typeface="Malgun Gothic" pitchFamily="34" charset="-122"/>
                 <a:cs typeface="Malgun Gothic" pitchFamily="34" charset="-120"/>
               </a:rPr>
-              <a:t>기존 노후 관리자 시스템을 대체하는 차세대 운영 플랫폼 — FE 2인 주도 신규 구축</a:t>
+              <a:t>수동 고객 충전 프로세스 자동화 및 전송량 대시보드 신규 구축</a:t>
             </a:r>
             <a:endParaRPr lang="en-US" sz="1050" dirty="0"/>
           </a:p>
@@ -10914,7 +10931,7 @@
                 <a:ea typeface="Malgun Gothic" pitchFamily="34" charset="-122"/>
                 <a:cs typeface="Malgun Gothic" pitchFamily="34" charset="-120"/>
               </a:rPr>
-              <a:t>FE 2인이 초기 아키텍처 설계부터 배포까지 전 과정 주도. 기존 시스템 대체를 위해 처음부터 설계·개발한 대규모 운영 관리 플랫폼.</a:t>
+              <a:t>기존 고객 충전 프로세스가 전부 수동 운영 — 담당자가 직접 처리해야 해 누락·오류 발생. 전송량 통계도 별도 요청 없이는 고객이 직접 확인 불가능.</a:t>
             </a:r>
             <a:endParaRPr lang="en-US" sz="1150" dirty="0"/>
           </a:p>
@@ -11040,7 +11057,7 @@
                 <a:ea typeface="Malgun Gothic" pitchFamily="34" charset="-122"/>
                 <a:cs typeface="Malgun Gothic" pitchFamily="34" charset="-120"/>
               </a:rPr>
-              <a:t>•  FE 아키텍처 설계 및 기술 스택 선정 주도 — 팀 컨벤션·폴더 구조·API 모델 협의까지</a:t>
+              <a:t>•  고객 충전 프로세스 자동화 개발 — 수동 업무 제거 및 처리 정확도 향상</a:t>
             </a:r>
             <a:endParaRPr lang="en-US" sz="1150" dirty="0"/>
           </a:p>
@@ -11079,7 +11096,7 @@
                 <a:ea typeface="Malgun Gothic" pitchFamily="34" charset="-122"/>
                 <a:cs typeface="Malgun Gothic" pitchFamily="34" charset="-120"/>
               </a:rPr>
-              <a:t>•  DnD Kit 위젯 대시보드 구현 — 운영자가 드래그로 직접 레이아웃 커스터마이징 가능</a:t>
+              <a:t>•  전송량 조회·현황 대시보드 구현 — DnD Kit 위젯으로 고객이 직접 레이아웃 커스터마이징</a:t>
             </a:r>
             <a:endParaRPr lang="en-US" sz="1150" dirty="0"/>
           </a:p>
@@ -11118,7 +11135,7 @@
                 <a:ea typeface="Malgun Gothic" pitchFamily="34" charset="-122"/>
                 <a:cs typeface="Malgun Gothic" pitchFamily="34" charset="-120"/>
               </a:rPr>
-              <a:t>•  Chart.js 실시간 통계 시각화 (월별 이용 현황·충전·정산) + ExcelJS 정산 내보내기</a:t>
+              <a:t>•  Chart.js 기반 월별/일별 전송량 통계 시각화 + ExcelJS 정산 데이터 내보내기</a:t>
             </a:r>
             <a:endParaRPr lang="en-US" sz="1150" dirty="0"/>
           </a:p>
@@ -11157,7 +11174,7 @@
                 <a:ea typeface="Malgun Gothic" pitchFamily="34" charset="-122"/>
                 <a:cs typeface="Malgun Gothic" pitchFamily="34" charset="-120"/>
               </a:rPr>
-              <a:t>•  공통 컴포넌트 라이브러리 구축 및 TanStack Table 기반 대용량 데이터 테이블</a:t>
+              <a:t>•  FE 아키텍처 설계 및 공통 컴포넌트 라이브러리 구축 — TanStack Table 대용량 처리</a:t>
             </a:r>
             <a:endParaRPr lang="en-US" sz="1150" dirty="0"/>
           </a:p>
@@ -11292,7 +11309,7 @@
                 <a:ea typeface="Malgun Gothic" pitchFamily="34" charset="-122"/>
                 <a:cs typeface="Malgun Gothic" pitchFamily="34" charset="-120"/>
               </a:rPr>
-              <a:t>FE 2인</a:t>
+              <a:t>수동→자동</a:t>
             </a:r>
             <a:endParaRPr lang="en-US" sz="3800" dirty="0"/>
           </a:p>
@@ -11331,7 +11348,7 @@
                 <a:ea typeface="Malgun Gothic" pitchFamily="34" charset="-122"/>
                 <a:cs typeface="Malgun Gothic" pitchFamily="34" charset="-120"/>
               </a:rPr>
-              <a:t>설계 → 배포 전 과정 주도</a:t>
+              <a:t>고객 충전 프로세스 전면 자동화</a:t>
             </a:r>
             <a:endParaRPr lang="en-US" sz="1000" dirty="0"/>
           </a:p>
@@ -11420,7 +11437,7 @@
                 <a:ea typeface="Malgun Gothic" pitchFamily="34" charset="-122"/>
                 <a:cs typeface="Malgun Gothic" pitchFamily="34" charset="-120"/>
               </a:rPr>
-              <a:t>대규모 관리 시스템 0→1 구축 전 과정 경험</a:t>
+              <a:t>수동 처리 제거로 누락·오류 방지 및 운영 공수 절감</a:t>
             </a:r>
             <a:endParaRPr lang="en-US" sz="1050" dirty="0"/>
           </a:p>
@@ -11509,7 +11526,7 @@
                 <a:ea typeface="Malgun Gothic" pitchFamily="34" charset="-122"/>
                 <a:cs typeface="Malgun Gothic" pitchFamily="34" charset="-120"/>
               </a:rPr>
-              <a:t>운영자 피드백 기반 직관적 환경 완성</a:t>
+              <a:t>전송량 실시간 대시보드로 고객 데이터 접근성 향상</a:t>
             </a:r>
             <a:endParaRPr lang="en-US" sz="1050" dirty="0"/>
           </a:p>

--- a/apps/web/public/portfolio.pptx
+++ b/apps/web/public/portfolio.pptx
@@ -2466,7 +2466,7 @@
                 <a:ea typeface="Malgun Gothic" pitchFamily="34" charset="-122"/>
                 <a:cs typeface="Malgun Gothic" pitchFamily="34" charset="-120"/>
               </a:rPr>
-              <a:t>5</a:t>
+              <a:t>3</a:t>
             </a:r>
             <a:endParaRPr lang="en-US" sz="16000" dirty="0"/>
           </a:p>
